--- a/assets/decks/episodio-11-dbt-mcp.pptx
+++ b/assets/decks/episodio-11-dbt-mcp.pptx
@@ -2,33 +2,33 @@
 <file path=ppt/presentation.xml><?xml version="1.0" encoding="utf-8"?>
 <p:presentation xmlns:p="http://schemas.openxmlformats.org/presentationml/2006/main">
   <p:sldMasterIdLst>
-    <p:sldMasterId xmlns:r="http://schemas.openxmlformats.org/officeDocument/2006/relationships" id="2147483648" r:id="R6fae2b3b7f064f5b"/>
-    <p:sldMasterId xmlns:r="http://schemas.openxmlformats.org/officeDocument/2006/relationships" id="2147483650" r:id="R72929f1b42704eb5"/>
+    <p:sldMasterId xmlns:r="http://schemas.openxmlformats.org/officeDocument/2006/relationships" id="2147483648" r:id="Rca30f559edc14b40"/>
+    <p:sldMasterId xmlns:r="http://schemas.openxmlformats.org/officeDocument/2006/relationships" id="2147483650" r:id="R06e6ccff9cc449f7"/>
   </p:sldMasterIdLst>
   <p:notesMasterIdLst>
-    <p:notesMasterId xmlns:r="http://schemas.openxmlformats.org/officeDocument/2006/relationships" r:id="R67e5b25dc3d04254"/>
+    <p:notesMasterId xmlns:r="http://schemas.openxmlformats.org/officeDocument/2006/relationships" r:id="Raf2c3d09a4814075"/>
   </p:notesMasterIdLst>
   <p:sldIdLst>
-    <p:sldId xmlns:r="http://schemas.openxmlformats.org/officeDocument/2006/relationships" id="256" r:id="Rd5be83d1e8564780"/>
-    <p:sldId xmlns:r="http://schemas.openxmlformats.org/officeDocument/2006/relationships" id="257" r:id="Rcedea19652924a23"/>
-    <p:sldId xmlns:r="http://schemas.openxmlformats.org/officeDocument/2006/relationships" id="258" r:id="R0a45f98d5ab64ed2"/>
-    <p:sldId xmlns:r="http://schemas.openxmlformats.org/officeDocument/2006/relationships" id="259" r:id="R57df0b3f56b54cf6"/>
-    <p:sldId xmlns:r="http://schemas.openxmlformats.org/officeDocument/2006/relationships" id="260" r:id="Rc0a976d567534f61"/>
-    <p:sldId xmlns:r="http://schemas.openxmlformats.org/officeDocument/2006/relationships" id="261" r:id="R0080c785b54247cc"/>
-    <p:sldId xmlns:r="http://schemas.openxmlformats.org/officeDocument/2006/relationships" id="262" r:id="R3c92b588325241e3"/>
-    <p:sldId xmlns:r="http://schemas.openxmlformats.org/officeDocument/2006/relationships" id="263" r:id="Rc54bf85d1ba54668"/>
-    <p:sldId xmlns:r="http://schemas.openxmlformats.org/officeDocument/2006/relationships" id="264" r:id="R4604b83c9c2f4c60"/>
-    <p:sldId xmlns:r="http://schemas.openxmlformats.org/officeDocument/2006/relationships" id="265" r:id="R59fcc648d72e40ac"/>
-    <p:sldId xmlns:r="http://schemas.openxmlformats.org/officeDocument/2006/relationships" id="266" r:id="R28f2e1df626f44cb"/>
-    <p:sldId xmlns:r="http://schemas.openxmlformats.org/officeDocument/2006/relationships" id="267" r:id="R414471bde7c1433f"/>
-    <p:sldId xmlns:r="http://schemas.openxmlformats.org/officeDocument/2006/relationships" id="268" r:id="R9c898740d62641a2"/>
-    <p:sldId xmlns:r="http://schemas.openxmlformats.org/officeDocument/2006/relationships" id="269" r:id="Rc2cb59efa57f4cdf"/>
-    <p:sldId xmlns:r="http://schemas.openxmlformats.org/officeDocument/2006/relationships" id="270" r:id="Rf853070c464741e1"/>
-    <p:sldId xmlns:r="http://schemas.openxmlformats.org/officeDocument/2006/relationships" id="271" r:id="Rfd4c629090884ba3"/>
-    <p:sldId xmlns:r="http://schemas.openxmlformats.org/officeDocument/2006/relationships" id="272" r:id="R58368c720552435a"/>
-    <p:sldId xmlns:r="http://schemas.openxmlformats.org/officeDocument/2006/relationships" id="273" r:id="R9a6086f018dd4601"/>
-    <p:sldId xmlns:r="http://schemas.openxmlformats.org/officeDocument/2006/relationships" id="274" r:id="R4eb44e43ee454ed1"/>
-    <p:sldId xmlns:r="http://schemas.openxmlformats.org/officeDocument/2006/relationships" id="275" r:id="Rc203937e6ba1419d"/>
+    <p:sldId xmlns:r="http://schemas.openxmlformats.org/officeDocument/2006/relationships" id="256" r:id="Rbaae7a27d0a84ca3"/>
+    <p:sldId xmlns:r="http://schemas.openxmlformats.org/officeDocument/2006/relationships" id="257" r:id="R0f6cbc87471e4ca9"/>
+    <p:sldId xmlns:r="http://schemas.openxmlformats.org/officeDocument/2006/relationships" id="258" r:id="Rcc3fe52b11a6499a"/>
+    <p:sldId xmlns:r="http://schemas.openxmlformats.org/officeDocument/2006/relationships" id="259" r:id="Rb45935e9cf414bc8"/>
+    <p:sldId xmlns:r="http://schemas.openxmlformats.org/officeDocument/2006/relationships" id="260" r:id="Rb20d7838ae204e81"/>
+    <p:sldId xmlns:r="http://schemas.openxmlformats.org/officeDocument/2006/relationships" id="261" r:id="R886324657ca541c5"/>
+    <p:sldId xmlns:r="http://schemas.openxmlformats.org/officeDocument/2006/relationships" id="262" r:id="Rf801a56b45dd4e50"/>
+    <p:sldId xmlns:r="http://schemas.openxmlformats.org/officeDocument/2006/relationships" id="263" r:id="Rc47d59b3b88b405d"/>
+    <p:sldId xmlns:r="http://schemas.openxmlformats.org/officeDocument/2006/relationships" id="264" r:id="R30240d2e2f924dd5"/>
+    <p:sldId xmlns:r="http://schemas.openxmlformats.org/officeDocument/2006/relationships" id="265" r:id="Rd8161075d0074499"/>
+    <p:sldId xmlns:r="http://schemas.openxmlformats.org/officeDocument/2006/relationships" id="266" r:id="Rf4caf2e08efb4edb"/>
+    <p:sldId xmlns:r="http://schemas.openxmlformats.org/officeDocument/2006/relationships" id="267" r:id="R7e845537224f4393"/>
+    <p:sldId xmlns:r="http://schemas.openxmlformats.org/officeDocument/2006/relationships" id="268" r:id="R59566901350a4e1a"/>
+    <p:sldId xmlns:r="http://schemas.openxmlformats.org/officeDocument/2006/relationships" id="269" r:id="R91596e54ea2943ee"/>
+    <p:sldId xmlns:r="http://schemas.openxmlformats.org/officeDocument/2006/relationships" id="270" r:id="R4acc6ae8e93f4786"/>
+    <p:sldId xmlns:r="http://schemas.openxmlformats.org/officeDocument/2006/relationships" id="271" r:id="R0ee335df6fed4a26"/>
+    <p:sldId xmlns:r="http://schemas.openxmlformats.org/officeDocument/2006/relationships" id="272" r:id="R80f1baf348c5451a"/>
+    <p:sldId xmlns:r="http://schemas.openxmlformats.org/officeDocument/2006/relationships" id="273" r:id="R041f318b10384f1b"/>
+    <p:sldId xmlns:r="http://schemas.openxmlformats.org/officeDocument/2006/relationships" id="274" r:id="Ref38ff74b3234f99"/>
+    <p:sldId xmlns:r="http://schemas.openxmlformats.org/officeDocument/2006/relationships" id="275" r:id="R680d925bbfec43c5"/>
   </p:sldIdLst>
   <p:sldSz cx="12192000" cy="6858000"/>
   <p:notesSz cx="6858000" cy="9144000"/>
@@ -462,7 +462,57 @@
           <a:lstStyle xmlns:a="http://schemas.openxmlformats.org/drawingml/2006/main"/>
           <a:p xmlns:a="http://schemas.openxmlformats.org/drawingml/2006/main">
             <a:r>
-              <a:t>Apresente o objetivo do EPISÓDIO 11 e conecte-o ao checkpoint executável. MCP não torna o agente confiável; torna a fronteira de contexto explícita.</a:t>
+              <a:t>[Roteiro recomendado]</a:t>
+            </a:r>
+          </a:p>
+          <a:p xmlns:a="http://schemas.openxmlformats.org/drawingml/2006/main">
+            <a:r>
+              <a:t>[Tempo sugerido: 00:45]</a:t>
+            </a:r>
+          </a:p>
+          <a:p xmlns:a="http://schemas.openxmlformats.org/drawingml/2006/main">
+            <a:r>
+              <a:t/>
+            </a:r>
+          </a:p>
+          <a:p xmlns:a="http://schemas.openxmlformats.org/drawingml/2006/main">
+            <a:r>
+              <a:t>Fala sugerida:</a:t>
+            </a:r>
+          </a:p>
+          <a:p xmlns:a="http://schemas.openxmlformats.org/drawingml/2006/main">
+            <a:r>
+              <a:t>Bem-vindo ao episódio 11 do dbt Moderno na Prática. Hoje vamos trabalhar o tema “dbt MCP: contexto governado para o agente”. Manifest, documentação e linhagem com mínimo privilégio. O objetivo não é apenas conhecer o conceito: vamos conectá-lo ao laboratório e terminar com uma evidência que você consegue reproduzir no seu próprio ambiente. Ao longo da aula, separe sempre o que é recurso aberto e estável daquilo que aparecerá apenas no Radar.</a:t>
+            </a:r>
+          </a:p>
+          <a:p xmlns:a="http://schemas.openxmlformats.org/drawingml/2006/main">
+            <a:r>
+              <a:t/>
+            </a:r>
+          </a:p>
+          <a:p xmlns:a="http://schemas.openxmlformats.org/drawingml/2006/main">
+            <a:r>
+              <a:t>O que destacar:</a:t>
+            </a:r>
+          </a:p>
+          <a:p xmlns:a="http://schemas.openxmlformats.org/drawingml/2006/main">
+            <a:r>
+              <a:t>- Apresente o título, situe o checkpoint 11 e deixe claro que a aula faz parte da trilha open/stable.</a:t>
+            </a:r>
+          </a:p>
+          <a:p xmlns:a="http://schemas.openxmlformats.org/drawingml/2006/main">
+            <a:r>
+              <a:t/>
+            </a:r>
+          </a:p>
+          <a:p xmlns:a="http://schemas.openxmlformats.org/drawingml/2006/main">
+            <a:r>
+              <a:t>Transição:</a:t>
+            </a:r>
+          </a:p>
+          <a:p xmlns:a="http://schemas.openxmlformats.org/drawingml/2006/main">
+            <a:r>
+              <a:t>Com esse ponto estabelecido, avance para “MCP não torna o agente confiável; torna a fronteira de contexto explícita.”.</a:t>
             </a:r>
           </a:p>
           <a:p xmlns:a="http://schemas.openxmlformats.org/drawingml/2006/main">
@@ -577,7 +627,57 @@
           <a:lstStyle xmlns:a="http://schemas.openxmlformats.org/drawingml/2006/main"/>
           <a:p xmlns:a="http://schemas.openxmlformats.org/drawingml/2006/main">
             <a:r>
-              <a:t>Use a composição para explicar visualmente: Manifest, docs e linhagem entram; SQL e codegen ficam fora. 5 tools de leitura Sem credencial cloud Negação testada</a:t>
+              <a:t>[Roteiro recomendado]</a:t>
+            </a:r>
+          </a:p>
+          <a:p xmlns:a="http://schemas.openxmlformats.org/drawingml/2006/main">
+            <a:r>
+              <a:t>[Tempo sugerido: 00:55]</a:t>
+            </a:r>
+          </a:p>
+          <a:p xmlns:a="http://schemas.openxmlformats.org/drawingml/2006/main">
+            <a:r>
+              <a:t/>
+            </a:r>
+          </a:p>
+          <a:p xmlns:a="http://schemas.openxmlformats.org/drawingml/2006/main">
+            <a:r>
+              <a:t>Fala sugerida:</a:t>
+            </a:r>
+          </a:p>
+          <a:p xmlns:a="http://schemas.openxmlformats.org/drawingml/2006/main">
+            <a:r>
+              <a:t>Agora vamos ler a ideia visualmente. Manifest, docs e linhagem entram; SQL e codegen ficam fora. Siga a composição na ordem mostrada e conecte permitido, Bloqueado, 5 tools de leitura, Sem credencial cloud e Negação testada. A imagem ou o fluxo não cria uma regra nova; ele torna visível a relação que acabamos de explicar. Use a disposição dos elementos para reforçar causa, dependência ou comparação.</a:t>
+            </a:r>
+          </a:p>
+          <a:p xmlns:a="http://schemas.openxmlformats.org/drawingml/2006/main">
+            <a:r>
+              <a:t/>
+            </a:r>
+          </a:p>
+          <a:p xmlns:a="http://schemas.openxmlformats.org/drawingml/2006/main">
+            <a:r>
+              <a:t>O que destacar:</a:t>
+            </a:r>
+          </a:p>
+          <a:p xmlns:a="http://schemas.openxmlformats.org/drawingml/2006/main">
+            <a:r>
+              <a:t>- Acompanhe o fluxo ou a comparação com o cursor e preserve a ordem de leitura do slide.</a:t>
+            </a:r>
+          </a:p>
+          <a:p xmlns:a="http://schemas.openxmlformats.org/drawingml/2006/main">
+            <a:r>
+              <a:t/>
+            </a:r>
+          </a:p>
+          <a:p xmlns:a="http://schemas.openxmlformats.org/drawingml/2006/main">
+            <a:r>
+              <a:t>Transição:</a:t>
+            </a:r>
+          </a:p>
+          <a:p xmlns:a="http://schemas.openxmlformats.org/drawingml/2006/main">
+            <a:r>
+              <a:t>Com esse ponto estabelecido, avance para “Contexto melhora antes da resposta”.</a:t>
             </a:r>
           </a:p>
           <a:p xmlns:a="http://schemas.openxmlformats.org/drawingml/2006/main">
@@ -692,7 +792,57 @@
           <a:lstStyle xmlns:a="http://schemas.openxmlformats.org/drawingml/2006/main"/>
           <a:p xmlns:a="http://schemas.openxmlformats.org/drawingml/2006/main">
             <a:r>
-              <a:t>O agente encontra owner, dependência e métrica sem inferir o schema bruto. Desenvolva os pontos: Manifest; Documentação; Linhagem; Métricas.</a:t>
+              <a:t>[Roteiro recomendado]</a:t>
+            </a:r>
+          </a:p>
+          <a:p xmlns:a="http://schemas.openxmlformats.org/drawingml/2006/main">
+            <a:r>
+              <a:t>[Tempo sugerido: 01:10]</a:t>
+            </a:r>
+          </a:p>
+          <a:p xmlns:a="http://schemas.openxmlformats.org/drawingml/2006/main">
+            <a:r>
+              <a:t/>
+            </a:r>
+          </a:p>
+          <a:p xmlns:a="http://schemas.openxmlformats.org/drawingml/2006/main">
+            <a:r>
+              <a:t>Fala sugerida:</a:t>
+            </a:r>
+          </a:p>
+          <a:p xmlns:a="http://schemas.openxmlformats.org/drawingml/2006/main">
+            <a:r>
+              <a:t>A mensagem principal deste slide é: O agente encontra owner, dependência e métrica sem inferir o schema bruto. Para tornar isso concreto, observe manifest, Documentação, Linhagem e Métricas. Esses pontos devem ser entendidos em conjunto; não são funcionalidades isoladas. No projeto, essa combinação transforma uma convenção informal em algo que pode ser revisado, testado ou consumido de maneira consistente.</a:t>
+            </a:r>
+          </a:p>
+          <a:p xmlns:a="http://schemas.openxmlformats.org/drawingml/2006/main">
+            <a:r>
+              <a:t/>
+            </a:r>
+          </a:p>
+          <a:p xmlns:a="http://schemas.openxmlformats.org/drawingml/2006/main">
+            <a:r>
+              <a:t>O que destacar:</a:t>
+            </a:r>
+          </a:p>
+          <a:p xmlns:a="http://schemas.openxmlformats.org/drawingml/2006/main">
+            <a:r>
+              <a:t>- Comece pelo título, leia a afirmação abaixo dele e depois desenvolva os itens sem repetir o texto palavra por palavra.</a:t>
+            </a:r>
+          </a:p>
+          <a:p xmlns:a="http://schemas.openxmlformats.org/drawingml/2006/main">
+            <a:r>
+              <a:t/>
+            </a:r>
+          </a:p>
+          <a:p xmlns:a="http://schemas.openxmlformats.org/drawingml/2006/main">
+            <a:r>
+              <a:t>Transição:</a:t>
+            </a:r>
+          </a:p>
+          <a:p xmlns:a="http://schemas.openxmlformats.org/drawingml/2006/main">
+            <a:r>
+              <a:t>Com esse ponto estabelecido, avance para “Contexto melhora antes da resposta”.</a:t>
             </a:r>
           </a:p>
           <a:p xmlns:a="http://schemas.openxmlformats.org/drawingml/2006/main">
@@ -807,7 +957,57 @@
           <a:lstStyle xmlns:a="http://schemas.openxmlformats.org/drawingml/2006/main"/>
           <a:p xmlns:a="http://schemas.openxmlformats.org/drawingml/2006/main">
             <a:r>
-              <a:t>Use a composição para explicar visualmente: O agente encontra owner, dependência e métrica sem inferir o schema bruto. Manifest Documentação Linhagem Métricas</a:t>
+              <a:t>[Roteiro recomendado]</a:t>
+            </a:r>
+          </a:p>
+          <a:p xmlns:a="http://schemas.openxmlformats.org/drawingml/2006/main">
+            <a:r>
+              <a:t>[Tempo sugerido: 00:55]</a:t>
+            </a:r>
+          </a:p>
+          <a:p xmlns:a="http://schemas.openxmlformats.org/drawingml/2006/main">
+            <a:r>
+              <a:t/>
+            </a:r>
+          </a:p>
+          <a:p xmlns:a="http://schemas.openxmlformats.org/drawingml/2006/main">
+            <a:r>
+              <a:t>Fala sugerida:</a:t>
+            </a:r>
+          </a:p>
+          <a:p xmlns:a="http://schemas.openxmlformats.org/drawingml/2006/main">
+            <a:r>
+              <a:t>Agora vamos ler a ideia visualmente. O agente encontra owner, dependência e métrica sem inferir o schema bruto. Siga a composição na ordem mostrada e conecte pergunta, Contexto, Plano e Resposta. A imagem ou o fluxo não cria uma regra nova; ele torna visível a relação que acabamos de explicar. Use a disposição dos elementos para reforçar causa, dependência ou comparação.</a:t>
+            </a:r>
+          </a:p>
+          <a:p xmlns:a="http://schemas.openxmlformats.org/drawingml/2006/main">
+            <a:r>
+              <a:t/>
+            </a:r>
+          </a:p>
+          <a:p xmlns:a="http://schemas.openxmlformats.org/drawingml/2006/main">
+            <a:r>
+              <a:t>O que destacar:</a:t>
+            </a:r>
+          </a:p>
+          <a:p xmlns:a="http://schemas.openxmlformats.org/drawingml/2006/main">
+            <a:r>
+              <a:t>- Acompanhe o fluxo ou a comparação com o cursor e preserve a ordem de leitura do slide.</a:t>
+            </a:r>
+          </a:p>
+          <a:p xmlns:a="http://schemas.openxmlformats.org/drawingml/2006/main">
+            <a:r>
+              <a:t/>
+            </a:r>
+          </a:p>
+          <a:p xmlns:a="http://schemas.openxmlformats.org/drawingml/2006/main">
+            <a:r>
+              <a:t>Transição:</a:t>
+            </a:r>
+          </a:p>
+          <a:p xmlns:a="http://schemas.openxmlformats.org/drawingml/2006/main">
+            <a:r>
+              <a:t>Com esse ponto estabelecido, avance para “Demonstração — execute”.</a:t>
             </a:r>
           </a:p>
           <a:p xmlns:a="http://schemas.openxmlformats.org/drawingml/2006/main">
@@ -922,7 +1122,57 @@
           <a:lstStyle xmlns:a="http://schemas.openxmlformats.org/drawingml/2006/main"/>
           <a:p xmlns:a="http://schemas.openxmlformats.org/drawingml/2006/main">
             <a:r>
-              <a:t>Execute python course.py checkpoint 11. Pause para o aluno acompanhar o terminal.</a:t>
+              <a:t>[Roteiro recomendado]</a:t>
+            </a:r>
+          </a:p>
+          <a:p xmlns:a="http://schemas.openxmlformats.org/drawingml/2006/main">
+            <a:r>
+              <a:t>[Tempo sugerido: 01:20]</a:t>
+            </a:r>
+          </a:p>
+          <a:p xmlns:a="http://schemas.openxmlformats.org/drawingml/2006/main">
+            <a:r>
+              <a:t/>
+            </a:r>
+          </a:p>
+          <a:p xmlns:a="http://schemas.openxmlformats.org/drawingml/2006/main">
+            <a:r>
+              <a:t>Fala sugerida:</a:t>
+            </a:r>
+          </a:p>
+          <a:p xmlns:a="http://schemas.openxmlformats.org/drawingml/2006/main">
+            <a:r>
+              <a:t>Agora vamos sair da explicação e comprovar o comportamento. Execute os comandos exatamente como aparecem: python course.py checkpoint 11. Não é necessário ativar o ambiente virtual manualmente; o launcher do curso seleciona o ambiente correto. Antes de avançar, confirme que o comando iniciou sem erro e dê tempo para o aluno acompanhar a mesma etapa.</a:t>
+            </a:r>
+          </a:p>
+          <a:p xmlns:a="http://schemas.openxmlformats.org/drawingml/2006/main">
+            <a:r>
+              <a:t/>
+            </a:r>
+          </a:p>
+          <a:p xmlns:a="http://schemas.openxmlformats.org/drawingml/2006/main">
+            <a:r>
+              <a:t>O que destacar:</a:t>
+            </a:r>
+          </a:p>
+          <a:p xmlns:a="http://schemas.openxmlformats.org/drawingml/2006/main">
+            <a:r>
+              <a:t>- Mostre o comando completo, execute uma linha por vez quando houver mais de uma e mantenha o terminal visível.</a:t>
+            </a:r>
+          </a:p>
+          <a:p xmlns:a="http://schemas.openxmlformats.org/drawingml/2006/main">
+            <a:r>
+              <a:t/>
+            </a:r>
+          </a:p>
+          <a:p xmlns:a="http://schemas.openxmlformats.org/drawingml/2006/main">
+            <a:r>
+              <a:t>Transição:</a:t>
+            </a:r>
+          </a:p>
+          <a:p xmlns:a="http://schemas.openxmlformats.org/drawingml/2006/main">
+            <a:r>
+              <a:t>Com esse ponto estabelecido, avance para “Demonstração — observe”.</a:t>
             </a:r>
           </a:p>
           <a:p xmlns:a="http://schemas.openxmlformats.org/drawingml/2006/main">
@@ -1037,7 +1287,57 @@
           <a:lstStyle xmlns:a="http://schemas.openxmlformats.org/drawingml/2006/main"/>
           <a:p xmlns:a="http://schemas.openxmlformats.org/drawingml/2006/main">
             <a:r>
-              <a:t>Durante a execução, destaque: Servidor local inicia; Cinco tools permitidas; SQL e codegen rejeitados.</a:t>
+              <a:t>[Roteiro recomendado]</a:t>
+            </a:r>
+          </a:p>
+          <a:p xmlns:a="http://schemas.openxmlformats.org/drawingml/2006/main">
+            <a:r>
+              <a:t>[Tempo sugerido: 01:10]</a:t>
+            </a:r>
+          </a:p>
+          <a:p xmlns:a="http://schemas.openxmlformats.org/drawingml/2006/main">
+            <a:r>
+              <a:t/>
+            </a:r>
+          </a:p>
+          <a:p xmlns:a="http://schemas.openxmlformats.org/drawingml/2006/main">
+            <a:r>
+              <a:t>Fala sugerida:</a:t>
+            </a:r>
+          </a:p>
+          <a:p xmlns:a="http://schemas.openxmlformats.org/drawingml/2006/main">
+            <a:r>
+              <a:t>Enquanto a execução acontece, não olhe apenas para a mensagem final. Observe servidor local inicia, Cinco tools permitidas e SQL e codegen rejeitados. Cada sinal responde a uma pergunta diferente sobre o pipeline. Se um deles divergir, interrompa a demonstração e investigue; o objetivo do hands-on é produzir evidência, não apenas chegar rapidamente a uma tela verde.</a:t>
+            </a:r>
+          </a:p>
+          <a:p xmlns:a="http://schemas.openxmlformats.org/drawingml/2006/main">
+            <a:r>
+              <a:t/>
+            </a:r>
+          </a:p>
+          <a:p xmlns:a="http://schemas.openxmlformats.org/drawingml/2006/main">
+            <a:r>
+              <a:t>O que destacar:</a:t>
+            </a:r>
+          </a:p>
+          <a:p xmlns:a="http://schemas.openxmlformats.org/drawingml/2006/main">
+            <a:r>
+              <a:t>- Marque cada observação quando ela aparecer no terminal ou no artifact correspondente.</a:t>
+            </a:r>
+          </a:p>
+          <a:p xmlns:a="http://schemas.openxmlformats.org/drawingml/2006/main">
+            <a:r>
+              <a:t/>
+            </a:r>
+          </a:p>
+          <a:p xmlns:a="http://schemas.openxmlformats.org/drawingml/2006/main">
+            <a:r>
+              <a:t>Transição:</a:t>
+            </a:r>
+          </a:p>
+          <a:p xmlns:a="http://schemas.openxmlformats.org/drawingml/2006/main">
+            <a:r>
+              <a:t>Com esse ponto estabelecido, avance para “RESULTADO ESPERADO”.</a:t>
             </a:r>
           </a:p>
           <a:p xmlns:a="http://schemas.openxmlformats.org/drawingml/2006/main">
@@ -1152,7 +1452,57 @@
           <a:lstStyle xmlns:a="http://schemas.openxmlformats.org/drawingml/2006/main"/>
           <a:p xmlns:a="http://schemas.openxmlformats.org/drawingml/2006/main">
             <a:r>
-              <a:t>Confirme o resultado esperado: MCP somente leitura validado. Se o valor divergir, não avance sem investigar.</a:t>
+              <a:t>[Roteiro recomendado]</a:t>
+            </a:r>
+          </a:p>
+          <a:p xmlns:a="http://schemas.openxmlformats.org/drawingml/2006/main">
+            <a:r>
+              <a:t>[Tempo sugerido: 00:45]</a:t>
+            </a:r>
+          </a:p>
+          <a:p xmlns:a="http://schemas.openxmlformats.org/drawingml/2006/main">
+            <a:r>
+              <a:t/>
+            </a:r>
+          </a:p>
+          <a:p xmlns:a="http://schemas.openxmlformats.org/drawingml/2006/main">
+            <a:r>
+              <a:t>Fala sugerida:</a:t>
+            </a:r>
+          </a:p>
+          <a:p xmlns:a="http://schemas.openxmlformats.org/drawingml/2006/main">
+            <a:r>
+              <a:t>Este é o ponto de parada da demonstração: MCP somente leitura validado. Esse resultado confirma que a etapa executada produziu a evidência esperada para o checkpoint 11. Se o valor, o status ou o artifact estiver diferente, não trate a divergência como detalhe de ambiente. Use o diagnóstico do curso e só avance quando a causa estiver compreendida.</a:t>
+            </a:r>
+          </a:p>
+          <a:p xmlns:a="http://schemas.openxmlformats.org/drawingml/2006/main">
+            <a:r>
+              <a:t/>
+            </a:r>
+          </a:p>
+          <a:p xmlns:a="http://schemas.openxmlformats.org/drawingml/2006/main">
+            <a:r>
+              <a:t>O que destacar:</a:t>
+            </a:r>
+          </a:p>
+          <a:p xmlns:a="http://schemas.openxmlformats.org/drawingml/2006/main">
+            <a:r>
+              <a:t>- Compare o resultado do terminal com a frase central do slide e registre a evidência antes de continuar.</a:t>
+            </a:r>
+          </a:p>
+          <a:p xmlns:a="http://schemas.openxmlformats.org/drawingml/2006/main">
+            <a:r>
+              <a:t/>
+            </a:r>
+          </a:p>
+          <a:p xmlns:a="http://schemas.openxmlformats.org/drawingml/2006/main">
+            <a:r>
+              <a:t>Transição:</a:t>
+            </a:r>
+          </a:p>
+          <a:p xmlns:a="http://schemas.openxmlformats.org/drawingml/2006/main">
+            <a:r>
+              <a:t>Com esse ponto estabelecido, avance para “O mesmo recurso afeta três decisões”.</a:t>
             </a:r>
           </a:p>
           <a:p xmlns:a="http://schemas.openxmlformats.org/drawingml/2006/main">
@@ -1267,7 +1617,57 @@
           <a:lstStyle xmlns:a="http://schemas.openxmlformats.org/drawingml/2006/main"/>
           <a:p xmlns:a="http://schemas.openxmlformats.org/drawingml/2006/main">
             <a:r>
-              <a:t>Conecte a técnica aos efeitos: Governança: mínimo privilégio; FinOps: menos tentativa; IA: contexto verificável. Não prometa economia sem medição.</a:t>
+              <a:t>[Roteiro recomendado]</a:t>
+            </a:r>
+          </a:p>
+          <a:p xmlns:a="http://schemas.openxmlformats.org/drawingml/2006/main">
+            <a:r>
+              <a:t>[Tempo sugerido: 01:00]</a:t>
+            </a:r>
+          </a:p>
+          <a:p xmlns:a="http://schemas.openxmlformats.org/drawingml/2006/main">
+            <a:r>
+              <a:t/>
+            </a:r>
+          </a:p>
+          <a:p xmlns:a="http://schemas.openxmlformats.org/drawingml/2006/main">
+            <a:r>
+              <a:t>Fala sugerida:</a:t>
+            </a:r>
+          </a:p>
+          <a:p xmlns:a="http://schemas.openxmlformats.org/drawingml/2006/main">
+            <a:r>
+              <a:t>Antes de seguir, conecte a técnica às decisões que ela afeta: Governança: mínimo privilégio, FinOps: menos tentativa e IA: contexto verificável. Governança define responsabilidade e consistência; FinOps pergunta quanto trabalho estamos repetindo; e IA depende do contexto que decidimos expor. A mesma implementação pode melhorar os três eixos, mas os ganhos devem ser medidos separadamente.</a:t>
+            </a:r>
+          </a:p>
+          <a:p xmlns:a="http://schemas.openxmlformats.org/drawingml/2006/main">
+            <a:r>
+              <a:t/>
+            </a:r>
+          </a:p>
+          <a:p xmlns:a="http://schemas.openxmlformats.org/drawingml/2006/main">
+            <a:r>
+              <a:t>O que destacar:</a:t>
+            </a:r>
+          </a:p>
+          <a:p xmlns:a="http://schemas.openxmlformats.org/drawingml/2006/main">
+            <a:r>
+              <a:t>- Percorra os três eixos e evite apresentar economia ou acurácia como consequência automática.</a:t>
+            </a:r>
+          </a:p>
+          <a:p xmlns:a="http://schemas.openxmlformats.org/drawingml/2006/main">
+            <a:r>
+              <a:t/>
+            </a:r>
+          </a:p>
+          <a:p xmlns:a="http://schemas.openxmlformats.org/drawingml/2006/main">
+            <a:r>
+              <a:t>Transição:</a:t>
+            </a:r>
+          </a:p>
+          <a:p xmlns:a="http://schemas.openxmlformats.org/drawingml/2006/main">
+            <a:r>
+              <a:t>Com esse ponto estabelecido, avance para “interface governada”.</a:t>
             </a:r>
           </a:p>
           <a:p xmlns:a="http://schemas.openxmlformats.org/drawingml/2006/main">
@@ -1382,7 +1782,57 @@
           <a:lstStyle xmlns:a="http://schemas.openxmlformats.org/drawingml/2006/main"/>
           <a:p xmlns:a="http://schemas.openxmlformats.org/drawingml/2006/main">
             <a:r>
-              <a:t>interface governada: padrão reportado pela impact.com. Case publicado pela empresa/dbt Labs; o laboratório testa apenas a fronteira local.</a:t>
+              <a:t>[Roteiro recomendado]</a:t>
+            </a:r>
+          </a:p>
+          <a:p xmlns:a="http://schemas.openxmlformats.org/drawingml/2006/main">
+            <a:r>
+              <a:t>[Tempo sugerido: 00:55]</a:t>
+            </a:r>
+          </a:p>
+          <a:p xmlns:a="http://schemas.openxmlformats.org/drawingml/2006/main">
+            <a:r>
+              <a:t/>
+            </a:r>
+          </a:p>
+          <a:p xmlns:a="http://schemas.openxmlformats.org/drawingml/2006/main">
+            <a:r>
+              <a:t>Fala sugerida:</a:t>
+            </a:r>
+          </a:p>
+          <a:p xmlns:a="http://schemas.openxmlformats.org/drawingml/2006/main">
+            <a:r>
+              <a:t>Aqui temos interface governada: padrão reportado pela impact.com. O número ajuda a dimensionar o exemplo, mas precisa ser lido com a ressalva correta. Case publicado pela empresa/dbt Labs; o laboratório testa apenas a fronteira local. Use o case como evidência contextual e não como promessa de que outro projeto repetirá o mesmo resultado sem as mesmas condições.</a:t>
+            </a:r>
+          </a:p>
+          <a:p xmlns:a="http://schemas.openxmlformats.org/drawingml/2006/main">
+            <a:r>
+              <a:t/>
+            </a:r>
+          </a:p>
+          <a:p xmlns:a="http://schemas.openxmlformats.org/drawingml/2006/main">
+            <a:r>
+              <a:t>O que destacar:</a:t>
+            </a:r>
+          </a:p>
+          <a:p xmlns:a="http://schemas.openxmlformats.org/drawingml/2006/main">
+            <a:r>
+              <a:t>- Apresente primeiro o número, depois a definição e termine obrigatoriamente com a ressalva.</a:t>
+            </a:r>
+          </a:p>
+          <a:p xmlns:a="http://schemas.openxmlformats.org/drawingml/2006/main">
+            <a:r>
+              <a:t/>
+            </a:r>
+          </a:p>
+          <a:p xmlns:a="http://schemas.openxmlformats.org/drawingml/2006/main">
+            <a:r>
+              <a:t>Transição:</a:t>
+            </a:r>
+          </a:p>
+          <a:p xmlns:a="http://schemas.openxmlformats.org/drawingml/2006/main">
+            <a:r>
+              <a:t>Com esse ponto estabelecido, avance para “Limitações que precisam permanecer visíveis”.</a:t>
             </a:r>
           </a:p>
           <a:p xmlns:a="http://schemas.openxmlformats.org/drawingml/2006/main">
@@ -1497,7 +1947,57 @@
           <a:lstStyle xmlns:a="http://schemas.openxmlformats.org/drawingml/2006/main"/>
           <a:p xmlns:a="http://schemas.openxmlformats.org/drawingml/2006/main">
             <a:r>
-              <a:t>Apresente os limites sem minimizá-los: MCP não corrige metadata ruim; Cliente ainda pode raciocinar errado; Acesso ao banco permanece separado.</a:t>
+              <a:t>[Roteiro recomendado]</a:t>
+            </a:r>
+          </a:p>
+          <a:p xmlns:a="http://schemas.openxmlformats.org/drawingml/2006/main">
+            <a:r>
+              <a:t>[Tempo sugerido: 01:00]</a:t>
+            </a:r>
+          </a:p>
+          <a:p xmlns:a="http://schemas.openxmlformats.org/drawingml/2006/main">
+            <a:r>
+              <a:t/>
+            </a:r>
+          </a:p>
+          <a:p xmlns:a="http://schemas.openxmlformats.org/drawingml/2006/main">
+            <a:r>
+              <a:t>Fala sugerida:</a:t>
+            </a:r>
+          </a:p>
+          <a:p xmlns:a="http://schemas.openxmlformats.org/drawingml/2006/main">
+            <a:r>
+              <a:t>Também precisamos declarar os limites da recomendação. Neste cenário, considere MCP não corrige metadata ruim, Cliente ainda pode raciocinar errado e Acesso ao banco permanece separado. Esses pontos não anulam a técnica; eles delimitam onde a demonstração é válida e quais condições precisam ser verificadas antes de levar o padrão para produção. Tratar limites como parte do design evita transformar uma boa prática em regra universal.</a:t>
+            </a:r>
+          </a:p>
+          <a:p xmlns:a="http://schemas.openxmlformats.org/drawingml/2006/main">
+            <a:r>
+              <a:t/>
+            </a:r>
+          </a:p>
+          <a:p xmlns:a="http://schemas.openxmlformats.org/drawingml/2006/main">
+            <a:r>
+              <a:t>O que destacar:</a:t>
+            </a:r>
+          </a:p>
+          <a:p xmlns:a="http://schemas.openxmlformats.org/drawingml/2006/main">
+            <a:r>
+              <a:t>- Leia os limites com o mesmo peso dado aos benefícios e diferencie restrição do laboratório de restrição do produto.</a:t>
+            </a:r>
+          </a:p>
+          <a:p xmlns:a="http://schemas.openxmlformats.org/drawingml/2006/main">
+            <a:r>
+              <a:t/>
+            </a:r>
+          </a:p>
+          <a:p xmlns:a="http://schemas.openxmlformats.org/drawingml/2006/main">
+            <a:r>
+              <a:t>Transição:</a:t>
+            </a:r>
+          </a:p>
+          <a:p xmlns:a="http://schemas.openxmlformats.org/drawingml/2006/main">
+            <a:r>
+              <a:t>Com esse ponto estabelecido, avance para “RADAR”.</a:t>
             </a:r>
           </a:p>
           <a:p xmlns:a="http://schemas.openxmlformats.org/drawingml/2006/main">
@@ -1612,7 +2112,57 @@
           <a:lstStyle xmlns:a="http://schemas.openxmlformats.org/drawingml/2006/main"/>
           <a:p xmlns:a="http://schemas.openxmlformats.org/drawingml/2006/main">
             <a:r>
-              <a:t>Tools gerenciadas e SQL entram somente na temporada de plataforma. Reforce que beta e preview não fazem parte da aceitação.</a:t>
+              <a:t>[Roteiro recomendado]</a:t>
+            </a:r>
+          </a:p>
+          <a:p xmlns:a="http://schemas.openxmlformats.org/drawingml/2006/main">
+            <a:r>
+              <a:t>[Tempo sugerido: 00:55]</a:t>
+            </a:r>
+          </a:p>
+          <a:p xmlns:a="http://schemas.openxmlformats.org/drawingml/2006/main">
+            <a:r>
+              <a:t/>
+            </a:r>
+          </a:p>
+          <a:p xmlns:a="http://schemas.openxmlformats.org/drawingml/2006/main">
+            <a:r>
+              <a:t>Fala sugerida:</a:t>
+            </a:r>
+          </a:p>
+          <a:p xmlns:a="http://schemas.openxmlformats.org/drawingml/2006/main">
+            <a:r>
+              <a:t>Este é o nosso Radar: Tools gerenciadas e SQL entram somente na temporada de plataforma. A intenção é mostrar a direção da ferramenta sem misturar preview com o caminho suportado da aula. Novidade observada não é recomendação de produção. Para adotar qualquer recurso futuro, confirme maturidade, adaptador, documentação e impacto sobre o projeto antes de alterar o baseline estável.</a:t>
+            </a:r>
+          </a:p>
+          <a:p xmlns:a="http://schemas.openxmlformats.org/drawingml/2006/main">
+            <a:r>
+              <a:t/>
+            </a:r>
+          </a:p>
+          <a:p xmlns:a="http://schemas.openxmlformats.org/drawingml/2006/main">
+            <a:r>
+              <a:t>O que destacar:</a:t>
+            </a:r>
+          </a:p>
+          <a:p xmlns:a="http://schemas.openxmlformats.org/drawingml/2006/main">
+            <a:r>
+              <a:t>- Reforce visualmente a regra do rodapé e não execute comandos beta ou preview como parte obrigatória da aula.</a:t>
+            </a:r>
+          </a:p>
+          <a:p xmlns:a="http://schemas.openxmlformats.org/drawingml/2006/main">
+            <a:r>
+              <a:t/>
+            </a:r>
+          </a:p>
+          <a:p xmlns:a="http://schemas.openxmlformats.org/drawingml/2006/main">
+            <a:r>
+              <a:t>Transição:</a:t>
+            </a:r>
+          </a:p>
+          <a:p xmlns:a="http://schemas.openxmlformats.org/drawingml/2006/main">
+            <a:r>
+              <a:t>Com esse ponto estabelecido, avance para “PRÓXIMO PASSO”.</a:t>
             </a:r>
           </a:p>
           <a:p xmlns:a="http://schemas.openxmlformats.org/drawingml/2006/main">
@@ -1727,7 +2277,57 @@
           <a:lstStyle xmlns:a="http://schemas.openxmlformats.org/drawingml/2006/main"/>
           <a:p xmlns:a="http://schemas.openxmlformats.org/drawingml/2006/main">
             <a:r>
-              <a:t>MCP não torna o agente confiável; torna a fronteira de contexto explícita. Use o diagrama para antecipar o problema que será comprovado no laboratório.</a:t>
+              <a:t>[Roteiro recomendado]</a:t>
+            </a:r>
+          </a:p>
+          <a:p xmlns:a="http://schemas.openxmlformats.org/drawingml/2006/main">
+            <a:r>
+              <a:t>[Tempo sugerido: 01:00]</a:t>
+            </a:r>
+          </a:p>
+          <a:p xmlns:a="http://schemas.openxmlformats.org/drawingml/2006/main">
+            <a:r>
+              <a:t/>
+            </a:r>
+          </a:p>
+          <a:p xmlns:a="http://schemas.openxmlformats.org/drawingml/2006/main">
+            <a:r>
+              <a:t>Fala sugerida:</a:t>
+            </a:r>
+          </a:p>
+          <a:p xmlns:a="http://schemas.openxmlformats.org/drawingml/2006/main">
+            <a:r>
+              <a:t>Quero começar com uma provocação: MCP não torna o agente confiável; torna a fronteira de contexto explícita. Essa pergunta orienta toda a aula. Em vez de aceitar uma afirmação porque ela parece correta, vamos procurar uma definição verificável e uma demonstração executável. Guarde essa tensão, porque voltaremos a ela quando compararmos o conceito com o resultado do laboratório.</a:t>
+            </a:r>
+          </a:p>
+          <a:p xmlns:a="http://schemas.openxmlformats.org/drawingml/2006/main">
+            <a:r>
+              <a:t/>
+            </a:r>
+          </a:p>
+          <a:p xmlns:a="http://schemas.openxmlformats.org/drawingml/2006/main">
+            <a:r>
+              <a:t>O que destacar:</a:t>
+            </a:r>
+          </a:p>
+          <a:p xmlns:a="http://schemas.openxmlformats.org/drawingml/2006/main">
+            <a:r>
+              <a:t>- Dê uma pausa depois da provocação e use o diagrama como mapa do problema, sem explicar todas as etapas ainda.</a:t>
+            </a:r>
+          </a:p>
+          <a:p xmlns:a="http://schemas.openxmlformats.org/drawingml/2006/main">
+            <a:r>
+              <a:t/>
+            </a:r>
+          </a:p>
+          <a:p xmlns:a="http://schemas.openxmlformats.org/drawingml/2006/main">
+            <a:r>
+              <a:t>Transição:</a:t>
+            </a:r>
+          </a:p>
+          <a:p xmlns:a="http://schemas.openxmlformats.org/drawingml/2006/main">
+            <a:r>
+              <a:t>Com esse ponto estabelecido, avance para “Ao final, você consegue...”.</a:t>
             </a:r>
           </a:p>
           <a:p xmlns:a="http://schemas.openxmlformats.org/drawingml/2006/main">
@@ -1842,7 +2442,57 @@
           <a:lstStyle xmlns:a="http://schemas.openxmlformats.org/drawingml/2006/main"/>
           <a:p xmlns:a="http://schemas.openxmlformats.org/drawingml/2006/main">
             <a:r>
-              <a:t>Liste as ferramentas permitidas e prove que uma proibida é rejeitada. Encerre conectando a aula ao próximo checkpoint.</a:t>
+              <a:t>[Roteiro recomendado]</a:t>
+            </a:r>
+          </a:p>
+          <a:p xmlns:a="http://schemas.openxmlformats.org/drawingml/2006/main">
+            <a:r>
+              <a:t>[Tempo sugerido: 00:40]</a:t>
+            </a:r>
+          </a:p>
+          <a:p xmlns:a="http://schemas.openxmlformats.org/drawingml/2006/main">
+            <a:r>
+              <a:t/>
+            </a:r>
+          </a:p>
+          <a:p xmlns:a="http://schemas.openxmlformats.org/drawingml/2006/main">
+            <a:r>
+              <a:t>Fala sugerida:</a:t>
+            </a:r>
+          </a:p>
+          <a:p xmlns:a="http://schemas.openxmlformats.org/drawingml/2006/main">
+            <a:r>
+              <a:t>Liste as ferramentas permitidas e prove que uma proibida é rejeitada. Faça essa etapa antes de seguir para o próximo episódio, porque o curso é cumulativo e o checkpoint atual se torna a base da aula seguinte. Se houver divergência, use o relatório de suporte e registre o que foi observado. O objetivo é avançar com um estado conhecido e reproduzível, não apenas assistir ao conteúdo.</a:t>
+            </a:r>
+          </a:p>
+          <a:p xmlns:a="http://schemas.openxmlformats.org/drawingml/2006/main">
+            <a:r>
+              <a:t/>
+            </a:r>
+          </a:p>
+          <a:p xmlns:a="http://schemas.openxmlformats.org/drawingml/2006/main">
+            <a:r>
+              <a:t>O que destacar:</a:t>
+            </a:r>
+          </a:p>
+          <a:p xmlns:a="http://schemas.openxmlformats.org/drawingml/2006/main">
+            <a:r>
+              <a:t>- Mostre o checkpoint e indique no repositório onde ficam o roteiro, os comandos e as referências da aula.</a:t>
+            </a:r>
+          </a:p>
+          <a:p xmlns:a="http://schemas.openxmlformats.org/drawingml/2006/main">
+            <a:r>
+              <a:t/>
+            </a:r>
+          </a:p>
+          <a:p xmlns:a="http://schemas.openxmlformats.org/drawingml/2006/main">
+            <a:r>
+              <a:t>Transição:</a:t>
+            </a:r>
+          </a:p>
+          <a:p xmlns:a="http://schemas.openxmlformats.org/drawingml/2006/main">
+            <a:r>
+              <a:t>Encerre retomando a pergunta inicial e confirme que o aluno sabe qual ação executar depois do episódio 11.</a:t>
             </a:r>
           </a:p>
           <a:p xmlns:a="http://schemas.openxmlformats.org/drawingml/2006/main">
@@ -1957,7 +2607,57 @@
           <a:lstStyle xmlns:a="http://schemas.openxmlformats.org/drawingml/2006/main"/>
           <a:p xmlns:a="http://schemas.openxmlformats.org/drawingml/2006/main">
             <a:r>
-              <a:t>Explique os três resultados observáveis da aula: Conectar um cliente neutro; Aplicar allowlist; Rejeitar SQL e codegen.</a:t>
+              <a:t>[Roteiro recomendado]</a:t>
+            </a:r>
+          </a:p>
+          <a:p xmlns:a="http://schemas.openxmlformats.org/drawingml/2006/main">
+            <a:r>
+              <a:t>[Tempo sugerido: 01:00]</a:t>
+            </a:r>
+          </a:p>
+          <a:p xmlns:a="http://schemas.openxmlformats.org/drawingml/2006/main">
+            <a:r>
+              <a:t/>
+            </a:r>
+          </a:p>
+          <a:p xmlns:a="http://schemas.openxmlformats.org/drawingml/2006/main">
+            <a:r>
+              <a:t>Fala sugerida:</a:t>
+            </a:r>
+          </a:p>
+          <a:p xmlns:a="http://schemas.openxmlformats.org/drawingml/2006/main">
+            <a:r>
+              <a:t>Ao final desta aula, você deverá conseguir conectar um cliente neutro, Aplicar allowlist e Rejeitar SQL e codegen. Esses resultados formam uma sequência: primeiro entendemos a regra, depois observamos sua representação no projeto e, por fim, comprovamos o comportamento no checkpoint. Se alguma dessas três partes não estiver clara, volte ao slide correspondente antes de executar a demonstração.</a:t>
+            </a:r>
+          </a:p>
+          <a:p xmlns:a="http://schemas.openxmlformats.org/drawingml/2006/main">
+            <a:r>
+              <a:t/>
+            </a:r>
+          </a:p>
+          <a:p xmlns:a="http://schemas.openxmlformats.org/drawingml/2006/main">
+            <a:r>
+              <a:t>O que destacar:</a:t>
+            </a:r>
+          </a:p>
+          <a:p xmlns:a="http://schemas.openxmlformats.org/drawingml/2006/main">
+            <a:r>
+              <a:t>- Percorra os objetivos da esquerda para a direita e apresente-os como resultados observáveis, não como uma agenda abstrata.</a:t>
+            </a:r>
+          </a:p>
+          <a:p xmlns:a="http://schemas.openxmlformats.org/drawingml/2006/main">
+            <a:r>
+              <a:t/>
+            </a:r>
+          </a:p>
+          <a:p xmlns:a="http://schemas.openxmlformats.org/drawingml/2006/main">
+            <a:r>
+              <a:t>Transição:</a:t>
+            </a:r>
+          </a:p>
+          <a:p xmlns:a="http://schemas.openxmlformats.org/drawingml/2006/main">
+            <a:r>
+              <a:t>Com esse ponto estabelecido, avance para “MCP separa cliente e contexto”.</a:t>
             </a:r>
           </a:p>
           <a:p xmlns:a="http://schemas.openxmlformats.org/drawingml/2006/main">
@@ -2072,7 +2772,57 @@
           <a:lstStyle xmlns:a="http://schemas.openxmlformats.org/drawingml/2006/main"/>
           <a:p xmlns:a="http://schemas.openxmlformats.org/drawingml/2006/main">
             <a:r>
-              <a:t>O protocolo descreve ferramentas; o servidor decide o que expor. Desenvolva os pontos: Cliente neutro; Servidor dbt; Artifacts locais.</a:t>
+              <a:t>[Roteiro recomendado]</a:t>
+            </a:r>
+          </a:p>
+          <a:p xmlns:a="http://schemas.openxmlformats.org/drawingml/2006/main">
+            <a:r>
+              <a:t>[Tempo sugerido: 01:10]</a:t>
+            </a:r>
+          </a:p>
+          <a:p xmlns:a="http://schemas.openxmlformats.org/drawingml/2006/main">
+            <a:r>
+              <a:t/>
+            </a:r>
+          </a:p>
+          <a:p xmlns:a="http://schemas.openxmlformats.org/drawingml/2006/main">
+            <a:r>
+              <a:t>Fala sugerida:</a:t>
+            </a:r>
+          </a:p>
+          <a:p xmlns:a="http://schemas.openxmlformats.org/drawingml/2006/main">
+            <a:r>
+              <a:t>A mensagem principal deste slide é: O protocolo descreve ferramentas; o servidor decide o que expor. Para tornar isso concreto, observe cliente neutro, Servidor dbt e Artifacts locais. Esses pontos devem ser entendidos em conjunto; não são funcionalidades isoladas. No projeto, essa combinação transforma uma convenção informal em algo que pode ser revisado, testado ou consumido de maneira consistente.</a:t>
+            </a:r>
+          </a:p>
+          <a:p xmlns:a="http://schemas.openxmlformats.org/drawingml/2006/main">
+            <a:r>
+              <a:t/>
+            </a:r>
+          </a:p>
+          <a:p xmlns:a="http://schemas.openxmlformats.org/drawingml/2006/main">
+            <a:r>
+              <a:t>O que destacar:</a:t>
+            </a:r>
+          </a:p>
+          <a:p xmlns:a="http://schemas.openxmlformats.org/drawingml/2006/main">
+            <a:r>
+              <a:t>- Comece pelo título, leia a afirmação abaixo dele e depois desenvolva os itens sem repetir o texto palavra por palavra.</a:t>
+            </a:r>
+          </a:p>
+          <a:p xmlns:a="http://schemas.openxmlformats.org/drawingml/2006/main">
+            <a:r>
+              <a:t/>
+            </a:r>
+          </a:p>
+          <a:p xmlns:a="http://schemas.openxmlformats.org/drawingml/2006/main">
+            <a:r>
+              <a:t>Transição:</a:t>
+            </a:r>
+          </a:p>
+          <a:p xmlns:a="http://schemas.openxmlformats.org/drawingml/2006/main">
+            <a:r>
+              <a:t>Com esse ponto estabelecido, avance para “A arquitetura oficial mostra múltiplos consumidores”.</a:t>
             </a:r>
           </a:p>
           <a:p xmlns:a="http://schemas.openxmlformats.org/drawingml/2006/main">
@@ -2187,7 +2937,57 @@
           <a:lstStyle xmlns:a="http://schemas.openxmlformats.org/drawingml/2006/main"/>
           <a:p xmlns:a="http://schemas.openxmlformats.org/drawingml/2006/main">
             <a:r>
-              <a:t>O servidor conecta ativos dbt a diferentes fluxos de agente. Desenvolva os pontos: Discovery; Semantic context; Execução controlada.</a:t>
+              <a:t>[Roteiro recomendado]</a:t>
+            </a:r>
+          </a:p>
+          <a:p xmlns:a="http://schemas.openxmlformats.org/drawingml/2006/main">
+            <a:r>
+              <a:t>[Tempo sugerido: 01:10]</a:t>
+            </a:r>
+          </a:p>
+          <a:p xmlns:a="http://schemas.openxmlformats.org/drawingml/2006/main">
+            <a:r>
+              <a:t/>
+            </a:r>
+          </a:p>
+          <a:p xmlns:a="http://schemas.openxmlformats.org/drawingml/2006/main">
+            <a:r>
+              <a:t>Fala sugerida:</a:t>
+            </a:r>
+          </a:p>
+          <a:p xmlns:a="http://schemas.openxmlformats.org/drawingml/2006/main">
+            <a:r>
+              <a:t>A mensagem principal deste slide é: O servidor conecta ativos dbt a diferentes fluxos de agente. Para tornar isso concreto, observe discovery, Semantic context e Execução controlada. Esses pontos devem ser entendidos em conjunto; não são funcionalidades isoladas. No projeto, essa combinação transforma uma convenção informal em algo que pode ser revisado, testado ou consumido de maneira consistente.</a:t>
+            </a:r>
+          </a:p>
+          <a:p xmlns:a="http://schemas.openxmlformats.org/drawingml/2006/main">
+            <a:r>
+              <a:t/>
+            </a:r>
+          </a:p>
+          <a:p xmlns:a="http://schemas.openxmlformats.org/drawingml/2006/main">
+            <a:r>
+              <a:t>O que destacar:</a:t>
+            </a:r>
+          </a:p>
+          <a:p xmlns:a="http://schemas.openxmlformats.org/drawingml/2006/main">
+            <a:r>
+              <a:t>- Comece pelo título, leia a afirmação abaixo dele e depois desenvolva os itens sem repetir o texto palavra por palavra.</a:t>
+            </a:r>
+          </a:p>
+          <a:p xmlns:a="http://schemas.openxmlformats.org/drawingml/2006/main">
+            <a:r>
+              <a:t/>
+            </a:r>
+          </a:p>
+          <a:p xmlns:a="http://schemas.openxmlformats.org/drawingml/2006/main">
+            <a:r>
+              <a:t>Transição:</a:t>
+            </a:r>
+          </a:p>
+          <a:p xmlns:a="http://schemas.openxmlformats.org/drawingml/2006/main">
+            <a:r>
+              <a:t>Com esse ponto estabelecido, avance para “A arquitetura oficial mostra múltiplos consumidores”.</a:t>
             </a:r>
           </a:p>
           <a:p xmlns:a="http://schemas.openxmlformats.org/drawingml/2006/main">
@@ -2302,7 +3102,57 @@
           <a:lstStyle xmlns:a="http://schemas.openxmlformats.org/drawingml/2006/main"/>
           <a:p xmlns:a="http://schemas.openxmlformats.org/drawingml/2006/main">
             <a:r>
-              <a:t>Use a composição para explicar visualmente: O servidor conecta ativos dbt a diferentes fluxos de agente. Discovery Semantic context Execução controlada</a:t>
+              <a:t>[Roteiro recomendado]</a:t>
+            </a:r>
+          </a:p>
+          <a:p xmlns:a="http://schemas.openxmlformats.org/drawingml/2006/main">
+            <a:r>
+              <a:t>[Tempo sugerido: 00:55]</a:t>
+            </a:r>
+          </a:p>
+          <a:p xmlns:a="http://schemas.openxmlformats.org/drawingml/2006/main">
+            <a:r>
+              <a:t/>
+            </a:r>
+          </a:p>
+          <a:p xmlns:a="http://schemas.openxmlformats.org/drawingml/2006/main">
+            <a:r>
+              <a:t>Fala sugerida:</a:t>
+            </a:r>
+          </a:p>
+          <a:p xmlns:a="http://schemas.openxmlformats.org/drawingml/2006/main">
+            <a:r>
+              <a:t>Agora vamos ler a ideia visualmente. O servidor conecta ativos dbt a diferentes fluxos de agente. Siga a composição na ordem mostrada e conecte os elementos principais. A imagem ou o fluxo não cria uma regra nova; ele torna visível a relação que acabamos de explicar. A figura é identificada como figura oficial dbt Labs — Apache 2.0</a:t>
+            </a:r>
+          </a:p>
+          <a:p xmlns:a="http://schemas.openxmlformats.org/drawingml/2006/main">
+            <a:r>
+              <a:t/>
+            </a:r>
+          </a:p>
+          <a:p xmlns:a="http://schemas.openxmlformats.org/drawingml/2006/main">
+            <a:r>
+              <a:t>O que destacar:</a:t>
+            </a:r>
+          </a:p>
+          <a:p xmlns:a="http://schemas.openxmlformats.org/drawingml/2006/main">
+            <a:r>
+              <a:t>- Aponte a legenda e deixe explícito quando a figura é oficial; as anotações do curso ficam fora da imagem.</a:t>
+            </a:r>
+          </a:p>
+          <a:p xmlns:a="http://schemas.openxmlformats.org/drawingml/2006/main">
+            <a:r>
+              <a:t/>
+            </a:r>
+          </a:p>
+          <a:p xmlns:a="http://schemas.openxmlformats.org/drawingml/2006/main">
+            <a:r>
+              <a:t>Transição:</a:t>
+            </a:r>
+          </a:p>
+          <a:p xmlns:a="http://schemas.openxmlformats.org/drawingml/2006/main">
+            <a:r>
+              <a:t>Com esse ponto estabelecido, avance para “Modelo de ameaça vem antes da conexão”.</a:t>
             </a:r>
           </a:p>
           <a:p xmlns:a="http://schemas.openxmlformats.org/drawingml/2006/main">
@@ -2422,7 +3272,57 @@
           <a:lstStyle xmlns:a="http://schemas.openxmlformats.org/drawingml/2006/main"/>
           <a:p xmlns:a="http://schemas.openxmlformats.org/drawingml/2006/main">
             <a:r>
-              <a:t>Leitura de metadata não deve abrir escrita ou SQL arbitrário. Desenvolva os pontos: Dados sensíveis; Ferramentas mutantes; Prompt injection; Credenciais.</a:t>
+              <a:t>[Roteiro recomendado]</a:t>
+            </a:r>
+          </a:p>
+          <a:p xmlns:a="http://schemas.openxmlformats.org/drawingml/2006/main">
+            <a:r>
+              <a:t>[Tempo sugerido: 01:10]</a:t>
+            </a:r>
+          </a:p>
+          <a:p xmlns:a="http://schemas.openxmlformats.org/drawingml/2006/main">
+            <a:r>
+              <a:t/>
+            </a:r>
+          </a:p>
+          <a:p xmlns:a="http://schemas.openxmlformats.org/drawingml/2006/main">
+            <a:r>
+              <a:t>Fala sugerida:</a:t>
+            </a:r>
+          </a:p>
+          <a:p xmlns:a="http://schemas.openxmlformats.org/drawingml/2006/main">
+            <a:r>
+              <a:t>A mensagem principal deste slide é: Leitura de metadata não deve abrir escrita ou SQL arbitrário. Para tornar isso concreto, observe dados sensíveis, Ferramentas mutantes, Prompt injection e Credenciais. Esses pontos devem ser entendidos em conjunto; não são funcionalidades isoladas. No projeto, essa combinação transforma uma convenção informal em algo que pode ser revisado, testado ou consumido de maneira consistente.</a:t>
+            </a:r>
+          </a:p>
+          <a:p xmlns:a="http://schemas.openxmlformats.org/drawingml/2006/main">
+            <a:r>
+              <a:t/>
+            </a:r>
+          </a:p>
+          <a:p xmlns:a="http://schemas.openxmlformats.org/drawingml/2006/main">
+            <a:r>
+              <a:t>O que destacar:</a:t>
+            </a:r>
+          </a:p>
+          <a:p xmlns:a="http://schemas.openxmlformats.org/drawingml/2006/main">
+            <a:r>
+              <a:t>- Comece pelo título, leia a afirmação abaixo dele e depois desenvolva os itens sem repetir o texto palavra por palavra.</a:t>
+            </a:r>
+          </a:p>
+          <a:p xmlns:a="http://schemas.openxmlformats.org/drawingml/2006/main">
+            <a:r>
+              <a:t/>
+            </a:r>
+          </a:p>
+          <a:p xmlns:a="http://schemas.openxmlformats.org/drawingml/2006/main">
+            <a:r>
+              <a:t>Transição:</a:t>
+            </a:r>
+          </a:p>
+          <a:p xmlns:a="http://schemas.openxmlformats.org/drawingml/2006/main">
+            <a:r>
+              <a:t>Com esse ponto estabelecido, avance para “Modelo de ameaça vem antes da conexão”.</a:t>
             </a:r>
           </a:p>
           <a:p xmlns:a="http://schemas.openxmlformats.org/drawingml/2006/main">
@@ -2537,7 +3437,57 @@
           <a:lstStyle xmlns:a="http://schemas.openxmlformats.org/drawingml/2006/main"/>
           <a:p xmlns:a="http://schemas.openxmlformats.org/drawingml/2006/main">
             <a:r>
-              <a:t>Use a composição para explicar visualmente: Leitura de metadata não deve abrir escrita ou SQL arbitrário. Dados sensíveis Ferramentas mutantes Prompt injection Credenciais</a:t>
+              <a:t>[Roteiro recomendado]</a:t>
+            </a:r>
+          </a:p>
+          <a:p xmlns:a="http://schemas.openxmlformats.org/drawingml/2006/main">
+            <a:r>
+              <a:t>[Tempo sugerido: 00:55]</a:t>
+            </a:r>
+          </a:p>
+          <a:p xmlns:a="http://schemas.openxmlformats.org/drawingml/2006/main">
+            <a:r>
+              <a:t/>
+            </a:r>
+          </a:p>
+          <a:p xmlns:a="http://schemas.openxmlformats.org/drawingml/2006/main">
+            <a:r>
+              <a:t>Fala sugerida:</a:t>
+            </a:r>
+          </a:p>
+          <a:p xmlns:a="http://schemas.openxmlformats.org/drawingml/2006/main">
+            <a:r>
+              <a:t>Agora vamos ler a ideia visualmente. Leitura de metadata não deve abrir escrita ou SQL arbitrário. Siga a composição na ordem mostrada e conecte os elementos principais. A imagem ou o fluxo não cria uma regra nova; ele torna visível a relação que acabamos de explicar. Use a disposição dos elementos para reforçar causa, dependência ou comparação.</a:t>
+            </a:r>
+          </a:p>
+          <a:p xmlns:a="http://schemas.openxmlformats.org/drawingml/2006/main">
+            <a:r>
+              <a:t/>
+            </a:r>
+          </a:p>
+          <a:p xmlns:a="http://schemas.openxmlformats.org/drawingml/2006/main">
+            <a:r>
+              <a:t>O que destacar:</a:t>
+            </a:r>
+          </a:p>
+          <a:p xmlns:a="http://schemas.openxmlformats.org/drawingml/2006/main">
+            <a:r>
+              <a:t>- Acompanhe o fluxo ou a comparação com o cursor e preserve a ordem de leitura do slide.</a:t>
+            </a:r>
+          </a:p>
+          <a:p xmlns:a="http://schemas.openxmlformats.org/drawingml/2006/main">
+            <a:r>
+              <a:t/>
+            </a:r>
+          </a:p>
+          <a:p xmlns:a="http://schemas.openxmlformats.org/drawingml/2006/main">
+            <a:r>
+              <a:t>Transição:</a:t>
+            </a:r>
+          </a:p>
+          <a:p xmlns:a="http://schemas.openxmlformats.org/drawingml/2006/main">
+            <a:r>
+              <a:t>Com esse ponto estabelecido, avance para “Allowlist é uma política executável”.</a:t>
             </a:r>
           </a:p>
           <a:p xmlns:a="http://schemas.openxmlformats.org/drawingml/2006/main">
@@ -2652,7 +3602,57 @@
           <a:lstStyle xmlns:a="http://schemas.openxmlformats.org/drawingml/2006/main"/>
           <a:p xmlns:a="http://schemas.openxmlformats.org/drawingml/2006/main">
             <a:r>
-              <a:t>Manifest, docs e linhagem entram; SQL e codegen ficam fora. Desenvolva os pontos: 5 tools de leitura; Sem credencial cloud; Negação testada.</a:t>
+              <a:t>[Roteiro recomendado]</a:t>
+            </a:r>
+          </a:p>
+          <a:p xmlns:a="http://schemas.openxmlformats.org/drawingml/2006/main">
+            <a:r>
+              <a:t>[Tempo sugerido: 01:10]</a:t>
+            </a:r>
+          </a:p>
+          <a:p xmlns:a="http://schemas.openxmlformats.org/drawingml/2006/main">
+            <a:r>
+              <a:t/>
+            </a:r>
+          </a:p>
+          <a:p xmlns:a="http://schemas.openxmlformats.org/drawingml/2006/main">
+            <a:r>
+              <a:t>Fala sugerida:</a:t>
+            </a:r>
+          </a:p>
+          <a:p xmlns:a="http://schemas.openxmlformats.org/drawingml/2006/main">
+            <a:r>
+              <a:t>A mensagem principal deste slide é: Manifest, docs e linhagem entram; SQL e codegen ficam fora. Para tornar isso concreto, observe 5 tools de leitura, Sem credencial cloud e Negação testada. Esses pontos devem ser entendidos em conjunto; não são funcionalidades isoladas. No projeto, essa combinação transforma uma convenção informal em algo que pode ser revisado, testado ou consumido de maneira consistente.</a:t>
+            </a:r>
+          </a:p>
+          <a:p xmlns:a="http://schemas.openxmlformats.org/drawingml/2006/main">
+            <a:r>
+              <a:t/>
+            </a:r>
+          </a:p>
+          <a:p xmlns:a="http://schemas.openxmlformats.org/drawingml/2006/main">
+            <a:r>
+              <a:t>O que destacar:</a:t>
+            </a:r>
+          </a:p>
+          <a:p xmlns:a="http://schemas.openxmlformats.org/drawingml/2006/main">
+            <a:r>
+              <a:t>- Comece pelo título, leia a afirmação abaixo dele e depois desenvolva os itens sem repetir o texto palavra por palavra.</a:t>
+            </a:r>
+          </a:p>
+          <a:p xmlns:a="http://schemas.openxmlformats.org/drawingml/2006/main">
+            <a:r>
+              <a:t/>
+            </a:r>
+          </a:p>
+          <a:p xmlns:a="http://schemas.openxmlformats.org/drawingml/2006/main">
+            <a:r>
+              <a:t>Transição:</a:t>
+            </a:r>
+          </a:p>
+          <a:p xmlns:a="http://schemas.openxmlformats.org/drawingml/2006/main">
+            <a:r>
+              <a:t>Com esse ponto estabelecido, avance para “Allowlist é uma política executável”.</a:t>
             </a:r>
           </a:p>
           <a:p xmlns:a="http://schemas.openxmlformats.org/drawingml/2006/main">
@@ -2799,7 +3799,7 @@
   </p:cSld>
   <p:clrMap bg1="lt1" tx1="dk1" bg2="lt2" tx2="dk2" accent1="accent1" accent2="accent2" accent3="accent3" accent4="accent4" accent5="accent5" accent6="accent6" hlink="hlink" folHlink="folHlink"/>
   <p:sldLayoutIdLst>
-    <p:sldLayoutId xmlns:r="http://schemas.openxmlformats.org/officeDocument/2006/relationships" id="2147483649" r:id="Re5e073fe22454e27"/>
+    <p:sldLayoutId xmlns:r="http://schemas.openxmlformats.org/officeDocument/2006/relationships" id="2147483649" r:id="R2e820120540b4086"/>
   </p:sldLayoutIdLst>
   <p:txStyles>
     <p:titleStyle>
@@ -3097,8 +4097,8 @@
   </p:cSld>
   <p:clrMap bg1="lt1" tx1="dk1" bg2="lt2" tx2="dk2" accent1="accent1" accent2="accent2" accent3="accent3" accent4="accent4" accent5="accent5" accent6="accent6" hlink="hlink" folHlink="folHlink"/>
   <p:sldLayoutIdLst>
-    <p:sldLayoutId xmlns:r="http://schemas.openxmlformats.org/officeDocument/2006/relationships" id="2147483651" r:id="R44d7633fe89e40c6"/>
-    <p:sldLayoutId xmlns:r="http://schemas.openxmlformats.org/officeDocument/2006/relationships" id="2147483652" r:id="R06d670c709fd4751"/>
+    <p:sldLayoutId xmlns:r="http://schemas.openxmlformats.org/officeDocument/2006/relationships" id="2147483651" r:id="R602e6f193f3a4a4b"/>
+    <p:sldLayoutId xmlns:r="http://schemas.openxmlformats.org/officeDocument/2006/relationships" id="2147483652" r:id="Rfa6996b8832b41df"/>
   </p:sldLayoutIdLst>
 </p:sldMaster>
 </file>
@@ -3622,14 +4622,14 @@
       </p:grpSpPr>
       <p:pic>
         <p:nvPicPr>
-          <p:cNvPr id="9" name="" descr="Ilustração conceitual autoral da capa: EPISÓDIO 11 — dbt MCP: contexto governado para o agente."/>
+          <p:cNvPr id="10" name="" descr="Ilustração conceitual autoral da capa: EPISÓDIO 11 — dbt MCP: contexto governado para o agente."/>
           <p:cNvPicPr>
             <a:picLocks xmlns:a="http://schemas.openxmlformats.org/drawingml/2006/main" noChangeAspect="1"/>
           </p:cNvPicPr>
           <p:nvPr/>
         </p:nvPicPr>
         <p:blipFill>
-          <a:blip xmlns:r="http://schemas.openxmlformats.org/officeDocument/2006/relationships" xmlns:a="http://schemas.openxmlformats.org/drawingml/2006/main" r:embed="R4597f572fd234b78"/>
+          <a:blip xmlns:r="http://schemas.openxmlformats.org/officeDocument/2006/relationships" xmlns:a="http://schemas.openxmlformats.org/drawingml/2006/main" r:embed="Rb834956e659f4dc4"/>
           <a:srcRect xmlns:a="http://schemas.openxmlformats.org/drawingml/2006/main" l="19785" t="0" r="19785" b="0"/>
           <a:stretch xmlns:a="http://schemas.openxmlformats.org/drawingml/2006/main">
             <a:fillRect l="0" t="0" r="0" b="0"/>
@@ -3742,6 +4742,7 @@
           <a:lstStyle xmlns:a="http://schemas.openxmlformats.org/drawingml/2006/main"/>
           <a:p xmlns:a="http://schemas.openxmlformats.org/drawingml/2006/main">
             <a:pPr>
+              <a:buNone/>
               <a:defRPr sz="1350" b="1">
                 <a:solidFill>
                   <a:srgbClr val="1EC5FF"/>
@@ -3792,6 +4793,7 @@
           <a:lstStyle xmlns:a="http://schemas.openxmlformats.org/drawingml/2006/main"/>
           <a:p xmlns:a="http://schemas.openxmlformats.org/drawingml/2006/main">
             <a:pPr>
+              <a:buNone/>
               <a:defRPr sz="3225" b="1">
                 <a:solidFill>
                   <a:srgbClr val="FFFFFF"/>
@@ -3842,6 +4844,7 @@
           <a:lstStyle xmlns:a="http://schemas.openxmlformats.org/drawingml/2006/main"/>
           <a:p xmlns:a="http://schemas.openxmlformats.org/drawingml/2006/main">
             <a:pPr>
+              <a:buNone/>
               <a:defRPr sz="1800">
                 <a:solidFill>
                   <a:srgbClr val="E2F2FF"/>
@@ -3923,6 +4926,7 @@
           <a:lstStyle xmlns:a="http://schemas.openxmlformats.org/drawingml/2006/main"/>
           <a:p xmlns:a="http://schemas.openxmlformats.org/drawingml/2006/main">
             <a:pPr>
+              <a:buNone/>
               <a:defRPr sz="1200" b="1">
                 <a:solidFill>
                   <a:srgbClr val="FFFFFF">
@@ -4014,6 +5018,7 @@
           <a:lstStyle xmlns:a="http://schemas.openxmlformats.org/drawingml/2006/main"/>
           <a:p xmlns:a="http://schemas.openxmlformats.org/drawingml/2006/main">
             <a:pPr>
+              <a:buNone/>
               <a:defRPr sz="2925" b="1">
                 <a:solidFill>
                   <a:srgbClr val="FFFFFF"/>
@@ -4064,6 +5069,7 @@
           <a:lstStyle xmlns:a="http://schemas.openxmlformats.org/drawingml/2006/main"/>
           <a:p xmlns:a="http://schemas.openxmlformats.org/drawingml/2006/main">
             <a:pPr>
+              <a:buNone/>
               <a:defRPr sz="2100" b="1">
                 <a:solidFill>
                   <a:srgbClr val="1EC5FF"/>
@@ -4114,6 +5120,7 @@
           <a:lstStyle xmlns:a="http://schemas.openxmlformats.org/drawingml/2006/main"/>
           <a:p xmlns:a="http://schemas.openxmlformats.org/drawingml/2006/main">
             <a:pPr>
+              <a:buNone/>
               <a:defRPr sz="2100" b="1">
                 <a:solidFill>
                   <a:srgbClr val="2DBE8C"/>
@@ -4197,6 +5204,7 @@
           <a:lstStyle xmlns:a="http://schemas.openxmlformats.org/drawingml/2006/main"/>
           <a:p xmlns:a="http://schemas.openxmlformats.org/drawingml/2006/main">
             <a:pPr>
+              <a:buNone/>
               <a:defRPr sz="1650">
                 <a:solidFill>
                   <a:srgbClr val="FFFFFF"/>
@@ -4214,6 +5222,7 @@
           </a:p>
           <a:p xmlns:a="http://schemas.openxmlformats.org/drawingml/2006/main">
             <a:pPr>
+              <a:buNone/>
               <a:defRPr sz="1650">
                 <a:solidFill>
                   <a:srgbClr val="FFFFFF"/>
@@ -4264,6 +5273,7 @@
           <a:lstStyle xmlns:a="http://schemas.openxmlformats.org/drawingml/2006/main"/>
           <a:p xmlns:a="http://schemas.openxmlformats.org/drawingml/2006/main">
             <a:pPr>
+              <a:buNone/>
               <a:defRPr sz="1650">
                 <a:solidFill>
                   <a:srgbClr val="FFFFFF"/>
@@ -4314,6 +5324,7 @@
           <a:lstStyle xmlns:a="http://schemas.openxmlformats.org/drawingml/2006/main"/>
           <a:p xmlns:a="http://schemas.openxmlformats.org/drawingml/2006/main">
             <a:pPr>
+              <a:buNone/>
               <a:defRPr sz="1050" b="1">
                 <a:solidFill>
                   <a:srgbClr val="1EC5FF"/>
@@ -4397,6 +5408,7 @@
           <a:lstStyle xmlns:a="http://schemas.openxmlformats.org/drawingml/2006/main"/>
           <a:p xmlns:a="http://schemas.openxmlformats.org/drawingml/2006/main">
             <a:pPr>
+              <a:buNone/>
               <a:defRPr sz="825">
                 <a:solidFill>
                   <a:srgbClr val="FFFFFF">
@@ -4451,6 +5463,7 @@
           <a:lstStyle xmlns:a="http://schemas.openxmlformats.org/drawingml/2006/main"/>
           <a:p xmlns:a="http://schemas.openxmlformats.org/drawingml/2006/main">
             <a:pPr algn="r">
+              <a:buNone/>
               <a:defRPr sz="825" b="1">
                 <a:solidFill>
                   <a:srgbClr val="FFFFFF">
@@ -4542,6 +5555,7 @@
           <a:lstStyle xmlns:a="http://schemas.openxmlformats.org/drawingml/2006/main"/>
           <a:p xmlns:a="http://schemas.openxmlformats.org/drawingml/2006/main">
             <a:pPr>
+              <a:buNone/>
               <a:defRPr sz="2925" b="1">
                 <a:solidFill>
                   <a:srgbClr val="FFFFFF"/>
@@ -4592,6 +5606,7 @@
           <a:lstStyle xmlns:a="http://schemas.openxmlformats.org/drawingml/2006/main"/>
           <a:p xmlns:a="http://schemas.openxmlformats.org/drawingml/2006/main">
             <a:pPr>
+              <a:buNone/>
               <a:defRPr sz="1650">
                 <a:solidFill>
                   <a:srgbClr val="E2F2FF"/>
@@ -4642,6 +5657,7 @@
           <a:lstStyle xmlns:a="http://schemas.openxmlformats.org/drawingml/2006/main"/>
           <a:p xmlns:a="http://schemas.openxmlformats.org/drawingml/2006/main">
             <a:pPr>
+              <a:buNone/>
               <a:defRPr sz="1800">
                 <a:solidFill>
                   <a:srgbClr val="FFFFFF"/>
@@ -4659,6 +5675,7 @@
           </a:p>
           <a:p xmlns:a="http://schemas.openxmlformats.org/drawingml/2006/main">
             <a:pPr>
+              <a:buNone/>
               <a:defRPr sz="1800">
                 <a:solidFill>
                   <a:srgbClr val="FFFFFF"/>
@@ -4676,6 +5693,7 @@
           </a:p>
           <a:p xmlns:a="http://schemas.openxmlformats.org/drawingml/2006/main">
             <a:pPr>
+              <a:buNone/>
               <a:defRPr sz="1800">
                 <a:solidFill>
                   <a:srgbClr val="FFFFFF"/>
@@ -4693,6 +5711,7 @@
           </a:p>
           <a:p xmlns:a="http://schemas.openxmlformats.org/drawingml/2006/main">
             <a:pPr>
+              <a:buNone/>
               <a:defRPr sz="1800">
                 <a:solidFill>
                   <a:srgbClr val="FFFFFF"/>
@@ -4817,6 +5836,7 @@
           <a:lstStyle xmlns:a="http://schemas.openxmlformats.org/drawingml/2006/main"/>
           <a:p xmlns:a="http://schemas.openxmlformats.org/drawingml/2006/main">
             <a:pPr algn="ctr">
+              <a:buNone/>
               <a:defRPr sz="4650" b="1">
                 <a:solidFill>
                   <a:srgbClr val="1EC5FF"/>
@@ -4867,6 +5887,7 @@
           <a:lstStyle xmlns:a="http://schemas.openxmlformats.org/drawingml/2006/main"/>
           <a:p xmlns:a="http://schemas.openxmlformats.org/drawingml/2006/main">
             <a:pPr>
+              <a:buNone/>
               <a:defRPr sz="1050" b="1">
                 <a:solidFill>
                   <a:srgbClr val="1EC5FF"/>
@@ -4950,6 +5971,7 @@
           <a:lstStyle xmlns:a="http://schemas.openxmlformats.org/drawingml/2006/main"/>
           <a:p xmlns:a="http://schemas.openxmlformats.org/drawingml/2006/main">
             <a:pPr>
+              <a:buNone/>
               <a:defRPr sz="825">
                 <a:solidFill>
                   <a:srgbClr val="FFFFFF">
@@ -5004,6 +6026,7 @@
           <a:lstStyle xmlns:a="http://schemas.openxmlformats.org/drawingml/2006/main"/>
           <a:p xmlns:a="http://schemas.openxmlformats.org/drawingml/2006/main">
             <a:pPr algn="r">
+              <a:buNone/>
               <a:defRPr sz="825" b="1">
                 <a:solidFill>
                   <a:srgbClr val="FFFFFF">
@@ -5087,6 +6110,7 @@
           <a:lstStyle xmlns:a="http://schemas.openxmlformats.org/drawingml/2006/main"/>
           <a:p xmlns:a="http://schemas.openxmlformats.org/drawingml/2006/main">
             <a:pPr>
+              <a:buNone/>
               <a:defRPr sz="2925" b="1">
                 <a:solidFill>
                   <a:srgbClr val="0B1F3A"/>
@@ -5143,6 +6167,7 @@
           <a:lstStyle xmlns:a="http://schemas.openxmlformats.org/drawingml/2006/main"/>
           <a:p xmlns:a="http://schemas.openxmlformats.org/drawingml/2006/main">
             <a:pPr algn="ctr">
+              <a:buNone/>
               <a:defRPr sz="1575" b="1">
                 <a:solidFill>
                   <a:srgbClr val="0B1F3A"/>
@@ -5199,6 +6224,7 @@
           <a:lstStyle xmlns:a="http://schemas.openxmlformats.org/drawingml/2006/main"/>
           <a:p xmlns:a="http://schemas.openxmlformats.org/drawingml/2006/main">
             <a:pPr algn="ctr">
+              <a:buNone/>
               <a:defRPr sz="1575" b="1">
                 <a:solidFill>
                   <a:srgbClr val="0B1F3A"/>
@@ -5255,6 +6281,7 @@
           <a:lstStyle xmlns:a="http://schemas.openxmlformats.org/drawingml/2006/main"/>
           <a:p xmlns:a="http://schemas.openxmlformats.org/drawingml/2006/main">
             <a:pPr algn="ctr">
+              <a:buNone/>
               <a:defRPr sz="1575" b="1">
                 <a:solidFill>
                   <a:srgbClr val="0B1F3A"/>
@@ -5311,6 +6338,7 @@
           <a:lstStyle xmlns:a="http://schemas.openxmlformats.org/drawingml/2006/main"/>
           <a:p xmlns:a="http://schemas.openxmlformats.org/drawingml/2006/main">
             <a:pPr algn="ctr">
+              <a:buNone/>
               <a:defRPr sz="1575" b="1">
                 <a:solidFill>
                   <a:srgbClr val="0B1F3A"/>
@@ -5330,7 +6358,7 @@
       </p:sp>
       <p:cxnSp>
         <p:nvCxnSpPr>
-          <p:cNvPr id="18" name=""/>
+          <p:cNvPr id="26" name=""/>
           <p:cNvCxnSpPr>
             <a:stCxn xmlns:a="http://schemas.openxmlformats.org/drawingml/2006/main" id="2" idx="3"/>
             <a:endCxn xmlns:a="http://schemas.openxmlformats.org/drawingml/2006/main" id="3" idx="1"/>
@@ -5356,7 +6384,7 @@
       </p:cxnSp>
       <p:cxnSp>
         <p:nvCxnSpPr>
-          <p:cNvPr id="19" name=""/>
+          <p:cNvPr id="27" name=""/>
           <p:cNvCxnSpPr>
             <a:stCxn xmlns:a="http://schemas.openxmlformats.org/drawingml/2006/main" id="3" idx="3"/>
             <a:endCxn xmlns:a="http://schemas.openxmlformats.org/drawingml/2006/main" id="4" idx="1"/>
@@ -5382,7 +6410,7 @@
       </p:cxnSp>
       <p:cxnSp>
         <p:nvCxnSpPr>
-          <p:cNvPr id="20" name=""/>
+          <p:cNvPr id="28" name=""/>
           <p:cNvCxnSpPr>
             <a:stCxn xmlns:a="http://schemas.openxmlformats.org/drawingml/2006/main" id="4" idx="3"/>
             <a:endCxn xmlns:a="http://schemas.openxmlformats.org/drawingml/2006/main" id="5" idx="1"/>
@@ -5439,6 +6467,7 @@
           <a:lstStyle xmlns:a="http://schemas.openxmlformats.org/drawingml/2006/main"/>
           <a:p xmlns:a="http://schemas.openxmlformats.org/drawingml/2006/main">
             <a:pPr>
+              <a:buNone/>
               <a:defRPr sz="1050" b="1">
                 <a:solidFill>
                   <a:srgbClr val="1565C0"/>
@@ -5522,6 +6551,7 @@
           <a:lstStyle xmlns:a="http://schemas.openxmlformats.org/drawingml/2006/main"/>
           <a:p xmlns:a="http://schemas.openxmlformats.org/drawingml/2006/main">
             <a:pPr>
+              <a:buNone/>
               <a:defRPr sz="825">
                 <a:solidFill>
                   <a:srgbClr val="0B1F3A">
@@ -5576,6 +6606,7 @@
           <a:lstStyle xmlns:a="http://schemas.openxmlformats.org/drawingml/2006/main"/>
           <a:p xmlns:a="http://schemas.openxmlformats.org/drawingml/2006/main">
             <a:pPr algn="r">
+              <a:buNone/>
               <a:defRPr sz="825" b="1">
                 <a:solidFill>
                   <a:srgbClr val="0B1F3A">
@@ -5667,6 +6698,7 @@
           <a:lstStyle xmlns:a="http://schemas.openxmlformats.org/drawingml/2006/main"/>
           <a:p xmlns:a="http://schemas.openxmlformats.org/drawingml/2006/main">
             <a:pPr>
+              <a:buNone/>
               <a:defRPr sz="2925" b="1">
                 <a:solidFill>
                   <a:srgbClr val="FFFFFF"/>
@@ -5752,6 +6784,7 @@
           <a:lstStyle xmlns:a="http://schemas.openxmlformats.org/drawingml/2006/main"/>
           <a:p xmlns:a="http://schemas.openxmlformats.org/drawingml/2006/main">
             <a:pPr>
+              <a:buNone/>
               <a:defRPr sz="1875" b="1">
                 <a:solidFill>
                   <a:srgbClr val="1EC5FF"/>
@@ -5802,6 +6835,7 @@
           <a:lstStyle xmlns:a="http://schemas.openxmlformats.org/drawingml/2006/main"/>
           <a:p xmlns:a="http://schemas.openxmlformats.org/drawingml/2006/main">
             <a:pPr>
+              <a:buNone/>
               <a:defRPr sz="1425">
                 <a:solidFill>
                   <a:srgbClr val="E2F2FF"/>
@@ -5852,6 +6886,7 @@
           <a:lstStyle xmlns:a="http://schemas.openxmlformats.org/drawingml/2006/main"/>
           <a:p xmlns:a="http://schemas.openxmlformats.org/drawingml/2006/main">
             <a:pPr>
+              <a:buNone/>
               <a:defRPr sz="1050" b="1">
                 <a:solidFill>
                   <a:srgbClr val="1EC5FF"/>
@@ -5935,6 +6970,7 @@
           <a:lstStyle xmlns:a="http://schemas.openxmlformats.org/drawingml/2006/main"/>
           <a:p xmlns:a="http://schemas.openxmlformats.org/drawingml/2006/main">
             <a:pPr>
+              <a:buNone/>
               <a:defRPr sz="825">
                 <a:solidFill>
                   <a:srgbClr val="FFFFFF">
@@ -5989,6 +7025,7 @@
           <a:lstStyle xmlns:a="http://schemas.openxmlformats.org/drawingml/2006/main"/>
           <a:p xmlns:a="http://schemas.openxmlformats.org/drawingml/2006/main">
             <a:pPr algn="r">
+              <a:buNone/>
               <a:defRPr sz="825" b="1">
                 <a:solidFill>
                   <a:srgbClr val="FFFFFF">
@@ -6072,6 +7109,7 @@
           <a:lstStyle xmlns:a="http://schemas.openxmlformats.org/drawingml/2006/main"/>
           <a:p xmlns:a="http://schemas.openxmlformats.org/drawingml/2006/main">
             <a:pPr>
+              <a:buNone/>
               <a:defRPr sz="2925" b="1">
                 <a:solidFill>
                   <a:srgbClr val="0B1F3A"/>
@@ -6122,6 +7160,7 @@
           <a:lstStyle xmlns:a="http://schemas.openxmlformats.org/drawingml/2006/main"/>
           <a:p xmlns:a="http://schemas.openxmlformats.org/drawingml/2006/main">
             <a:pPr>
+              <a:buNone/>
               <a:defRPr sz="3450" b="1">
                 <a:solidFill>
                   <a:srgbClr val="1565C0"/>
@@ -6172,6 +7211,7 @@
           <a:lstStyle xmlns:a="http://schemas.openxmlformats.org/drawingml/2006/main"/>
           <a:p xmlns:a="http://schemas.openxmlformats.org/drawingml/2006/main">
             <a:pPr>
+              <a:buNone/>
               <a:defRPr sz="1575" b="1">
                 <a:solidFill>
                   <a:srgbClr val="0B1F3A"/>
@@ -6253,6 +7293,7 @@
           <a:lstStyle xmlns:a="http://schemas.openxmlformats.org/drawingml/2006/main"/>
           <a:p xmlns:a="http://schemas.openxmlformats.org/drawingml/2006/main">
             <a:pPr>
+              <a:buNone/>
               <a:defRPr sz="3450" b="1">
                 <a:solidFill>
                   <a:srgbClr val="1565C0"/>
@@ -6303,6 +7344,7 @@
           <a:lstStyle xmlns:a="http://schemas.openxmlformats.org/drawingml/2006/main"/>
           <a:p xmlns:a="http://schemas.openxmlformats.org/drawingml/2006/main">
             <a:pPr>
+              <a:buNone/>
               <a:defRPr sz="1575" b="1">
                 <a:solidFill>
                   <a:srgbClr val="0B1F3A"/>
@@ -6384,6 +7426,7 @@
           <a:lstStyle xmlns:a="http://schemas.openxmlformats.org/drawingml/2006/main"/>
           <a:p xmlns:a="http://schemas.openxmlformats.org/drawingml/2006/main">
             <a:pPr>
+              <a:buNone/>
               <a:defRPr sz="3450" b="1">
                 <a:solidFill>
                   <a:srgbClr val="1565C0"/>
@@ -6434,6 +7477,7 @@
           <a:lstStyle xmlns:a="http://schemas.openxmlformats.org/drawingml/2006/main"/>
           <a:p xmlns:a="http://schemas.openxmlformats.org/drawingml/2006/main">
             <a:pPr>
+              <a:buNone/>
               <a:defRPr sz="1575" b="1">
                 <a:solidFill>
                   <a:srgbClr val="0B1F3A"/>
@@ -6484,6 +7528,7 @@
           <a:lstStyle xmlns:a="http://schemas.openxmlformats.org/drawingml/2006/main"/>
           <a:p xmlns:a="http://schemas.openxmlformats.org/drawingml/2006/main">
             <a:pPr>
+              <a:buNone/>
               <a:defRPr sz="1050" b="1">
                 <a:solidFill>
                   <a:srgbClr val="1565C0"/>
@@ -6567,6 +7612,7 @@
           <a:lstStyle xmlns:a="http://schemas.openxmlformats.org/drawingml/2006/main"/>
           <a:p xmlns:a="http://schemas.openxmlformats.org/drawingml/2006/main">
             <a:pPr>
+              <a:buNone/>
               <a:defRPr sz="825">
                 <a:solidFill>
                   <a:srgbClr val="0B1F3A">
@@ -6621,6 +7667,7 @@
           <a:lstStyle xmlns:a="http://schemas.openxmlformats.org/drawingml/2006/main"/>
           <a:p xmlns:a="http://schemas.openxmlformats.org/drawingml/2006/main">
             <a:pPr algn="r">
+              <a:buNone/>
               <a:defRPr sz="825" b="1">
                 <a:solidFill>
                   <a:srgbClr val="0B1F3A">
@@ -6712,6 +7759,7 @@
           <a:lstStyle xmlns:a="http://schemas.openxmlformats.org/drawingml/2006/main"/>
           <a:p xmlns:a="http://schemas.openxmlformats.org/drawingml/2006/main">
             <a:pPr>
+              <a:buNone/>
               <a:defRPr sz="1350" b="1">
                 <a:solidFill>
                   <a:srgbClr val="1EC5FF"/>
@@ -6762,6 +7810,7 @@
           <a:lstStyle xmlns:a="http://schemas.openxmlformats.org/drawingml/2006/main"/>
           <a:p xmlns:a="http://schemas.openxmlformats.org/drawingml/2006/main">
             <a:pPr>
+              <a:buNone/>
               <a:defRPr sz="3450" b="1">
                 <a:solidFill>
                   <a:srgbClr val="FFFFFF"/>
@@ -6812,6 +7861,7 @@
           <a:lstStyle xmlns:a="http://schemas.openxmlformats.org/drawingml/2006/main"/>
           <a:p xmlns:a="http://schemas.openxmlformats.org/drawingml/2006/main">
             <a:pPr>
+              <a:buNone/>
               <a:defRPr sz="1650">
                 <a:solidFill>
                   <a:srgbClr val="E2F2FF"/>
@@ -6936,6 +7986,7 @@
           <a:lstStyle xmlns:a="http://schemas.openxmlformats.org/drawingml/2006/main"/>
           <a:p xmlns:a="http://schemas.openxmlformats.org/drawingml/2006/main">
             <a:pPr>
+              <a:buNone/>
               <a:defRPr sz="1050" b="1">
                 <a:solidFill>
                   <a:srgbClr val="1EC5FF"/>
@@ -7019,6 +8070,7 @@
           <a:lstStyle xmlns:a="http://schemas.openxmlformats.org/drawingml/2006/main"/>
           <a:p xmlns:a="http://schemas.openxmlformats.org/drawingml/2006/main">
             <a:pPr>
+              <a:buNone/>
               <a:defRPr sz="825">
                 <a:solidFill>
                   <a:srgbClr val="FFFFFF">
@@ -7073,6 +8125,7 @@
           <a:lstStyle xmlns:a="http://schemas.openxmlformats.org/drawingml/2006/main"/>
           <a:p xmlns:a="http://schemas.openxmlformats.org/drawingml/2006/main">
             <a:pPr algn="r">
+              <a:buNone/>
               <a:defRPr sz="825" b="1">
                 <a:solidFill>
                   <a:srgbClr val="FFFFFF">
@@ -7156,6 +8209,7 @@
           <a:lstStyle xmlns:a="http://schemas.openxmlformats.org/drawingml/2006/main"/>
           <a:p xmlns:a="http://schemas.openxmlformats.org/drawingml/2006/main">
             <a:pPr>
+              <a:buNone/>
               <a:defRPr sz="2925" b="1">
                 <a:solidFill>
                   <a:srgbClr val="0B1F3A"/>
@@ -7206,6 +8260,7 @@
           <a:lstStyle xmlns:a="http://schemas.openxmlformats.org/drawingml/2006/main"/>
           <a:p xmlns:a="http://schemas.openxmlformats.org/drawingml/2006/main">
             <a:pPr>
+              <a:buNone/>
               <a:defRPr sz="3450" b="1">
                 <a:solidFill>
                   <a:srgbClr val="1565C0"/>
@@ -7256,6 +8311,7 @@
           <a:lstStyle xmlns:a="http://schemas.openxmlformats.org/drawingml/2006/main"/>
           <a:p xmlns:a="http://schemas.openxmlformats.org/drawingml/2006/main">
             <a:pPr>
+              <a:buNone/>
               <a:defRPr sz="1575" b="1">
                 <a:solidFill>
                   <a:srgbClr val="0B1F3A"/>
@@ -7337,6 +8393,7 @@
           <a:lstStyle xmlns:a="http://schemas.openxmlformats.org/drawingml/2006/main"/>
           <a:p xmlns:a="http://schemas.openxmlformats.org/drawingml/2006/main">
             <a:pPr>
+              <a:buNone/>
               <a:defRPr sz="3450" b="1">
                 <a:solidFill>
                   <a:srgbClr val="1565C0"/>
@@ -7387,6 +8444,7 @@
           <a:lstStyle xmlns:a="http://schemas.openxmlformats.org/drawingml/2006/main"/>
           <a:p xmlns:a="http://schemas.openxmlformats.org/drawingml/2006/main">
             <a:pPr>
+              <a:buNone/>
               <a:defRPr sz="1575" b="1">
                 <a:solidFill>
                   <a:srgbClr val="0B1F3A"/>
@@ -7468,6 +8526,7 @@
           <a:lstStyle xmlns:a="http://schemas.openxmlformats.org/drawingml/2006/main"/>
           <a:p xmlns:a="http://schemas.openxmlformats.org/drawingml/2006/main">
             <a:pPr>
+              <a:buNone/>
               <a:defRPr sz="3450" b="1">
                 <a:solidFill>
                   <a:srgbClr val="1565C0"/>
@@ -7518,6 +8577,7 @@
           <a:lstStyle xmlns:a="http://schemas.openxmlformats.org/drawingml/2006/main"/>
           <a:p xmlns:a="http://schemas.openxmlformats.org/drawingml/2006/main">
             <a:pPr>
+              <a:buNone/>
               <a:defRPr sz="1575" b="1">
                 <a:solidFill>
                   <a:srgbClr val="0B1F3A"/>
@@ -7568,6 +8628,7 @@
           <a:lstStyle xmlns:a="http://schemas.openxmlformats.org/drawingml/2006/main"/>
           <a:p xmlns:a="http://schemas.openxmlformats.org/drawingml/2006/main">
             <a:pPr>
+              <a:buNone/>
               <a:defRPr sz="1050" b="1">
                 <a:solidFill>
                   <a:srgbClr val="1565C0"/>
@@ -7651,6 +8712,7 @@
           <a:lstStyle xmlns:a="http://schemas.openxmlformats.org/drawingml/2006/main"/>
           <a:p xmlns:a="http://schemas.openxmlformats.org/drawingml/2006/main">
             <a:pPr>
+              <a:buNone/>
               <a:defRPr sz="825">
                 <a:solidFill>
                   <a:srgbClr val="0B1F3A">
@@ -7705,6 +8767,7 @@
           <a:lstStyle xmlns:a="http://schemas.openxmlformats.org/drawingml/2006/main"/>
           <a:p xmlns:a="http://schemas.openxmlformats.org/drawingml/2006/main">
             <a:pPr algn="r">
+              <a:buNone/>
               <a:defRPr sz="825" b="1">
                 <a:solidFill>
                   <a:srgbClr val="0B1F3A">
@@ -7796,6 +8859,7 @@
           <a:lstStyle xmlns:a="http://schemas.openxmlformats.org/drawingml/2006/main"/>
           <a:p xmlns:a="http://schemas.openxmlformats.org/drawingml/2006/main">
             <a:pPr>
+              <a:buNone/>
               <a:defRPr sz="5550" b="1">
                 <a:solidFill>
                   <a:srgbClr val="1EC5FF"/>
@@ -7846,6 +8910,7 @@
           <a:lstStyle xmlns:a="http://schemas.openxmlformats.org/drawingml/2006/main"/>
           <a:p xmlns:a="http://schemas.openxmlformats.org/drawingml/2006/main">
             <a:pPr>
+              <a:buNone/>
               <a:defRPr sz="2250" b="1">
                 <a:solidFill>
                   <a:srgbClr val="FFFFFF"/>
@@ -7929,6 +8994,7 @@
           <a:lstStyle xmlns:a="http://schemas.openxmlformats.org/drawingml/2006/main"/>
           <a:p xmlns:a="http://schemas.openxmlformats.org/drawingml/2006/main">
             <a:pPr>
+              <a:buNone/>
               <a:defRPr sz="1800">
                 <a:solidFill>
                   <a:srgbClr val="E2F2FF"/>
@@ -7979,6 +9045,7 @@
           <a:lstStyle xmlns:a="http://schemas.openxmlformats.org/drawingml/2006/main"/>
           <a:p xmlns:a="http://schemas.openxmlformats.org/drawingml/2006/main">
             <a:pPr>
+              <a:buNone/>
               <a:defRPr sz="1050" b="1">
                 <a:solidFill>
                   <a:srgbClr val="1EC5FF"/>
@@ -8062,6 +9129,7 @@
           <a:lstStyle xmlns:a="http://schemas.openxmlformats.org/drawingml/2006/main"/>
           <a:p xmlns:a="http://schemas.openxmlformats.org/drawingml/2006/main">
             <a:pPr>
+              <a:buNone/>
               <a:defRPr sz="825">
                 <a:solidFill>
                   <a:srgbClr val="FFFFFF">
@@ -8116,6 +9184,7 @@
           <a:lstStyle xmlns:a="http://schemas.openxmlformats.org/drawingml/2006/main"/>
           <a:p xmlns:a="http://schemas.openxmlformats.org/drawingml/2006/main">
             <a:pPr algn="r">
+              <a:buNone/>
               <a:defRPr sz="825" b="1">
                 <a:solidFill>
                   <a:srgbClr val="FFFFFF">
@@ -8199,6 +9268,7 @@
           <a:lstStyle xmlns:a="http://schemas.openxmlformats.org/drawingml/2006/main"/>
           <a:p xmlns:a="http://schemas.openxmlformats.org/drawingml/2006/main">
             <a:pPr>
+              <a:buNone/>
               <a:defRPr sz="2925" b="1">
                 <a:solidFill>
                   <a:srgbClr val="0B1F3A"/>
@@ -8249,6 +9319,7 @@
           <a:lstStyle xmlns:a="http://schemas.openxmlformats.org/drawingml/2006/main"/>
           <a:p xmlns:a="http://schemas.openxmlformats.org/drawingml/2006/main">
             <a:pPr>
+              <a:buNone/>
               <a:defRPr sz="1950">
                 <a:solidFill>
                   <a:srgbClr val="0B1F3A"/>
@@ -8266,6 +9337,7 @@
           </a:p>
           <a:p xmlns:a="http://schemas.openxmlformats.org/drawingml/2006/main">
             <a:pPr>
+              <a:buNone/>
               <a:defRPr sz="1950">
                 <a:solidFill>
                   <a:srgbClr val="0B1F3A"/>
@@ -8283,6 +9355,7 @@
           </a:p>
           <a:p xmlns:a="http://schemas.openxmlformats.org/drawingml/2006/main">
             <a:pPr>
+              <a:buNone/>
               <a:defRPr sz="1950">
                 <a:solidFill>
                   <a:srgbClr val="0B1F3A"/>
@@ -8333,6 +9406,7 @@
           <a:lstStyle xmlns:a="http://schemas.openxmlformats.org/drawingml/2006/main"/>
           <a:p xmlns:a="http://schemas.openxmlformats.org/drawingml/2006/main">
             <a:pPr>
+              <a:buNone/>
               <a:defRPr sz="1050" b="1">
                 <a:solidFill>
                   <a:srgbClr val="1565C0"/>
@@ -8416,6 +9490,7 @@
           <a:lstStyle xmlns:a="http://schemas.openxmlformats.org/drawingml/2006/main"/>
           <a:p xmlns:a="http://schemas.openxmlformats.org/drawingml/2006/main">
             <a:pPr>
+              <a:buNone/>
               <a:defRPr sz="825">
                 <a:solidFill>
                   <a:srgbClr val="0B1F3A">
@@ -8470,6 +9545,7 @@
           <a:lstStyle xmlns:a="http://schemas.openxmlformats.org/drawingml/2006/main"/>
           <a:p xmlns:a="http://schemas.openxmlformats.org/drawingml/2006/main">
             <a:pPr algn="r">
+              <a:buNone/>
               <a:defRPr sz="825" b="1">
                 <a:solidFill>
                   <a:srgbClr val="0B1F3A">
@@ -8561,6 +9637,7 @@
           <a:lstStyle xmlns:a="http://schemas.openxmlformats.org/drawingml/2006/main"/>
           <a:p xmlns:a="http://schemas.openxmlformats.org/drawingml/2006/main">
             <a:pPr>
+              <a:buNone/>
               <a:defRPr sz="1500" b="1">
                 <a:solidFill>
                   <a:srgbClr val="1EC5FF"/>
@@ -8611,6 +9688,7 @@
           <a:lstStyle xmlns:a="http://schemas.openxmlformats.org/drawingml/2006/main"/>
           <a:p xmlns:a="http://schemas.openxmlformats.org/drawingml/2006/main">
             <a:pPr>
+              <a:buNone/>
               <a:defRPr sz="2850" b="1">
                 <a:solidFill>
                   <a:srgbClr val="FFFFFF"/>
@@ -8661,6 +9739,7 @@
           <a:lstStyle xmlns:a="http://schemas.openxmlformats.org/drawingml/2006/main"/>
           <a:p xmlns:a="http://schemas.openxmlformats.org/drawingml/2006/main">
             <a:pPr>
+              <a:buNone/>
               <a:defRPr sz="1500">
                 <a:solidFill>
                   <a:srgbClr val="E2F2FF"/>
@@ -8785,6 +9864,7 @@
           <a:lstStyle xmlns:a="http://schemas.openxmlformats.org/drawingml/2006/main"/>
           <a:p xmlns:a="http://schemas.openxmlformats.org/drawingml/2006/main">
             <a:pPr>
+              <a:buNone/>
               <a:defRPr sz="1050" b="1">
                 <a:solidFill>
                   <a:srgbClr val="1EC5FF"/>
@@ -8868,6 +9948,7 @@
           <a:lstStyle xmlns:a="http://schemas.openxmlformats.org/drawingml/2006/main"/>
           <a:p xmlns:a="http://schemas.openxmlformats.org/drawingml/2006/main">
             <a:pPr>
+              <a:buNone/>
               <a:defRPr sz="825">
                 <a:solidFill>
                   <a:srgbClr val="FFFFFF">
@@ -8922,6 +10003,7 @@
           <a:lstStyle xmlns:a="http://schemas.openxmlformats.org/drawingml/2006/main"/>
           <a:p xmlns:a="http://schemas.openxmlformats.org/drawingml/2006/main">
             <a:pPr algn="r">
+              <a:buNone/>
               <a:defRPr sz="825" b="1">
                 <a:solidFill>
                   <a:srgbClr val="FFFFFF">
@@ -9005,6 +10087,7 @@
           <a:lstStyle xmlns:a="http://schemas.openxmlformats.org/drawingml/2006/main"/>
           <a:p xmlns:a="http://schemas.openxmlformats.org/drawingml/2006/main">
             <a:pPr>
+              <a:buNone/>
               <a:defRPr sz="2850" b="1">
                 <a:solidFill>
                   <a:srgbClr val="0B1F3A"/>
@@ -9086,6 +10169,7 @@
           <a:lstStyle xmlns:a="http://schemas.openxmlformats.org/drawingml/2006/main"/>
           <a:p xmlns:a="http://schemas.openxmlformats.org/drawingml/2006/main">
             <a:pPr>
+              <a:buNone/>
               <a:defRPr sz="1425" b="1">
                 <a:solidFill>
                   <a:srgbClr val="1565C0"/>
@@ -9140,14 +10224,14 @@
       </p:sp>
       <p:pic>
         <p:nvPicPr>
-          <p:cNvPr id="14" name="" descr="Diagrama didático autoral que apresenta: MCP não torna o agente confiável; torna a fronteira de contexto explícita. — A pergunta que guia a aula."/>
+          <p:cNvPr id="16" name="" descr="Diagrama didático autoral que apresenta: MCP não torna o agente confiável; torna a fronteira de contexto explícita. — A pergunta que guia a aula."/>
           <p:cNvPicPr>
             <a:picLocks xmlns:a="http://schemas.openxmlformats.org/drawingml/2006/main" noChangeAspect="1"/>
           </p:cNvPicPr>
           <p:nvPr/>
         </p:nvPicPr>
         <p:blipFill>
-          <a:blip xmlns:r="http://schemas.openxmlformats.org/officeDocument/2006/relationships" xmlns:a="http://schemas.openxmlformats.org/drawingml/2006/main" r:embed="Rb6050db9399342d0"/>
+          <a:blip xmlns:r="http://schemas.openxmlformats.org/officeDocument/2006/relationships" xmlns:a="http://schemas.openxmlformats.org/drawingml/2006/main" r:embed="Rfda5ddb0ef584e81"/>
           <a:stretch xmlns:a="http://schemas.openxmlformats.org/drawingml/2006/main"/>
         </p:blipFill>
         <p:spPr>
@@ -9193,6 +10277,7 @@
           <a:lstStyle xmlns:a="http://schemas.openxmlformats.org/drawingml/2006/main"/>
           <a:p xmlns:a="http://schemas.openxmlformats.org/drawingml/2006/main">
             <a:pPr>
+              <a:buNone/>
               <a:defRPr sz="1050" b="1">
                 <a:solidFill>
                   <a:srgbClr val="1565C0"/>
@@ -9276,6 +10361,7 @@
           <a:lstStyle xmlns:a="http://schemas.openxmlformats.org/drawingml/2006/main"/>
           <a:p xmlns:a="http://schemas.openxmlformats.org/drawingml/2006/main">
             <a:pPr>
+              <a:buNone/>
               <a:defRPr sz="825">
                 <a:solidFill>
                   <a:srgbClr val="0B1F3A">
@@ -9330,6 +10416,7 @@
           <a:lstStyle xmlns:a="http://schemas.openxmlformats.org/drawingml/2006/main"/>
           <a:p xmlns:a="http://schemas.openxmlformats.org/drawingml/2006/main">
             <a:pPr algn="r">
+              <a:buNone/>
               <a:defRPr sz="825" b="1">
                 <a:solidFill>
                   <a:srgbClr val="0B1F3A">
@@ -9413,6 +10500,7 @@
           <a:lstStyle xmlns:a="http://schemas.openxmlformats.org/drawingml/2006/main"/>
           <a:p xmlns:a="http://schemas.openxmlformats.org/drawingml/2006/main">
             <a:pPr>
+              <a:buNone/>
               <a:defRPr sz="1350" b="1">
                 <a:solidFill>
                   <a:srgbClr val="1565C0"/>
@@ -9463,6 +10551,7 @@
           <a:lstStyle xmlns:a="http://schemas.openxmlformats.org/drawingml/2006/main"/>
           <a:p xmlns:a="http://schemas.openxmlformats.org/drawingml/2006/main">
             <a:pPr>
+              <a:buNone/>
               <a:defRPr sz="3300" b="1">
                 <a:solidFill>
                   <a:srgbClr val="0B1F3A"/>
@@ -9513,6 +10602,7 @@
           <a:lstStyle xmlns:a="http://schemas.openxmlformats.org/drawingml/2006/main"/>
           <a:p xmlns:a="http://schemas.openxmlformats.org/drawingml/2006/main">
             <a:pPr>
+              <a:buNone/>
               <a:defRPr sz="1500">
                 <a:solidFill>
                   <a:srgbClr val="5C6F86"/>
@@ -9563,6 +10653,7 @@
           <a:lstStyle xmlns:a="http://schemas.openxmlformats.org/drawingml/2006/main"/>
           <a:p xmlns:a="http://schemas.openxmlformats.org/drawingml/2006/main">
             <a:pPr>
+              <a:buNone/>
               <a:defRPr sz="1050" b="1">
                 <a:solidFill>
                   <a:srgbClr val="1565C0"/>
@@ -9646,6 +10737,7 @@
           <a:lstStyle xmlns:a="http://schemas.openxmlformats.org/drawingml/2006/main"/>
           <a:p xmlns:a="http://schemas.openxmlformats.org/drawingml/2006/main">
             <a:pPr>
+              <a:buNone/>
               <a:defRPr sz="825">
                 <a:solidFill>
                   <a:srgbClr val="0B1F3A">
@@ -9700,6 +10792,7 @@
           <a:lstStyle xmlns:a="http://schemas.openxmlformats.org/drawingml/2006/main"/>
           <a:p xmlns:a="http://schemas.openxmlformats.org/drawingml/2006/main">
             <a:pPr algn="r">
+              <a:buNone/>
               <a:defRPr sz="825" b="1">
                 <a:solidFill>
                   <a:srgbClr val="0B1F3A">
@@ -9791,6 +10884,7 @@
           <a:lstStyle xmlns:a="http://schemas.openxmlformats.org/drawingml/2006/main"/>
           <a:p xmlns:a="http://schemas.openxmlformats.org/drawingml/2006/main">
             <a:pPr>
+              <a:buNone/>
               <a:defRPr sz="2925" b="1">
                 <a:solidFill>
                   <a:srgbClr val="FFFFFF"/>
@@ -9841,6 +10935,7 @@
           <a:lstStyle xmlns:a="http://schemas.openxmlformats.org/drawingml/2006/main"/>
           <a:p xmlns:a="http://schemas.openxmlformats.org/drawingml/2006/main">
             <a:pPr>
+              <a:buNone/>
               <a:defRPr sz="3450" b="1">
                 <a:solidFill>
                   <a:srgbClr val="1EC5FF"/>
@@ -9891,6 +10986,7 @@
           <a:lstStyle xmlns:a="http://schemas.openxmlformats.org/drawingml/2006/main"/>
           <a:p xmlns:a="http://schemas.openxmlformats.org/drawingml/2006/main">
             <a:pPr>
+              <a:buNone/>
               <a:defRPr sz="1575" b="1">
                 <a:solidFill>
                   <a:srgbClr val="FFFFFF"/>
@@ -9972,6 +11068,7 @@
           <a:lstStyle xmlns:a="http://schemas.openxmlformats.org/drawingml/2006/main"/>
           <a:p xmlns:a="http://schemas.openxmlformats.org/drawingml/2006/main">
             <a:pPr>
+              <a:buNone/>
               <a:defRPr sz="3450" b="1">
                 <a:solidFill>
                   <a:srgbClr val="1EC5FF"/>
@@ -10022,6 +11119,7 @@
           <a:lstStyle xmlns:a="http://schemas.openxmlformats.org/drawingml/2006/main"/>
           <a:p xmlns:a="http://schemas.openxmlformats.org/drawingml/2006/main">
             <a:pPr>
+              <a:buNone/>
               <a:defRPr sz="1575" b="1">
                 <a:solidFill>
                   <a:srgbClr val="FFFFFF"/>
@@ -10103,6 +11201,7 @@
           <a:lstStyle xmlns:a="http://schemas.openxmlformats.org/drawingml/2006/main"/>
           <a:p xmlns:a="http://schemas.openxmlformats.org/drawingml/2006/main">
             <a:pPr>
+              <a:buNone/>
               <a:defRPr sz="3450" b="1">
                 <a:solidFill>
                   <a:srgbClr val="1EC5FF"/>
@@ -10153,6 +11252,7 @@
           <a:lstStyle xmlns:a="http://schemas.openxmlformats.org/drawingml/2006/main"/>
           <a:p xmlns:a="http://schemas.openxmlformats.org/drawingml/2006/main">
             <a:pPr>
+              <a:buNone/>
               <a:defRPr sz="1575" b="1">
                 <a:solidFill>
                   <a:srgbClr val="FFFFFF"/>
@@ -10203,6 +11303,7 @@
           <a:lstStyle xmlns:a="http://schemas.openxmlformats.org/drawingml/2006/main"/>
           <a:p xmlns:a="http://schemas.openxmlformats.org/drawingml/2006/main">
             <a:pPr>
+              <a:buNone/>
               <a:defRPr sz="1050" b="1">
                 <a:solidFill>
                   <a:srgbClr val="1EC5FF"/>
@@ -10286,6 +11387,7 @@
           <a:lstStyle xmlns:a="http://schemas.openxmlformats.org/drawingml/2006/main"/>
           <a:p xmlns:a="http://schemas.openxmlformats.org/drawingml/2006/main">
             <a:pPr>
+              <a:buNone/>
               <a:defRPr sz="825">
                 <a:solidFill>
                   <a:srgbClr val="FFFFFF">
@@ -10340,6 +11442,7 @@
           <a:lstStyle xmlns:a="http://schemas.openxmlformats.org/drawingml/2006/main"/>
           <a:p xmlns:a="http://schemas.openxmlformats.org/drawingml/2006/main">
             <a:pPr algn="r">
+              <a:buNone/>
               <a:defRPr sz="825" b="1">
                 <a:solidFill>
                   <a:srgbClr val="FFFFFF">
@@ -10431,6 +11534,7 @@
           <a:lstStyle xmlns:a="http://schemas.openxmlformats.org/drawingml/2006/main"/>
           <a:p xmlns:a="http://schemas.openxmlformats.org/drawingml/2006/main">
             <a:pPr>
+              <a:buNone/>
               <a:defRPr sz="2925" b="1">
                 <a:solidFill>
                   <a:srgbClr val="FFFFFF"/>
@@ -10481,6 +11585,7 @@
           <a:lstStyle xmlns:a="http://schemas.openxmlformats.org/drawingml/2006/main"/>
           <a:p xmlns:a="http://schemas.openxmlformats.org/drawingml/2006/main">
             <a:pPr>
+              <a:buNone/>
               <a:defRPr sz="1650">
                 <a:solidFill>
                   <a:srgbClr val="E2F2FF"/>
@@ -10531,6 +11636,7 @@
           <a:lstStyle xmlns:a="http://schemas.openxmlformats.org/drawingml/2006/main"/>
           <a:p xmlns:a="http://schemas.openxmlformats.org/drawingml/2006/main">
             <a:pPr>
+              <a:buNone/>
               <a:defRPr sz="1800">
                 <a:solidFill>
                   <a:srgbClr val="FFFFFF"/>
@@ -10548,6 +11654,7 @@
           </a:p>
           <a:p xmlns:a="http://schemas.openxmlformats.org/drawingml/2006/main">
             <a:pPr>
+              <a:buNone/>
               <a:defRPr sz="1800">
                 <a:solidFill>
                   <a:srgbClr val="FFFFFF"/>
@@ -10565,6 +11672,7 @@
           </a:p>
           <a:p xmlns:a="http://schemas.openxmlformats.org/drawingml/2006/main">
             <a:pPr>
+              <a:buNone/>
               <a:defRPr sz="1800">
                 <a:solidFill>
                   <a:srgbClr val="FFFFFF"/>
@@ -10689,6 +11797,7 @@
           <a:lstStyle xmlns:a="http://schemas.openxmlformats.org/drawingml/2006/main"/>
           <a:p xmlns:a="http://schemas.openxmlformats.org/drawingml/2006/main">
             <a:pPr algn="ctr">
+              <a:buNone/>
               <a:defRPr sz="4650" b="1">
                 <a:solidFill>
                   <a:srgbClr val="1EC5FF"/>
@@ -10739,6 +11848,7 @@
           <a:lstStyle xmlns:a="http://schemas.openxmlformats.org/drawingml/2006/main"/>
           <a:p xmlns:a="http://schemas.openxmlformats.org/drawingml/2006/main">
             <a:pPr>
+              <a:buNone/>
               <a:defRPr sz="1050" b="1">
                 <a:solidFill>
                   <a:srgbClr val="1EC5FF"/>
@@ -10822,6 +11932,7 @@
           <a:lstStyle xmlns:a="http://schemas.openxmlformats.org/drawingml/2006/main"/>
           <a:p xmlns:a="http://schemas.openxmlformats.org/drawingml/2006/main">
             <a:pPr>
+              <a:buNone/>
               <a:defRPr sz="825">
                 <a:solidFill>
                   <a:srgbClr val="FFFFFF">
@@ -10876,6 +11987,7 @@
           <a:lstStyle xmlns:a="http://schemas.openxmlformats.org/drawingml/2006/main"/>
           <a:p xmlns:a="http://schemas.openxmlformats.org/drawingml/2006/main">
             <a:pPr algn="r">
+              <a:buNone/>
               <a:defRPr sz="825" b="1">
                 <a:solidFill>
                   <a:srgbClr val="FFFFFF">
@@ -10959,6 +12071,7 @@
           <a:lstStyle xmlns:a="http://schemas.openxmlformats.org/drawingml/2006/main"/>
           <a:p xmlns:a="http://schemas.openxmlformats.org/drawingml/2006/main">
             <a:pPr>
+              <a:buNone/>
               <a:defRPr sz="2925" b="1">
                 <a:solidFill>
                   <a:srgbClr val="0B1F3A"/>
@@ -11009,6 +12122,7 @@
           <a:lstStyle xmlns:a="http://schemas.openxmlformats.org/drawingml/2006/main"/>
           <a:p xmlns:a="http://schemas.openxmlformats.org/drawingml/2006/main">
             <a:pPr>
+              <a:buNone/>
               <a:defRPr sz="1650">
                 <a:solidFill>
                   <a:srgbClr val="5C6F86"/>
@@ -11059,6 +12173,7 @@
           <a:lstStyle xmlns:a="http://schemas.openxmlformats.org/drawingml/2006/main"/>
           <a:p xmlns:a="http://schemas.openxmlformats.org/drawingml/2006/main">
             <a:pPr>
+              <a:buNone/>
               <a:defRPr sz="1800">
                 <a:solidFill>
                   <a:srgbClr val="0B1F3A"/>
@@ -11076,6 +12191,7 @@
           </a:p>
           <a:p xmlns:a="http://schemas.openxmlformats.org/drawingml/2006/main">
             <a:pPr>
+              <a:buNone/>
               <a:defRPr sz="1800">
                 <a:solidFill>
                   <a:srgbClr val="0B1F3A"/>
@@ -11093,6 +12209,7 @@
           </a:p>
           <a:p xmlns:a="http://schemas.openxmlformats.org/drawingml/2006/main">
             <a:pPr>
+              <a:buNone/>
               <a:defRPr sz="1800">
                 <a:solidFill>
                   <a:srgbClr val="0B1F3A"/>
@@ -11217,6 +12334,7 @@
           <a:lstStyle xmlns:a="http://schemas.openxmlformats.org/drawingml/2006/main"/>
           <a:p xmlns:a="http://schemas.openxmlformats.org/drawingml/2006/main">
             <a:pPr algn="ctr">
+              <a:buNone/>
               <a:defRPr sz="4650" b="1">
                 <a:solidFill>
                   <a:srgbClr val="1565C0"/>
@@ -11267,6 +12385,7 @@
           <a:lstStyle xmlns:a="http://schemas.openxmlformats.org/drawingml/2006/main"/>
           <a:p xmlns:a="http://schemas.openxmlformats.org/drawingml/2006/main">
             <a:pPr>
+              <a:buNone/>
               <a:defRPr sz="1050" b="1">
                 <a:solidFill>
                   <a:srgbClr val="1565C0"/>
@@ -11350,6 +12469,7 @@
           <a:lstStyle xmlns:a="http://schemas.openxmlformats.org/drawingml/2006/main"/>
           <a:p xmlns:a="http://schemas.openxmlformats.org/drawingml/2006/main">
             <a:pPr>
+              <a:buNone/>
               <a:defRPr sz="825">
                 <a:solidFill>
                   <a:srgbClr val="0B1F3A">
@@ -11404,6 +12524,7 @@
           <a:lstStyle xmlns:a="http://schemas.openxmlformats.org/drawingml/2006/main"/>
           <a:p xmlns:a="http://schemas.openxmlformats.org/drawingml/2006/main">
             <a:pPr algn="r">
+              <a:buNone/>
               <a:defRPr sz="825" b="1">
                 <a:solidFill>
                   <a:srgbClr val="0B1F3A">
@@ -11495,6 +12616,7 @@
           <a:lstStyle xmlns:a="http://schemas.openxmlformats.org/drawingml/2006/main"/>
           <a:p xmlns:a="http://schemas.openxmlformats.org/drawingml/2006/main">
             <a:pPr>
+              <a:buNone/>
               <a:defRPr sz="2925" b="1">
                 <a:solidFill>
                   <a:srgbClr val="FFFFFF"/>
@@ -11545,6 +12667,7 @@
           <a:lstStyle xmlns:a="http://schemas.openxmlformats.org/drawingml/2006/main"/>
           <a:p xmlns:a="http://schemas.openxmlformats.org/drawingml/2006/main">
             <a:pPr>
+              <a:buNone/>
               <a:defRPr sz="1950" b="1">
                 <a:solidFill>
                   <a:srgbClr val="FFFFFF"/>
@@ -11601,14 +12724,14 @@
       </p:sp>
       <p:pic>
         <p:nvPicPr>
-          <p:cNvPr id="13" name="" descr="Figura oficial da documentação dbt usada para explicar: A arquitetura oficial mostra múltiplos consumidores — O servidor conecta ativos dbt a diferentes fluxos de agente.."/>
+          <p:cNvPr id="15" name="" descr="Figura oficial da documentação dbt usada para explicar: A arquitetura oficial mostra múltiplos consumidores — O servidor conecta ativos dbt a diferentes fluxos de agente.."/>
           <p:cNvPicPr>
             <a:picLocks xmlns:a="http://schemas.openxmlformats.org/drawingml/2006/main" noChangeAspect="1"/>
           </p:cNvPicPr>
           <p:nvPr/>
         </p:nvPicPr>
         <p:blipFill>
-          <a:blip xmlns:r="http://schemas.openxmlformats.org/officeDocument/2006/relationships" xmlns:a="http://schemas.openxmlformats.org/drawingml/2006/main" r:embed="R6a6dcf7bad5a4d11"/>
+          <a:blip xmlns:r="http://schemas.openxmlformats.org/officeDocument/2006/relationships" xmlns:a="http://schemas.openxmlformats.org/drawingml/2006/main" r:embed="R33f25d3bdf0d4c79"/>
           <a:stretch xmlns:a="http://schemas.openxmlformats.org/drawingml/2006/main"/>
         </p:blipFill>
         <p:spPr>
@@ -11654,6 +12777,7 @@
           <a:lstStyle xmlns:a="http://schemas.openxmlformats.org/drawingml/2006/main"/>
           <a:p xmlns:a="http://schemas.openxmlformats.org/drawingml/2006/main">
             <a:pPr>
+              <a:buNone/>
               <a:defRPr sz="900" i="1">
                 <a:solidFill>
                   <a:srgbClr val="5C6F86"/>
@@ -11704,6 +12828,7 @@
           <a:lstStyle xmlns:a="http://schemas.openxmlformats.org/drawingml/2006/main"/>
           <a:p xmlns:a="http://schemas.openxmlformats.org/drawingml/2006/main">
             <a:pPr>
+              <a:buNone/>
               <a:defRPr sz="1050" b="1">
                 <a:solidFill>
                   <a:srgbClr val="1EC5FF"/>
@@ -11787,6 +12912,7 @@
           <a:lstStyle xmlns:a="http://schemas.openxmlformats.org/drawingml/2006/main"/>
           <a:p xmlns:a="http://schemas.openxmlformats.org/drawingml/2006/main">
             <a:pPr>
+              <a:buNone/>
               <a:defRPr sz="825">
                 <a:solidFill>
                   <a:srgbClr val="FFFFFF">
@@ -11841,6 +12967,7 @@
           <a:lstStyle xmlns:a="http://schemas.openxmlformats.org/drawingml/2006/main"/>
           <a:p xmlns:a="http://schemas.openxmlformats.org/drawingml/2006/main">
             <a:pPr algn="r">
+              <a:buNone/>
               <a:defRPr sz="825" b="1">
                 <a:solidFill>
                   <a:srgbClr val="FFFFFF">
@@ -11932,6 +13059,7 @@
           <a:lstStyle xmlns:a="http://schemas.openxmlformats.org/drawingml/2006/main"/>
           <a:p xmlns:a="http://schemas.openxmlformats.org/drawingml/2006/main">
             <a:pPr>
+              <a:buNone/>
               <a:defRPr sz="2925" b="1">
                 <a:solidFill>
                   <a:srgbClr val="FFFFFF"/>
@@ -11982,6 +13110,7 @@
           <a:lstStyle xmlns:a="http://schemas.openxmlformats.org/drawingml/2006/main"/>
           <a:p xmlns:a="http://schemas.openxmlformats.org/drawingml/2006/main">
             <a:pPr>
+              <a:buNone/>
               <a:defRPr sz="1650">
                 <a:solidFill>
                   <a:srgbClr val="E2F2FF"/>
@@ -12032,6 +13161,7 @@
           <a:lstStyle xmlns:a="http://schemas.openxmlformats.org/drawingml/2006/main"/>
           <a:p xmlns:a="http://schemas.openxmlformats.org/drawingml/2006/main">
             <a:pPr>
+              <a:buNone/>
               <a:defRPr sz="1800">
                 <a:solidFill>
                   <a:srgbClr val="FFFFFF"/>
@@ -12049,6 +13179,7 @@
           </a:p>
           <a:p xmlns:a="http://schemas.openxmlformats.org/drawingml/2006/main">
             <a:pPr>
+              <a:buNone/>
               <a:defRPr sz="1800">
                 <a:solidFill>
                   <a:srgbClr val="FFFFFF"/>
@@ -12066,6 +13197,7 @@
           </a:p>
           <a:p xmlns:a="http://schemas.openxmlformats.org/drawingml/2006/main">
             <a:pPr>
+              <a:buNone/>
               <a:defRPr sz="1800">
                 <a:solidFill>
                   <a:srgbClr val="FFFFFF"/>
@@ -12083,6 +13215,7 @@
           </a:p>
           <a:p xmlns:a="http://schemas.openxmlformats.org/drawingml/2006/main">
             <a:pPr>
+              <a:buNone/>
               <a:defRPr sz="1800">
                 <a:solidFill>
                   <a:srgbClr val="FFFFFF"/>
@@ -12207,6 +13340,7 @@
           <a:lstStyle xmlns:a="http://schemas.openxmlformats.org/drawingml/2006/main"/>
           <a:p xmlns:a="http://schemas.openxmlformats.org/drawingml/2006/main">
             <a:pPr algn="ctr">
+              <a:buNone/>
               <a:defRPr sz="4650" b="1">
                 <a:solidFill>
                   <a:srgbClr val="1EC5FF"/>
@@ -12257,6 +13391,7 @@
           <a:lstStyle xmlns:a="http://schemas.openxmlformats.org/drawingml/2006/main"/>
           <a:p xmlns:a="http://schemas.openxmlformats.org/drawingml/2006/main">
             <a:pPr>
+              <a:buNone/>
               <a:defRPr sz="1050" b="1">
                 <a:solidFill>
                   <a:srgbClr val="1EC5FF"/>
@@ -12340,6 +13475,7 @@
           <a:lstStyle xmlns:a="http://schemas.openxmlformats.org/drawingml/2006/main"/>
           <a:p xmlns:a="http://schemas.openxmlformats.org/drawingml/2006/main">
             <a:pPr>
+              <a:buNone/>
               <a:defRPr sz="825">
                 <a:solidFill>
                   <a:srgbClr val="FFFFFF">
@@ -12394,6 +13530,7 @@
           <a:lstStyle xmlns:a="http://schemas.openxmlformats.org/drawingml/2006/main"/>
           <a:p xmlns:a="http://schemas.openxmlformats.org/drawingml/2006/main">
             <a:pPr algn="r">
+              <a:buNone/>
               <a:defRPr sz="825" b="1">
                 <a:solidFill>
                   <a:srgbClr val="FFFFFF">
@@ -12477,6 +13614,7 @@
           <a:lstStyle xmlns:a="http://schemas.openxmlformats.org/drawingml/2006/main"/>
           <a:p xmlns:a="http://schemas.openxmlformats.org/drawingml/2006/main">
             <a:pPr>
+              <a:buNone/>
               <a:defRPr sz="2925" b="1">
                 <a:solidFill>
                   <a:srgbClr val="0B1F3A"/>
@@ -12533,6 +13671,7 @@
           <a:lstStyle xmlns:a="http://schemas.openxmlformats.org/drawingml/2006/main"/>
           <a:p xmlns:a="http://schemas.openxmlformats.org/drawingml/2006/main">
             <a:pPr algn="ctr">
+              <a:buNone/>
               <a:defRPr sz="1500" b="1">
                 <a:solidFill>
                   <a:srgbClr val="0B1F3A"/>
@@ -12589,6 +13728,7 @@
           <a:lstStyle xmlns:a="http://schemas.openxmlformats.org/drawingml/2006/main"/>
           <a:p xmlns:a="http://schemas.openxmlformats.org/drawingml/2006/main">
             <a:pPr algn="ctr">
+              <a:buNone/>
               <a:defRPr sz="1500" b="1">
                 <a:solidFill>
                   <a:srgbClr val="0B1F3A"/>
@@ -12645,6 +13785,7 @@
           <a:lstStyle xmlns:a="http://schemas.openxmlformats.org/drawingml/2006/main"/>
           <a:p xmlns:a="http://schemas.openxmlformats.org/drawingml/2006/main">
             <a:pPr algn="ctr">
+              <a:buNone/>
               <a:defRPr sz="1500" b="1">
                 <a:solidFill>
                   <a:srgbClr val="0B1F3A"/>
@@ -12701,6 +13842,7 @@
           <a:lstStyle xmlns:a="http://schemas.openxmlformats.org/drawingml/2006/main"/>
           <a:p xmlns:a="http://schemas.openxmlformats.org/drawingml/2006/main">
             <a:pPr algn="ctr">
+              <a:buNone/>
               <a:defRPr sz="1500" b="1">
                 <a:solidFill>
                   <a:srgbClr val="0B1F3A"/>
@@ -12751,6 +13893,7 @@
           <a:lstStyle xmlns:a="http://schemas.openxmlformats.org/drawingml/2006/main"/>
           <a:p xmlns:a="http://schemas.openxmlformats.org/drawingml/2006/main">
             <a:pPr>
+              <a:buNone/>
               <a:defRPr sz="1050" b="1">
                 <a:solidFill>
                   <a:srgbClr val="1565C0"/>
@@ -12834,6 +13977,7 @@
           <a:lstStyle xmlns:a="http://schemas.openxmlformats.org/drawingml/2006/main"/>
           <a:p xmlns:a="http://schemas.openxmlformats.org/drawingml/2006/main">
             <a:pPr>
+              <a:buNone/>
               <a:defRPr sz="825">
                 <a:solidFill>
                   <a:srgbClr val="0B1F3A">
@@ -12888,6 +14032,7 @@
           <a:lstStyle xmlns:a="http://schemas.openxmlformats.org/drawingml/2006/main"/>
           <a:p xmlns:a="http://schemas.openxmlformats.org/drawingml/2006/main">
             <a:pPr algn="r">
+              <a:buNone/>
               <a:defRPr sz="825" b="1">
                 <a:solidFill>
                   <a:srgbClr val="0B1F3A">
@@ -12971,6 +14116,7 @@
           <a:lstStyle xmlns:a="http://schemas.openxmlformats.org/drawingml/2006/main"/>
           <a:p xmlns:a="http://schemas.openxmlformats.org/drawingml/2006/main">
             <a:pPr>
+              <a:buNone/>
               <a:defRPr sz="2925" b="1">
                 <a:solidFill>
                   <a:srgbClr val="0B1F3A"/>
@@ -13021,6 +14167,7 @@
           <a:lstStyle xmlns:a="http://schemas.openxmlformats.org/drawingml/2006/main"/>
           <a:p xmlns:a="http://schemas.openxmlformats.org/drawingml/2006/main">
             <a:pPr>
+              <a:buNone/>
               <a:defRPr sz="1650">
                 <a:solidFill>
                   <a:srgbClr val="5C6F86"/>
@@ -13071,6 +14218,7 @@
           <a:lstStyle xmlns:a="http://schemas.openxmlformats.org/drawingml/2006/main"/>
           <a:p xmlns:a="http://schemas.openxmlformats.org/drawingml/2006/main">
             <a:pPr>
+              <a:buNone/>
               <a:defRPr sz="1800">
                 <a:solidFill>
                   <a:srgbClr val="0B1F3A"/>
@@ -13088,6 +14236,7 @@
           </a:p>
           <a:p xmlns:a="http://schemas.openxmlformats.org/drawingml/2006/main">
             <a:pPr>
+              <a:buNone/>
               <a:defRPr sz="1800">
                 <a:solidFill>
                   <a:srgbClr val="0B1F3A"/>
@@ -13105,6 +14254,7 @@
           </a:p>
           <a:p xmlns:a="http://schemas.openxmlformats.org/drawingml/2006/main">
             <a:pPr>
+              <a:buNone/>
               <a:defRPr sz="1800">
                 <a:solidFill>
                   <a:srgbClr val="0B1F3A"/>
@@ -13229,6 +14379,7 @@
           <a:lstStyle xmlns:a="http://schemas.openxmlformats.org/drawingml/2006/main"/>
           <a:p xmlns:a="http://schemas.openxmlformats.org/drawingml/2006/main">
             <a:pPr algn="ctr">
+              <a:buNone/>
               <a:defRPr sz="4650" b="1">
                 <a:solidFill>
                   <a:srgbClr val="1565C0"/>
@@ -13279,6 +14430,7 @@
           <a:lstStyle xmlns:a="http://schemas.openxmlformats.org/drawingml/2006/main"/>
           <a:p xmlns:a="http://schemas.openxmlformats.org/drawingml/2006/main">
             <a:pPr>
+              <a:buNone/>
               <a:defRPr sz="1050" b="1">
                 <a:solidFill>
                   <a:srgbClr val="1565C0"/>
@@ -13362,6 +14514,7 @@
           <a:lstStyle xmlns:a="http://schemas.openxmlformats.org/drawingml/2006/main"/>
           <a:p xmlns:a="http://schemas.openxmlformats.org/drawingml/2006/main">
             <a:pPr>
+              <a:buNone/>
               <a:defRPr sz="825">
                 <a:solidFill>
                   <a:srgbClr val="0B1F3A">
@@ -13416,6 +14569,7 @@
           <a:lstStyle xmlns:a="http://schemas.openxmlformats.org/drawingml/2006/main"/>
           <a:p xmlns:a="http://schemas.openxmlformats.org/drawingml/2006/main">
             <a:pPr algn="r">
+              <a:buNone/>
               <a:defRPr sz="825" b="1">
                 <a:solidFill>
                   <a:srgbClr val="0B1F3A">

--- a/assets/decks/episodio-11-dbt-mcp.pptx
+++ b/assets/decks/episodio-11-dbt-mcp.pptx
@@ -2,33 +2,33 @@
 <file path=ppt/presentation.xml><?xml version="1.0" encoding="utf-8"?>
 <p:presentation xmlns:p="http://schemas.openxmlformats.org/presentationml/2006/main">
   <p:sldMasterIdLst>
-    <p:sldMasterId xmlns:r="http://schemas.openxmlformats.org/officeDocument/2006/relationships" id="2147483648" r:id="Rca30f559edc14b40"/>
-    <p:sldMasterId xmlns:r="http://schemas.openxmlformats.org/officeDocument/2006/relationships" id="2147483650" r:id="R06e6ccff9cc449f7"/>
+    <p:sldMasterId xmlns:r="http://schemas.openxmlformats.org/officeDocument/2006/relationships" id="2147483648" r:id="Rfefb2683627b45dd"/>
+    <p:sldMasterId xmlns:r="http://schemas.openxmlformats.org/officeDocument/2006/relationships" id="2147483650" r:id="Ra01ffb5c444748bd"/>
   </p:sldMasterIdLst>
   <p:notesMasterIdLst>
-    <p:notesMasterId xmlns:r="http://schemas.openxmlformats.org/officeDocument/2006/relationships" r:id="Raf2c3d09a4814075"/>
+    <p:notesMasterId xmlns:r="http://schemas.openxmlformats.org/officeDocument/2006/relationships" r:id="Rae3c19a7f0634210"/>
   </p:notesMasterIdLst>
   <p:sldIdLst>
-    <p:sldId xmlns:r="http://schemas.openxmlformats.org/officeDocument/2006/relationships" id="256" r:id="Rbaae7a27d0a84ca3"/>
-    <p:sldId xmlns:r="http://schemas.openxmlformats.org/officeDocument/2006/relationships" id="257" r:id="R0f6cbc87471e4ca9"/>
-    <p:sldId xmlns:r="http://schemas.openxmlformats.org/officeDocument/2006/relationships" id="258" r:id="Rcc3fe52b11a6499a"/>
-    <p:sldId xmlns:r="http://schemas.openxmlformats.org/officeDocument/2006/relationships" id="259" r:id="Rb45935e9cf414bc8"/>
-    <p:sldId xmlns:r="http://schemas.openxmlformats.org/officeDocument/2006/relationships" id="260" r:id="Rb20d7838ae204e81"/>
-    <p:sldId xmlns:r="http://schemas.openxmlformats.org/officeDocument/2006/relationships" id="261" r:id="R886324657ca541c5"/>
-    <p:sldId xmlns:r="http://schemas.openxmlformats.org/officeDocument/2006/relationships" id="262" r:id="Rf801a56b45dd4e50"/>
-    <p:sldId xmlns:r="http://schemas.openxmlformats.org/officeDocument/2006/relationships" id="263" r:id="Rc47d59b3b88b405d"/>
-    <p:sldId xmlns:r="http://schemas.openxmlformats.org/officeDocument/2006/relationships" id="264" r:id="R30240d2e2f924dd5"/>
-    <p:sldId xmlns:r="http://schemas.openxmlformats.org/officeDocument/2006/relationships" id="265" r:id="Rd8161075d0074499"/>
-    <p:sldId xmlns:r="http://schemas.openxmlformats.org/officeDocument/2006/relationships" id="266" r:id="Rf4caf2e08efb4edb"/>
-    <p:sldId xmlns:r="http://schemas.openxmlformats.org/officeDocument/2006/relationships" id="267" r:id="R7e845537224f4393"/>
-    <p:sldId xmlns:r="http://schemas.openxmlformats.org/officeDocument/2006/relationships" id="268" r:id="R59566901350a4e1a"/>
-    <p:sldId xmlns:r="http://schemas.openxmlformats.org/officeDocument/2006/relationships" id="269" r:id="R91596e54ea2943ee"/>
-    <p:sldId xmlns:r="http://schemas.openxmlformats.org/officeDocument/2006/relationships" id="270" r:id="R4acc6ae8e93f4786"/>
-    <p:sldId xmlns:r="http://schemas.openxmlformats.org/officeDocument/2006/relationships" id="271" r:id="R0ee335df6fed4a26"/>
-    <p:sldId xmlns:r="http://schemas.openxmlformats.org/officeDocument/2006/relationships" id="272" r:id="R80f1baf348c5451a"/>
-    <p:sldId xmlns:r="http://schemas.openxmlformats.org/officeDocument/2006/relationships" id="273" r:id="R041f318b10384f1b"/>
-    <p:sldId xmlns:r="http://schemas.openxmlformats.org/officeDocument/2006/relationships" id="274" r:id="Ref38ff74b3234f99"/>
-    <p:sldId xmlns:r="http://schemas.openxmlformats.org/officeDocument/2006/relationships" id="275" r:id="R680d925bbfec43c5"/>
+    <p:sldId xmlns:r="http://schemas.openxmlformats.org/officeDocument/2006/relationships" id="256" r:id="R45f471bbcb3b405a"/>
+    <p:sldId xmlns:r="http://schemas.openxmlformats.org/officeDocument/2006/relationships" id="257" r:id="R27a9a1a055f541b4"/>
+    <p:sldId xmlns:r="http://schemas.openxmlformats.org/officeDocument/2006/relationships" id="258" r:id="Rd119cf7d216f4bb1"/>
+    <p:sldId xmlns:r="http://schemas.openxmlformats.org/officeDocument/2006/relationships" id="259" r:id="R48b0eb40f25d4256"/>
+    <p:sldId xmlns:r="http://schemas.openxmlformats.org/officeDocument/2006/relationships" id="260" r:id="Rfaadd1294e574704"/>
+    <p:sldId xmlns:r="http://schemas.openxmlformats.org/officeDocument/2006/relationships" id="261" r:id="Rdb4f6c3f47124fda"/>
+    <p:sldId xmlns:r="http://schemas.openxmlformats.org/officeDocument/2006/relationships" id="262" r:id="Rb8385f2bab51470d"/>
+    <p:sldId xmlns:r="http://schemas.openxmlformats.org/officeDocument/2006/relationships" id="263" r:id="R3875c14dbd71444b"/>
+    <p:sldId xmlns:r="http://schemas.openxmlformats.org/officeDocument/2006/relationships" id="264" r:id="R7392af874aee4fd2"/>
+    <p:sldId xmlns:r="http://schemas.openxmlformats.org/officeDocument/2006/relationships" id="265" r:id="R834359e0e26b4016"/>
+    <p:sldId xmlns:r="http://schemas.openxmlformats.org/officeDocument/2006/relationships" id="266" r:id="Ra939368c9c6449d7"/>
+    <p:sldId xmlns:r="http://schemas.openxmlformats.org/officeDocument/2006/relationships" id="267" r:id="Rd1224fa426ac4006"/>
+    <p:sldId xmlns:r="http://schemas.openxmlformats.org/officeDocument/2006/relationships" id="268" r:id="Rca5a3533822341a3"/>
+    <p:sldId xmlns:r="http://schemas.openxmlformats.org/officeDocument/2006/relationships" id="269" r:id="R6ee4e2b0ceed4d0e"/>
+    <p:sldId xmlns:r="http://schemas.openxmlformats.org/officeDocument/2006/relationships" id="270" r:id="R5d7ea61834e347ca"/>
+    <p:sldId xmlns:r="http://schemas.openxmlformats.org/officeDocument/2006/relationships" id="271" r:id="R32a6d1c094fc46f3"/>
+    <p:sldId xmlns:r="http://schemas.openxmlformats.org/officeDocument/2006/relationships" id="272" r:id="R5cfdb20ecd5c4f03"/>
+    <p:sldId xmlns:r="http://schemas.openxmlformats.org/officeDocument/2006/relationships" id="273" r:id="Rbcbc470e3b6c4332"/>
+    <p:sldId xmlns:r="http://schemas.openxmlformats.org/officeDocument/2006/relationships" id="274" r:id="R94d7b9de3907496b"/>
+    <p:sldId xmlns:r="http://schemas.openxmlformats.org/officeDocument/2006/relationships" id="275" r:id="R3ac7cd93725e466d"/>
   </p:sldIdLst>
   <p:sldSz cx="12192000" cy="6858000"/>
   <p:notesSz cx="6858000" cy="9144000"/>
@@ -542,6 +542,11 @@
           </a:p>
           <a:p xmlns:a="http://schemas.openxmlformats.org/drawingml/2006/main">
             <a:r>
+              <a:t>- https://rescuepoint.com.br/assets/img/logo.png</a:t>
+            </a:r>
+          </a:p>
+          <a:p xmlns:a="http://schemas.openxmlformats.org/drawingml/2006/main">
+            <a:r>
               <a:t>- https://github.com/AnselmoBorges/dbt-moderno-na-pratica/blob/main/roteiros/11-dbt-mcp.md</a:t>
             </a:r>
           </a:p>
@@ -707,6 +712,11 @@
           </a:p>
           <a:p xmlns:a="http://schemas.openxmlformats.org/drawingml/2006/main">
             <a:r>
+              <a:t>- https://rescuepoint.com.br/assets/img/logo.png</a:t>
+            </a:r>
+          </a:p>
+          <a:p xmlns:a="http://schemas.openxmlformats.org/drawingml/2006/main">
+            <a:r>
               <a:t>- https://github.com/AnselmoBorges/dbt-moderno-na-pratica/blob/main/roteiros/11-dbt-mcp.md</a:t>
             </a:r>
           </a:p>
@@ -872,6 +882,11 @@
           </a:p>
           <a:p xmlns:a="http://schemas.openxmlformats.org/drawingml/2006/main">
             <a:r>
+              <a:t>- https://rescuepoint.com.br/assets/img/logo.png</a:t>
+            </a:r>
+          </a:p>
+          <a:p xmlns:a="http://schemas.openxmlformats.org/drawingml/2006/main">
+            <a:r>
               <a:t>- https://github.com/AnselmoBorges/dbt-moderno-na-pratica/blob/main/roteiros/11-dbt-mcp.md</a:t>
             </a:r>
           </a:p>
@@ -1037,6 +1052,11 @@
           </a:p>
           <a:p xmlns:a="http://schemas.openxmlformats.org/drawingml/2006/main">
             <a:r>
+              <a:t>- https://rescuepoint.com.br/assets/img/logo.png</a:t>
+            </a:r>
+          </a:p>
+          <a:p xmlns:a="http://schemas.openxmlformats.org/drawingml/2006/main">
+            <a:r>
               <a:t>- https://github.com/AnselmoBorges/dbt-moderno-na-pratica/blob/main/roteiros/11-dbt-mcp.md</a:t>
             </a:r>
           </a:p>
@@ -1202,6 +1222,11 @@
           </a:p>
           <a:p xmlns:a="http://schemas.openxmlformats.org/drawingml/2006/main">
             <a:r>
+              <a:t>- https://rescuepoint.com.br/assets/img/logo.png</a:t>
+            </a:r>
+          </a:p>
+          <a:p xmlns:a="http://schemas.openxmlformats.org/drawingml/2006/main">
+            <a:r>
               <a:t>- https://github.com/AnselmoBorges/dbt-moderno-na-pratica/blob/main/roteiros/11-dbt-mcp.md</a:t>
             </a:r>
           </a:p>
@@ -1367,6 +1392,11 @@
           </a:p>
           <a:p xmlns:a="http://schemas.openxmlformats.org/drawingml/2006/main">
             <a:r>
+              <a:t>- https://rescuepoint.com.br/assets/img/logo.png</a:t>
+            </a:r>
+          </a:p>
+          <a:p xmlns:a="http://schemas.openxmlformats.org/drawingml/2006/main">
+            <a:r>
               <a:t>- https://github.com/AnselmoBorges/dbt-moderno-na-pratica/blob/main/roteiros/11-dbt-mcp.md</a:t>
             </a:r>
           </a:p>
@@ -1532,6 +1562,11 @@
           </a:p>
           <a:p xmlns:a="http://schemas.openxmlformats.org/drawingml/2006/main">
             <a:r>
+              <a:t>- https://rescuepoint.com.br/assets/img/logo.png</a:t>
+            </a:r>
+          </a:p>
+          <a:p xmlns:a="http://schemas.openxmlformats.org/drawingml/2006/main">
+            <a:r>
               <a:t>- https://github.com/AnselmoBorges/dbt-moderno-na-pratica/blob/main/roteiros/11-dbt-mcp.md</a:t>
             </a:r>
           </a:p>
@@ -1697,6 +1732,11 @@
           </a:p>
           <a:p xmlns:a="http://schemas.openxmlformats.org/drawingml/2006/main">
             <a:r>
+              <a:t>- https://rescuepoint.com.br/assets/img/logo.png</a:t>
+            </a:r>
+          </a:p>
+          <a:p xmlns:a="http://schemas.openxmlformats.org/drawingml/2006/main">
+            <a:r>
               <a:t>- https://github.com/AnselmoBorges/dbt-moderno-na-pratica/blob/main/roteiros/11-dbt-mcp.md</a:t>
             </a:r>
           </a:p>
@@ -1862,6 +1902,11 @@
           </a:p>
           <a:p xmlns:a="http://schemas.openxmlformats.org/drawingml/2006/main">
             <a:r>
+              <a:t>- https://rescuepoint.com.br/assets/img/logo.png</a:t>
+            </a:r>
+          </a:p>
+          <a:p xmlns:a="http://schemas.openxmlformats.org/drawingml/2006/main">
+            <a:r>
               <a:t>- https://github.com/AnselmoBorges/dbt-moderno-na-pratica/blob/main/roteiros/11-dbt-mcp.md</a:t>
             </a:r>
           </a:p>
@@ -2027,6 +2072,11 @@
           </a:p>
           <a:p xmlns:a="http://schemas.openxmlformats.org/drawingml/2006/main">
             <a:r>
+              <a:t>- https://rescuepoint.com.br/assets/img/logo.png</a:t>
+            </a:r>
+          </a:p>
+          <a:p xmlns:a="http://schemas.openxmlformats.org/drawingml/2006/main">
+            <a:r>
               <a:t>- https://github.com/AnselmoBorges/dbt-moderno-na-pratica/blob/main/roteiros/11-dbt-mcp.md</a:t>
             </a:r>
           </a:p>
@@ -2192,6 +2242,11 @@
           </a:p>
           <a:p xmlns:a="http://schemas.openxmlformats.org/drawingml/2006/main">
             <a:r>
+              <a:t>- https://rescuepoint.com.br/assets/img/logo.png</a:t>
+            </a:r>
+          </a:p>
+          <a:p xmlns:a="http://schemas.openxmlformats.org/drawingml/2006/main">
+            <a:r>
               <a:t>- https://github.com/AnselmoBorges/dbt-moderno-na-pratica/blob/main/roteiros/11-dbt-mcp.md</a:t>
             </a:r>
           </a:p>
@@ -2357,6 +2412,11 @@
           </a:p>
           <a:p xmlns:a="http://schemas.openxmlformats.org/drawingml/2006/main">
             <a:r>
+              <a:t>- https://rescuepoint.com.br/assets/img/logo.png</a:t>
+            </a:r>
+          </a:p>
+          <a:p xmlns:a="http://schemas.openxmlformats.org/drawingml/2006/main">
+            <a:r>
               <a:t>- https://github.com/AnselmoBorges/dbt-moderno-na-pratica/blob/main/roteiros/11-dbt-mcp.md</a:t>
             </a:r>
           </a:p>
@@ -2522,6 +2582,11 @@
           </a:p>
           <a:p xmlns:a="http://schemas.openxmlformats.org/drawingml/2006/main">
             <a:r>
+              <a:t>- https://rescuepoint.com.br/assets/img/logo.png</a:t>
+            </a:r>
+          </a:p>
+          <a:p xmlns:a="http://schemas.openxmlformats.org/drawingml/2006/main">
+            <a:r>
               <a:t>- https://github.com/AnselmoBorges/dbt-moderno-na-pratica/blob/main/roteiros/11-dbt-mcp.md</a:t>
             </a:r>
           </a:p>
@@ -2687,6 +2752,11 @@
           </a:p>
           <a:p xmlns:a="http://schemas.openxmlformats.org/drawingml/2006/main">
             <a:r>
+              <a:t>- https://rescuepoint.com.br/assets/img/logo.png</a:t>
+            </a:r>
+          </a:p>
+          <a:p xmlns:a="http://schemas.openxmlformats.org/drawingml/2006/main">
+            <a:r>
               <a:t>- https://github.com/AnselmoBorges/dbt-moderno-na-pratica/blob/main/roteiros/11-dbt-mcp.md</a:t>
             </a:r>
           </a:p>
@@ -2852,6 +2922,11 @@
           </a:p>
           <a:p xmlns:a="http://schemas.openxmlformats.org/drawingml/2006/main">
             <a:r>
+              <a:t>- https://rescuepoint.com.br/assets/img/logo.png</a:t>
+            </a:r>
+          </a:p>
+          <a:p xmlns:a="http://schemas.openxmlformats.org/drawingml/2006/main">
+            <a:r>
               <a:t>- https://github.com/AnselmoBorges/dbt-moderno-na-pratica/blob/main/roteiros/11-dbt-mcp.md</a:t>
             </a:r>
           </a:p>
@@ -3017,6 +3092,11 @@
           </a:p>
           <a:p xmlns:a="http://schemas.openxmlformats.org/drawingml/2006/main">
             <a:r>
+              <a:t>- https://rescuepoint.com.br/assets/img/logo.png</a:t>
+            </a:r>
+          </a:p>
+          <a:p xmlns:a="http://schemas.openxmlformats.org/drawingml/2006/main">
+            <a:r>
               <a:t>- https://github.com/AnselmoBorges/dbt-moderno-na-pratica/blob/main/roteiros/11-dbt-mcp.md</a:t>
             </a:r>
           </a:p>
@@ -3182,6 +3262,11 @@
           </a:p>
           <a:p xmlns:a="http://schemas.openxmlformats.org/drawingml/2006/main">
             <a:r>
+              <a:t>- https://rescuepoint.com.br/assets/img/logo.png</a:t>
+            </a:r>
+          </a:p>
+          <a:p xmlns:a="http://schemas.openxmlformats.org/drawingml/2006/main">
+            <a:r>
               <a:t>- https://github.com/AnselmoBorges/dbt-moderno-na-pratica/blob/main/roteiros/11-dbt-mcp.md</a:t>
             </a:r>
           </a:p>
@@ -3352,6 +3437,11 @@
           </a:p>
           <a:p xmlns:a="http://schemas.openxmlformats.org/drawingml/2006/main">
             <a:r>
+              <a:t>- https://rescuepoint.com.br/assets/img/logo.png</a:t>
+            </a:r>
+          </a:p>
+          <a:p xmlns:a="http://schemas.openxmlformats.org/drawingml/2006/main">
+            <a:r>
               <a:t>- https://github.com/AnselmoBorges/dbt-moderno-na-pratica/blob/main/roteiros/11-dbt-mcp.md</a:t>
             </a:r>
           </a:p>
@@ -3517,6 +3607,11 @@
           </a:p>
           <a:p xmlns:a="http://schemas.openxmlformats.org/drawingml/2006/main">
             <a:r>
+              <a:t>- https://rescuepoint.com.br/assets/img/logo.png</a:t>
+            </a:r>
+          </a:p>
+          <a:p xmlns:a="http://schemas.openxmlformats.org/drawingml/2006/main">
+            <a:r>
               <a:t>- https://github.com/AnselmoBorges/dbt-moderno-na-pratica/blob/main/roteiros/11-dbt-mcp.md</a:t>
             </a:r>
           </a:p>
@@ -3678,6 +3773,11 @@
           <a:p xmlns:a="http://schemas.openxmlformats.org/drawingml/2006/main">
             <a:r>
               <a:t>- https://www.getdbt.com/case-studies/impact.com</a:t>
+            </a:r>
+          </a:p>
+          <a:p xmlns:a="http://schemas.openxmlformats.org/drawingml/2006/main">
+            <a:r>
+              <a:t>- https://rescuepoint.com.br/assets/img/logo.png</a:t>
             </a:r>
           </a:p>
           <a:p xmlns:a="http://schemas.openxmlformats.org/drawingml/2006/main">
@@ -3799,7 +3899,7 @@
   </p:cSld>
   <p:clrMap bg1="lt1" tx1="dk1" bg2="lt2" tx2="dk2" accent1="accent1" accent2="accent2" accent3="accent3" accent4="accent4" accent5="accent5" accent6="accent6" hlink="hlink" folHlink="folHlink"/>
   <p:sldLayoutIdLst>
-    <p:sldLayoutId xmlns:r="http://schemas.openxmlformats.org/officeDocument/2006/relationships" id="2147483649" r:id="R2e820120540b4086"/>
+    <p:sldLayoutId xmlns:r="http://schemas.openxmlformats.org/officeDocument/2006/relationships" id="2147483649" r:id="Rdc4a0f4ca6154eaf"/>
   </p:sldLayoutIdLst>
   <p:txStyles>
     <p:titleStyle>
@@ -4097,8 +4197,8 @@
   </p:cSld>
   <p:clrMap bg1="lt1" tx1="dk1" bg2="lt2" tx2="dk2" accent1="accent1" accent2="accent2" accent3="accent3" accent4="accent4" accent5="accent5" accent6="accent6" hlink="hlink" folHlink="folHlink"/>
   <p:sldLayoutIdLst>
-    <p:sldLayoutId xmlns:r="http://schemas.openxmlformats.org/officeDocument/2006/relationships" id="2147483651" r:id="R602e6f193f3a4a4b"/>
-    <p:sldLayoutId xmlns:r="http://schemas.openxmlformats.org/officeDocument/2006/relationships" id="2147483652" r:id="Rfa6996b8832b41df"/>
+    <p:sldLayoutId xmlns:r="http://schemas.openxmlformats.org/officeDocument/2006/relationships" id="2147483651" r:id="Re5fbe646c7f54f9d"/>
+    <p:sldLayoutId xmlns:r="http://schemas.openxmlformats.org/officeDocument/2006/relationships" id="2147483652" r:id="R79821a88040a4132"/>
   </p:sldLayoutIdLst>
 </p:sldMaster>
 </file>
@@ -4622,14 +4722,14 @@
       </p:grpSpPr>
       <p:pic>
         <p:nvPicPr>
-          <p:cNvPr id="10" name="" descr="Ilustração conceitual autoral da capa: EPISÓDIO 11 — dbt MCP: contexto governado para o agente."/>
+          <p:cNvPr id="13" name="" descr="Ilustração conceitual autoral da capa: EPISÓDIO 11 — dbt MCP: contexto governado para o agente."/>
           <p:cNvPicPr>
             <a:picLocks xmlns:a="http://schemas.openxmlformats.org/drawingml/2006/main" noChangeAspect="1"/>
           </p:cNvPicPr>
           <p:nvPr/>
         </p:nvPicPr>
         <p:blipFill>
-          <a:blip xmlns:r="http://schemas.openxmlformats.org/officeDocument/2006/relationships" xmlns:a="http://schemas.openxmlformats.org/drawingml/2006/main" r:embed="Rb834956e659f4dc4"/>
+          <a:blip xmlns:r="http://schemas.openxmlformats.org/officeDocument/2006/relationships" xmlns:a="http://schemas.openxmlformats.org/drawingml/2006/main" r:embed="Ra60f1d3e174e4317"/>
           <a:srcRect xmlns:a="http://schemas.openxmlformats.org/drawingml/2006/main" l="19785" t="0" r="19785" b="0"/>
           <a:stretch xmlns:a="http://schemas.openxmlformats.org/drawingml/2006/main">
             <a:fillRect l="0" t="0" r="0" b="0"/>
@@ -4650,7 +4750,7 @@
           <p:cNvPr id="2" name="cover-text-surface">
             <a:extLst xmlns:a="http://schemas.openxmlformats.org/drawingml/2006/main">
               <a:ext uri="{FF2B5EF4-FFF2-40B4-BE49-F238E27FC236}">
-                <a16:creationId xmlns:a16="http://schemas.microsoft.com/office/drawing/2014/main" id="{2D8496C2-8194-44D4-A07C-98A9F058BC55}"/>
+                <a16:creationId xmlns:a16="http://schemas.microsoft.com/office/drawing/2014/main" id="{2A335064-4BED-4287-BFEA-F5B677D7C1C4}"/>
               </a:ext>
             </a:extLst>
           </p:cNvPr>
@@ -4683,7 +4783,7 @@
           <p:cNvPr id="3" name="cover-divider">
             <a:extLst xmlns:a="http://schemas.openxmlformats.org/drawingml/2006/main">
               <a:ext uri="{FF2B5EF4-FFF2-40B4-BE49-F238E27FC236}">
-                <a16:creationId xmlns:a16="http://schemas.microsoft.com/office/drawing/2014/main" id="{FEC4AA3F-4833-4780-A7AD-591890442B43}"/>
+                <a16:creationId xmlns:a16="http://schemas.microsoft.com/office/drawing/2014/main" id="{D93F5AA9-593D-4988-B730-E1A32F8BBB92}"/>
               </a:ext>
             </a:extLst>
           </p:cNvPr>
@@ -4714,7 +4814,7 @@
           <p:cNvPr id="4" name="cover-episode">
             <a:extLst xmlns:a="http://schemas.openxmlformats.org/drawingml/2006/main">
               <a:ext uri="{FF2B5EF4-FFF2-40B4-BE49-F238E27FC236}">
-                <a16:creationId xmlns:a16="http://schemas.microsoft.com/office/drawing/2014/main" id="{5BB0B864-ED6D-42BF-A68D-1EEDC49658C3}"/>
+                <a16:creationId xmlns:a16="http://schemas.microsoft.com/office/drawing/2014/main" id="{279AFC10-1E30-44F5-A473-4100AD87AAD2}"/>
               </a:ext>
             </a:extLst>
           </p:cNvPr>
@@ -4762,10 +4862,69 @@
       </p:sp>
       <p:sp>
         <p:nvSpPr>
-          <p:cNvPr id="5" name="cover-title">
-            <a:extLst xmlns:a="http://schemas.openxmlformats.org/drawingml/2006/main">
-              <a:ext uri="{FF2B5EF4-FFF2-40B4-BE49-F238E27FC236}">
-                <a16:creationId xmlns:a16="http://schemas.microsoft.com/office/drawing/2014/main" id="{8B45E042-8411-4268-AE8B-CD4E444561B9}"/>
+          <p:cNvPr id="5" name="rescue-point-logo-background">
+            <a:extLst xmlns:a="http://schemas.openxmlformats.org/drawingml/2006/main">
+              <a:ext uri="{FF2B5EF4-FFF2-40B4-BE49-F238E27FC236}">
+                <a16:creationId xmlns:a16="http://schemas.microsoft.com/office/drawing/2014/main" id="{BC40388F-6AFA-4276-B0F4-F4348BC97EAE}"/>
+              </a:ext>
+            </a:extLst>
+          </p:cNvPr>
+          <p:cNvSpPr>
+            <a:spLocks xmlns:a="http://schemas.openxmlformats.org/drawingml/2006/main" noGrp="1"/>
+          </p:cNvSpPr>
+          <p:nvPr/>
+        </p:nvSpPr>
+        <p:spPr>
+          <a:xfrm xmlns:a="http://schemas.openxmlformats.org/drawingml/2006/main">
+            <a:off x="9772650" y="133350"/>
+            <a:ext cx="1733550" cy="457200"/>
+          </a:xfrm>
+          <a:prstGeom xmlns:a="http://schemas.openxmlformats.org/drawingml/2006/main" prst="roundRect">
+            <a:avLst>
+              <a:gd name="adj" fmla="val 16667"/>
+            </a:avLst>
+          </a:prstGeom>
+          <a:solidFill xmlns:a="http://schemas.openxmlformats.org/drawingml/2006/main">
+            <a:srgbClr val="06142E"/>
+          </a:solidFill>
+          <a:ln xmlns:a="http://schemas.openxmlformats.org/drawingml/2006/main" w="9525">
+            <a:solidFill>
+              <a:srgbClr val="1EC5FF">
+                <a:alpha val="33333"/>
+              </a:srgbClr>
+            </a:solidFill>
+            <a:prstDash val="solid"/>
+          </a:ln>
+        </p:spPr>
+      </p:sp>
+      <p:pic>
+        <p:nvPicPr>
+          <p:cNvPr id="18" name="" descr="Ilustração conceitual autoral da capa: EPISÓDIO 11 — dbt MCP: contexto governado para o agente."/>
+          <p:cNvPicPr>
+            <a:picLocks xmlns:a="http://schemas.openxmlformats.org/drawingml/2006/main" noChangeAspect="1"/>
+          </p:cNvPicPr>
+          <p:nvPr/>
+        </p:nvPicPr>
+        <p:blipFill>
+          <a:blip xmlns:r="http://schemas.openxmlformats.org/officeDocument/2006/relationships" xmlns:a="http://schemas.openxmlformats.org/drawingml/2006/main" r:embed="R3a81c5e2a8774629"/>
+          <a:stretch xmlns:a="http://schemas.openxmlformats.org/drawingml/2006/main"/>
+        </p:blipFill>
+        <p:spPr>
+          <a:xfrm xmlns:a="http://schemas.openxmlformats.org/drawingml/2006/main">
+            <a:off x="9893718" y="209550"/>
+            <a:ext cx="1491414" cy="323850"/>
+          </a:xfrm>
+          <a:prstGeom xmlns:a="http://schemas.openxmlformats.org/drawingml/2006/main" prst="rect">
+            <a:avLst/>
+          </a:prstGeom>
+        </p:spPr>
+      </p:pic>
+      <p:sp>
+        <p:nvSpPr>
+          <p:cNvPr id="7" name="cover-title">
+            <a:extLst xmlns:a="http://schemas.openxmlformats.org/drawingml/2006/main">
+              <a:ext uri="{FF2B5EF4-FFF2-40B4-BE49-F238E27FC236}">
+                <a16:creationId xmlns:a16="http://schemas.microsoft.com/office/drawing/2014/main" id="{6696F0C3-EE15-481E-9C46-A097AF60C14A}"/>
               </a:ext>
             </a:extLst>
           </p:cNvPr>
@@ -4813,10 +4972,10 @@
       </p:sp>
       <p:sp>
         <p:nvSpPr>
-          <p:cNvPr id="6" name="cover-subtitle">
-            <a:extLst xmlns:a="http://schemas.openxmlformats.org/drawingml/2006/main">
-              <a:ext uri="{FF2B5EF4-FFF2-40B4-BE49-F238E27FC236}">
-                <a16:creationId xmlns:a16="http://schemas.microsoft.com/office/drawing/2014/main" id="{776EBF6E-EE63-489E-94EF-C3D1410C7D09}"/>
+          <p:cNvPr id="8" name="cover-subtitle">
+            <a:extLst xmlns:a="http://schemas.openxmlformats.org/drawingml/2006/main">
+              <a:ext uri="{FF2B5EF4-FFF2-40B4-BE49-F238E27FC236}">
+                <a16:creationId xmlns:a16="http://schemas.microsoft.com/office/drawing/2014/main" id="{B92E53EA-85A6-4DAF-AF9D-E1D5BE5EB34F}"/>
               </a:ext>
             </a:extLst>
           </p:cNvPr>
@@ -4864,10 +5023,10 @@
       </p:sp>
       <p:sp>
         <p:nvSpPr>
-          <p:cNvPr id="7" name="cover-accent">
-            <a:extLst xmlns:a="http://schemas.openxmlformats.org/drawingml/2006/main">
-              <a:ext uri="{FF2B5EF4-FFF2-40B4-BE49-F238E27FC236}">
-                <a16:creationId xmlns:a16="http://schemas.microsoft.com/office/drawing/2014/main" id="{E1277054-A585-4305-AEBF-1393ABCD8DF4}"/>
+          <p:cNvPr id="9" name="cover-accent">
+            <a:extLst xmlns:a="http://schemas.openxmlformats.org/drawingml/2006/main">
+              <a:ext uri="{FF2B5EF4-FFF2-40B4-BE49-F238E27FC236}">
+                <a16:creationId xmlns:a16="http://schemas.microsoft.com/office/drawing/2014/main" id="{3BC6B215-AD8F-4978-B2DF-4F24F38712BF}"/>
               </a:ext>
             </a:extLst>
           </p:cNvPr>
@@ -4895,10 +5054,10 @@
       </p:sp>
       <p:sp>
         <p:nvSpPr>
-          <p:cNvPr id="8" name="cover-meta">
-            <a:extLst xmlns:a="http://schemas.openxmlformats.org/drawingml/2006/main">
-              <a:ext uri="{FF2B5EF4-FFF2-40B4-BE49-F238E27FC236}">
-                <a16:creationId xmlns:a16="http://schemas.microsoft.com/office/drawing/2014/main" id="{71588B14-D603-4874-B9E1-F7BCE395CB41}"/>
+          <p:cNvPr id="10" name="cover-meta">
+            <a:extLst xmlns:a="http://schemas.openxmlformats.org/drawingml/2006/main">
+              <a:ext uri="{FF2B5EF4-FFF2-40B4-BE49-F238E27FC236}">
+                <a16:creationId xmlns:a16="http://schemas.microsoft.com/office/drawing/2014/main" id="{1E68D26E-1B45-48DD-9717-3A94CE45DBCC}"/>
               </a:ext>
             </a:extLst>
           </p:cNvPr>
@@ -4951,7 +5110,7 @@
     </p:spTree>
     <p:extLst>
       <p:ext uri="{BB962C8B-B14F-4D97-AF65-F5344CB8AC3E}">
-        <p14:creationId xmlns:p14="http://schemas.microsoft.com/office/powerpoint/2010/main" val="356156655"/>
+        <p14:creationId xmlns:p14="http://schemas.microsoft.com/office/powerpoint/2010/main" val="639583366"/>
       </p:ext>
     </p:extLst>
   </p:cSld>
@@ -4987,10 +5146,10 @@
       </p:grpSpPr>
       <p:sp>
         <p:nvSpPr>
-          <p:cNvPr id="11" name="slide-title">
-            <a:extLst xmlns:a="http://schemas.openxmlformats.org/drawingml/2006/main">
-              <a:ext uri="{FF2B5EF4-FFF2-40B4-BE49-F238E27FC236}">
-                <a16:creationId xmlns:a16="http://schemas.microsoft.com/office/drawing/2014/main" id="{3D78AD82-70AE-4093-94EE-C450EEF60E21}"/>
+          <p:cNvPr id="13" name="slide-title">
+            <a:extLst xmlns:a="http://schemas.openxmlformats.org/drawingml/2006/main">
+              <a:ext uri="{FF2B5EF4-FFF2-40B4-BE49-F238E27FC236}">
+                <a16:creationId xmlns:a16="http://schemas.microsoft.com/office/drawing/2014/main" id="{B55FA239-F057-4610-B20E-ED30FD46382B}"/>
               </a:ext>
             </a:extLst>
           </p:cNvPr>
@@ -5041,7 +5200,7 @@
           <p:cNvPr id="2" name="compare-left-title">
             <a:extLst xmlns:a="http://schemas.openxmlformats.org/drawingml/2006/main">
               <a:ext uri="{FF2B5EF4-FFF2-40B4-BE49-F238E27FC236}">
-                <a16:creationId xmlns:a16="http://schemas.microsoft.com/office/drawing/2014/main" id="{E5222711-4074-41DB-B4E1-C4BB4D0EDDE5}"/>
+                <a16:creationId xmlns:a16="http://schemas.microsoft.com/office/drawing/2014/main" id="{39FE55BD-0858-4B71-A06C-0D6B40B27FAD}"/>
               </a:ext>
             </a:extLst>
           </p:cNvPr>
@@ -5092,7 +5251,7 @@
           <p:cNvPr id="3" name="compare-right-title">
             <a:extLst xmlns:a="http://schemas.openxmlformats.org/drawingml/2006/main">
               <a:ext uri="{FF2B5EF4-FFF2-40B4-BE49-F238E27FC236}">
-                <a16:creationId xmlns:a16="http://schemas.microsoft.com/office/drawing/2014/main" id="{D57B7C81-AAD5-40C4-8E76-F9E7899E8585}"/>
+                <a16:creationId xmlns:a16="http://schemas.microsoft.com/office/drawing/2014/main" id="{BEE7D6F9-72E5-4B3A-9AA8-90CE1D08D419}"/>
               </a:ext>
             </a:extLst>
           </p:cNvPr>
@@ -5143,7 +5302,7 @@
           <p:cNvPr id="4" name="compare-divider">
             <a:extLst xmlns:a="http://schemas.openxmlformats.org/drawingml/2006/main">
               <a:ext uri="{FF2B5EF4-FFF2-40B4-BE49-F238E27FC236}">
-                <a16:creationId xmlns:a16="http://schemas.microsoft.com/office/drawing/2014/main" id="{ECC5CB5B-62EE-4B28-AA8C-29CE0FB3931A}"/>
+                <a16:creationId xmlns:a16="http://schemas.microsoft.com/office/drawing/2014/main" id="{4ED1FF7D-FA84-4B81-B233-BC0D76EE79BE}"/>
               </a:ext>
             </a:extLst>
           </p:cNvPr>
@@ -5176,7 +5335,7 @@
           <p:cNvPr id="5" name="bullets">
             <a:extLst xmlns:a="http://schemas.openxmlformats.org/drawingml/2006/main">
               <a:ext uri="{FF2B5EF4-FFF2-40B4-BE49-F238E27FC236}">
-                <a16:creationId xmlns:a16="http://schemas.microsoft.com/office/drawing/2014/main" id="{8FD9FE5E-5895-44F3-9AE8-0E3F21374B3E}"/>
+                <a16:creationId xmlns:a16="http://schemas.microsoft.com/office/drawing/2014/main" id="{3B57163F-A5DF-4593-B9F1-ADD340ABA4DB}"/>
               </a:ext>
             </a:extLst>
           </p:cNvPr>
@@ -5245,7 +5404,7 @@
           <p:cNvPr id="6" name="bullets">
             <a:extLst xmlns:a="http://schemas.openxmlformats.org/drawingml/2006/main">
               <a:ext uri="{FF2B5EF4-FFF2-40B4-BE49-F238E27FC236}">
-                <a16:creationId xmlns:a16="http://schemas.microsoft.com/office/drawing/2014/main" id="{C91ECB48-B35A-4A44-AC2F-07DB889A3930}"/>
+                <a16:creationId xmlns:a16="http://schemas.microsoft.com/office/drawing/2014/main" id="{946452D8-9ED2-4B96-9C16-92E909E356F5}"/>
               </a:ext>
             </a:extLst>
           </p:cNvPr>
@@ -5296,7 +5455,7 @@
           <p:cNvPr id="7" name="eyebrow">
             <a:extLst xmlns:a="http://schemas.openxmlformats.org/drawingml/2006/main">
               <a:ext uri="{FF2B5EF4-FFF2-40B4-BE49-F238E27FC236}">
-                <a16:creationId xmlns:a16="http://schemas.microsoft.com/office/drawing/2014/main" id="{E5E51199-D9E8-4B89-AAD8-08BBEE88AE6B}"/>
+                <a16:creationId xmlns:a16="http://schemas.microsoft.com/office/drawing/2014/main" id="{1DD13EF1-5E32-478E-954E-EA9F640D6081}"/>
               </a:ext>
             </a:extLst>
           </p:cNvPr>
@@ -5344,10 +5503,69 @@
       </p:sp>
       <p:sp>
         <p:nvSpPr>
-          <p:cNvPr id="8" name="footer-rule">
-            <a:extLst xmlns:a="http://schemas.openxmlformats.org/drawingml/2006/main">
-              <a:ext uri="{FF2B5EF4-FFF2-40B4-BE49-F238E27FC236}">
-                <a16:creationId xmlns:a16="http://schemas.microsoft.com/office/drawing/2014/main" id="{60BC29BB-256F-43CF-831A-DCF8949A3821}"/>
+          <p:cNvPr id="8" name="rescue-point-logo-background">
+            <a:extLst xmlns:a="http://schemas.openxmlformats.org/drawingml/2006/main">
+              <a:ext uri="{FF2B5EF4-FFF2-40B4-BE49-F238E27FC236}">
+                <a16:creationId xmlns:a16="http://schemas.microsoft.com/office/drawing/2014/main" id="{9D86998C-7B45-4182-90CF-127961273FB5}"/>
+              </a:ext>
+            </a:extLst>
+          </p:cNvPr>
+          <p:cNvSpPr>
+            <a:spLocks xmlns:a="http://schemas.openxmlformats.org/drawingml/2006/main" noGrp="1"/>
+          </p:cNvSpPr>
+          <p:nvPr/>
+        </p:nvSpPr>
+        <p:spPr>
+          <a:xfrm xmlns:a="http://schemas.openxmlformats.org/drawingml/2006/main">
+            <a:off x="9772650" y="133350"/>
+            <a:ext cx="1733550" cy="457200"/>
+          </a:xfrm>
+          <a:prstGeom xmlns:a="http://schemas.openxmlformats.org/drawingml/2006/main" prst="roundRect">
+            <a:avLst>
+              <a:gd name="adj" fmla="val 16667"/>
+            </a:avLst>
+          </a:prstGeom>
+          <a:solidFill xmlns:a="http://schemas.openxmlformats.org/drawingml/2006/main">
+            <a:srgbClr val="06142E"/>
+          </a:solidFill>
+          <a:ln xmlns:a="http://schemas.openxmlformats.org/drawingml/2006/main" w="9525">
+            <a:solidFill>
+              <a:srgbClr val="1EC5FF">
+                <a:alpha val="33333"/>
+              </a:srgbClr>
+            </a:solidFill>
+            <a:prstDash val="solid"/>
+          </a:ln>
+        </p:spPr>
+      </p:sp>
+      <p:pic>
+        <p:nvPicPr>
+          <p:cNvPr id="23" name="" descr="Figura oficial da documentação dbt usada para explicar: Allowlist é uma política executável — Permitido."/>
+          <p:cNvPicPr>
+            <a:picLocks xmlns:a="http://schemas.openxmlformats.org/drawingml/2006/main" noChangeAspect="1"/>
+          </p:cNvPicPr>
+          <p:nvPr/>
+        </p:nvPicPr>
+        <p:blipFill>
+          <a:blip xmlns:r="http://schemas.openxmlformats.org/officeDocument/2006/relationships" xmlns:a="http://schemas.openxmlformats.org/drawingml/2006/main" r:embed="Rb7333c26b28b45f4"/>
+          <a:stretch xmlns:a="http://schemas.openxmlformats.org/drawingml/2006/main"/>
+        </p:blipFill>
+        <p:spPr>
+          <a:xfrm xmlns:a="http://schemas.openxmlformats.org/drawingml/2006/main">
+            <a:off x="9893718" y="209550"/>
+            <a:ext cx="1491414" cy="323850"/>
+          </a:xfrm>
+          <a:prstGeom xmlns:a="http://schemas.openxmlformats.org/drawingml/2006/main" prst="rect">
+            <a:avLst/>
+          </a:prstGeom>
+        </p:spPr>
+      </p:pic>
+      <p:sp>
+        <p:nvSpPr>
+          <p:cNvPr id="10" name="footer-rule">
+            <a:extLst xmlns:a="http://schemas.openxmlformats.org/drawingml/2006/main">
+              <a:ext uri="{FF2B5EF4-FFF2-40B4-BE49-F238E27FC236}">
+                <a16:creationId xmlns:a16="http://schemas.microsoft.com/office/drawing/2014/main" id="{8C1F43E5-2449-4C6C-BAE4-25FD176788A1}"/>
               </a:ext>
             </a:extLst>
           </p:cNvPr>
@@ -5377,10 +5595,10 @@
       </p:sp>
       <p:sp>
         <p:nvSpPr>
-          <p:cNvPr id="9" name="footer">
-            <a:extLst xmlns:a="http://schemas.openxmlformats.org/drawingml/2006/main">
-              <a:ext uri="{FF2B5EF4-FFF2-40B4-BE49-F238E27FC236}">
-                <a16:creationId xmlns:a16="http://schemas.microsoft.com/office/drawing/2014/main" id="{26D18D7B-B5B6-4727-804A-09B270832ECB}"/>
+          <p:cNvPr id="11" name="footer">
+            <a:extLst xmlns:a="http://schemas.openxmlformats.org/drawingml/2006/main">
+              <a:ext uri="{FF2B5EF4-FFF2-40B4-BE49-F238E27FC236}">
+                <a16:creationId xmlns:a16="http://schemas.microsoft.com/office/drawing/2014/main" id="{2DDF68D8-11DF-4696-867B-EB620E3B707D}"/>
               </a:ext>
             </a:extLst>
           </p:cNvPr>
@@ -5432,10 +5650,10 @@
       </p:sp>
       <p:sp>
         <p:nvSpPr>
-          <p:cNvPr id="10" name="page-number">
-            <a:extLst xmlns:a="http://schemas.openxmlformats.org/drawingml/2006/main">
-              <a:ext uri="{FF2B5EF4-FFF2-40B4-BE49-F238E27FC236}">
-                <a16:creationId xmlns:a16="http://schemas.microsoft.com/office/drawing/2014/main" id="{0A2B57F3-D98C-4E9F-96D9-75870D4F8166}"/>
+          <p:cNvPr id="12" name="page-number">
+            <a:extLst xmlns:a="http://schemas.openxmlformats.org/drawingml/2006/main">
+              <a:ext uri="{FF2B5EF4-FFF2-40B4-BE49-F238E27FC236}">
+                <a16:creationId xmlns:a16="http://schemas.microsoft.com/office/drawing/2014/main" id="{203E06B2-64A3-418D-B130-F88CAEC2D8C4}"/>
               </a:ext>
             </a:extLst>
           </p:cNvPr>
@@ -5488,7 +5706,7 @@
     </p:spTree>
     <p:extLst>
       <p:ext uri="{BB962C8B-B14F-4D97-AF65-F5344CB8AC3E}">
-        <p14:creationId xmlns:p14="http://schemas.microsoft.com/office/powerpoint/2010/main" val="2085957594"/>
+        <p14:creationId xmlns:p14="http://schemas.microsoft.com/office/powerpoint/2010/main" val="1277191398"/>
       </p:ext>
     </p:extLst>
   </p:cSld>
@@ -5524,10 +5742,10 @@
       </p:grpSpPr>
       <p:sp>
         <p:nvSpPr>
-          <p:cNvPr id="11" name="slide-title">
-            <a:extLst xmlns:a="http://schemas.openxmlformats.org/drawingml/2006/main">
-              <a:ext uri="{FF2B5EF4-FFF2-40B4-BE49-F238E27FC236}">
-                <a16:creationId xmlns:a16="http://schemas.microsoft.com/office/drawing/2014/main" id="{6E8BEA57-BA3A-40A6-BA34-E3A14022DF1A}"/>
+          <p:cNvPr id="13" name="slide-title">
+            <a:extLst xmlns:a="http://schemas.openxmlformats.org/drawingml/2006/main">
+              <a:ext uri="{FF2B5EF4-FFF2-40B4-BE49-F238E27FC236}">
+                <a16:creationId xmlns:a16="http://schemas.microsoft.com/office/drawing/2014/main" id="{5C8C78B5-DD8F-40CF-8968-527049CAA841}"/>
               </a:ext>
             </a:extLst>
           </p:cNvPr>
@@ -5578,7 +5796,7 @@
           <p:cNvPr id="2" name="slide-subtitle">
             <a:extLst xmlns:a="http://schemas.openxmlformats.org/drawingml/2006/main">
               <a:ext uri="{FF2B5EF4-FFF2-40B4-BE49-F238E27FC236}">
-                <a16:creationId xmlns:a16="http://schemas.microsoft.com/office/drawing/2014/main" id="{C61C6702-AF0C-470E-B4C5-BAB49FEBD80F}"/>
+                <a16:creationId xmlns:a16="http://schemas.microsoft.com/office/drawing/2014/main" id="{8DAAF467-E930-4777-8B03-69617C34E224}"/>
               </a:ext>
             </a:extLst>
           </p:cNvPr>
@@ -5629,7 +5847,7 @@
           <p:cNvPr id="3" name="bullets">
             <a:extLst xmlns:a="http://schemas.openxmlformats.org/drawingml/2006/main">
               <a:ext uri="{FF2B5EF4-FFF2-40B4-BE49-F238E27FC236}">
-                <a16:creationId xmlns:a16="http://schemas.microsoft.com/office/drawing/2014/main" id="{6064BEB1-713E-4599-8F76-EE72DD170A8B}"/>
+                <a16:creationId xmlns:a16="http://schemas.microsoft.com/office/drawing/2014/main" id="{469F0993-4D40-4DA9-B0A4-AAB5A81E896B}"/>
               </a:ext>
             </a:extLst>
           </p:cNvPr>
@@ -5734,7 +5952,7 @@
           <p:cNvPr id="4" name="ambient-glow">
             <a:extLst xmlns:a="http://schemas.openxmlformats.org/drawingml/2006/main">
               <a:ext uri="{FF2B5EF4-FFF2-40B4-BE49-F238E27FC236}">
-                <a16:creationId xmlns:a16="http://schemas.microsoft.com/office/drawing/2014/main" id="{0246E94A-7765-4C0F-9D76-07B0D465C3E6}"/>
+                <a16:creationId xmlns:a16="http://schemas.microsoft.com/office/drawing/2014/main" id="{EE5E37CE-B4B8-40F8-8A94-E31FAD28DCF9}"/>
               </a:ext>
             </a:extLst>
           </p:cNvPr>
@@ -5771,7 +5989,7 @@
           <p:cNvPr id="5" name="ambient-core">
             <a:extLst xmlns:a="http://schemas.openxmlformats.org/drawingml/2006/main">
               <a:ext uri="{FF2B5EF4-FFF2-40B4-BE49-F238E27FC236}">
-                <a16:creationId xmlns:a16="http://schemas.microsoft.com/office/drawing/2014/main" id="{0CF11D5A-CA51-4645-A27E-BB9006125567}"/>
+                <a16:creationId xmlns:a16="http://schemas.microsoft.com/office/drawing/2014/main" id="{8F0850A0-5550-43A8-99B1-FF793774DE24}"/>
               </a:ext>
             </a:extLst>
           </p:cNvPr>
@@ -5808,7 +6026,7 @@
           <p:cNvPr id="6" name="section-number">
             <a:extLst xmlns:a="http://schemas.openxmlformats.org/drawingml/2006/main">
               <a:ext uri="{FF2B5EF4-FFF2-40B4-BE49-F238E27FC236}">
-                <a16:creationId xmlns:a16="http://schemas.microsoft.com/office/drawing/2014/main" id="{DA8533BA-7F43-467F-93E1-6EFB6D28BDB5}"/>
+                <a16:creationId xmlns:a16="http://schemas.microsoft.com/office/drawing/2014/main" id="{5CF34219-30B5-4760-90AF-C11FC743A2DB}"/>
               </a:ext>
             </a:extLst>
           </p:cNvPr>
@@ -5859,7 +6077,7 @@
           <p:cNvPr id="7" name="eyebrow">
             <a:extLst xmlns:a="http://schemas.openxmlformats.org/drawingml/2006/main">
               <a:ext uri="{FF2B5EF4-FFF2-40B4-BE49-F238E27FC236}">
-                <a16:creationId xmlns:a16="http://schemas.microsoft.com/office/drawing/2014/main" id="{78561B29-C74D-47E6-8D00-C4CD88B16B78}"/>
+                <a16:creationId xmlns:a16="http://schemas.microsoft.com/office/drawing/2014/main" id="{E186313F-DF0C-4843-992D-BF336A3123D9}"/>
               </a:ext>
             </a:extLst>
           </p:cNvPr>
@@ -5907,10 +6125,69 @@
       </p:sp>
       <p:sp>
         <p:nvSpPr>
-          <p:cNvPr id="8" name="footer-rule">
-            <a:extLst xmlns:a="http://schemas.openxmlformats.org/drawingml/2006/main">
-              <a:ext uri="{FF2B5EF4-FFF2-40B4-BE49-F238E27FC236}">
-                <a16:creationId xmlns:a16="http://schemas.microsoft.com/office/drawing/2014/main" id="{60DB7352-986F-4911-A734-3D89DD06B13A}"/>
+          <p:cNvPr id="8" name="rescue-point-logo-background">
+            <a:extLst xmlns:a="http://schemas.openxmlformats.org/drawingml/2006/main">
+              <a:ext uri="{FF2B5EF4-FFF2-40B4-BE49-F238E27FC236}">
+                <a16:creationId xmlns:a16="http://schemas.microsoft.com/office/drawing/2014/main" id="{B3FA4256-7139-4092-BAC2-56E68739EBA8}"/>
+              </a:ext>
+            </a:extLst>
+          </p:cNvPr>
+          <p:cNvSpPr>
+            <a:spLocks xmlns:a="http://schemas.openxmlformats.org/drawingml/2006/main" noGrp="1"/>
+          </p:cNvSpPr>
+          <p:nvPr/>
+        </p:nvSpPr>
+        <p:spPr>
+          <a:xfrm xmlns:a="http://schemas.openxmlformats.org/drawingml/2006/main">
+            <a:off x="9772650" y="133350"/>
+            <a:ext cx="1733550" cy="457200"/>
+          </a:xfrm>
+          <a:prstGeom xmlns:a="http://schemas.openxmlformats.org/drawingml/2006/main" prst="roundRect">
+            <a:avLst>
+              <a:gd name="adj" fmla="val 16667"/>
+            </a:avLst>
+          </a:prstGeom>
+          <a:solidFill xmlns:a="http://schemas.openxmlformats.org/drawingml/2006/main">
+            <a:srgbClr val="06142E"/>
+          </a:solidFill>
+          <a:ln xmlns:a="http://schemas.openxmlformats.org/drawingml/2006/main" w="9525">
+            <a:solidFill>
+              <a:srgbClr val="1EC5FF">
+                <a:alpha val="33333"/>
+              </a:srgbClr>
+            </a:solidFill>
+            <a:prstDash val="solid"/>
+          </a:ln>
+        </p:spPr>
+      </p:sp>
+      <p:pic>
+        <p:nvPicPr>
+          <p:cNvPr id="23" name="" descr="Figura oficial da documentação dbt usada para explicar: Contexto melhora antes da resposta — O agente encontra owner, dependência e métrica sem inferir o schema bruto.."/>
+          <p:cNvPicPr>
+            <a:picLocks xmlns:a="http://schemas.openxmlformats.org/drawingml/2006/main" noChangeAspect="1"/>
+          </p:cNvPicPr>
+          <p:nvPr/>
+        </p:nvPicPr>
+        <p:blipFill>
+          <a:blip xmlns:r="http://schemas.openxmlformats.org/officeDocument/2006/relationships" xmlns:a="http://schemas.openxmlformats.org/drawingml/2006/main" r:embed="R66002a2320b2433c"/>
+          <a:stretch xmlns:a="http://schemas.openxmlformats.org/drawingml/2006/main"/>
+        </p:blipFill>
+        <p:spPr>
+          <a:xfrm xmlns:a="http://schemas.openxmlformats.org/drawingml/2006/main">
+            <a:off x="9893718" y="209550"/>
+            <a:ext cx="1491414" cy="323850"/>
+          </a:xfrm>
+          <a:prstGeom xmlns:a="http://schemas.openxmlformats.org/drawingml/2006/main" prst="rect">
+            <a:avLst/>
+          </a:prstGeom>
+        </p:spPr>
+      </p:pic>
+      <p:sp>
+        <p:nvSpPr>
+          <p:cNvPr id="10" name="footer-rule">
+            <a:extLst xmlns:a="http://schemas.openxmlformats.org/drawingml/2006/main">
+              <a:ext uri="{FF2B5EF4-FFF2-40B4-BE49-F238E27FC236}">
+                <a16:creationId xmlns:a16="http://schemas.microsoft.com/office/drawing/2014/main" id="{B8A7AABC-CB62-402E-9B5A-05EAAAD03C26}"/>
               </a:ext>
             </a:extLst>
           </p:cNvPr>
@@ -5940,10 +6217,10 @@
       </p:sp>
       <p:sp>
         <p:nvSpPr>
-          <p:cNvPr id="9" name="footer">
-            <a:extLst xmlns:a="http://schemas.openxmlformats.org/drawingml/2006/main">
-              <a:ext uri="{FF2B5EF4-FFF2-40B4-BE49-F238E27FC236}">
-                <a16:creationId xmlns:a16="http://schemas.microsoft.com/office/drawing/2014/main" id="{668F1F63-F030-420B-A8FA-B8CBC24063A6}"/>
+          <p:cNvPr id="11" name="footer">
+            <a:extLst xmlns:a="http://schemas.openxmlformats.org/drawingml/2006/main">
+              <a:ext uri="{FF2B5EF4-FFF2-40B4-BE49-F238E27FC236}">
+                <a16:creationId xmlns:a16="http://schemas.microsoft.com/office/drawing/2014/main" id="{2F8C9AE9-552B-42B0-BE4F-1963B061B592}"/>
               </a:ext>
             </a:extLst>
           </p:cNvPr>
@@ -5995,10 +6272,10 @@
       </p:sp>
       <p:sp>
         <p:nvSpPr>
-          <p:cNvPr id="10" name="page-number">
-            <a:extLst xmlns:a="http://schemas.openxmlformats.org/drawingml/2006/main">
-              <a:ext uri="{FF2B5EF4-FFF2-40B4-BE49-F238E27FC236}">
-                <a16:creationId xmlns:a16="http://schemas.microsoft.com/office/drawing/2014/main" id="{ACC496B4-997D-48A8-9EC4-097536A06DA0}"/>
+          <p:cNvPr id="12" name="page-number">
+            <a:extLst xmlns:a="http://schemas.openxmlformats.org/drawingml/2006/main">
+              <a:ext uri="{FF2B5EF4-FFF2-40B4-BE49-F238E27FC236}">
+                <a16:creationId xmlns:a16="http://schemas.microsoft.com/office/drawing/2014/main" id="{11D1A287-1E8E-4D88-812B-95B9D4E56564}"/>
               </a:ext>
             </a:extLst>
           </p:cNvPr>
@@ -6051,7 +6328,7 @@
     </p:spTree>
     <p:extLst>
       <p:ext uri="{BB962C8B-B14F-4D97-AF65-F5344CB8AC3E}">
-        <p14:creationId xmlns:p14="http://schemas.microsoft.com/office/powerpoint/2010/main" val="615480830"/>
+        <p14:creationId xmlns:p14="http://schemas.microsoft.com/office/powerpoint/2010/main" val="2052736555"/>
       </p:ext>
     </p:extLst>
   </p:cSld>
@@ -6079,10 +6356,10 @@
       </p:grpSpPr>
       <p:sp>
         <p:nvSpPr>
-          <p:cNvPr id="13" name="slide-title">
-            <a:extLst xmlns:a="http://schemas.openxmlformats.org/drawingml/2006/main">
-              <a:ext uri="{FF2B5EF4-FFF2-40B4-BE49-F238E27FC236}">
-                <a16:creationId xmlns:a16="http://schemas.microsoft.com/office/drawing/2014/main" id="{B184F385-956F-4B3B-8B62-B026BF8819B1}"/>
+          <p:cNvPr id="15" name="slide-title">
+            <a:extLst xmlns:a="http://schemas.openxmlformats.org/drawingml/2006/main">
+              <a:ext uri="{FF2B5EF4-FFF2-40B4-BE49-F238E27FC236}">
+                <a16:creationId xmlns:a16="http://schemas.microsoft.com/office/drawing/2014/main" id="{1AC8EB08-3639-4AEC-A72A-4E77CC1DB765}"/>
               </a:ext>
             </a:extLst>
           </p:cNvPr>
@@ -6133,7 +6410,7 @@
           <p:cNvPr id="2" name="flow-1">
             <a:extLst xmlns:a="http://schemas.openxmlformats.org/drawingml/2006/main">
               <a:ext uri="{FF2B5EF4-FFF2-40B4-BE49-F238E27FC236}">
-                <a16:creationId xmlns:a16="http://schemas.microsoft.com/office/drawing/2014/main" id="{1649F484-7C27-4038-B12C-4241ED182077}"/>
+                <a16:creationId xmlns:a16="http://schemas.microsoft.com/office/drawing/2014/main" id="{2DC6FDA1-056A-479A-9693-81F7A4BFCBB7}"/>
               </a:ext>
             </a:extLst>
           </p:cNvPr>
@@ -6190,7 +6467,7 @@
           <p:cNvPr id="3" name="flow-2">
             <a:extLst xmlns:a="http://schemas.openxmlformats.org/drawingml/2006/main">
               <a:ext uri="{FF2B5EF4-FFF2-40B4-BE49-F238E27FC236}">
-                <a16:creationId xmlns:a16="http://schemas.microsoft.com/office/drawing/2014/main" id="{A398B53D-3C51-4AA0-952D-BC65C4F3D5F9}"/>
+                <a16:creationId xmlns:a16="http://schemas.microsoft.com/office/drawing/2014/main" id="{D0F6444D-45CA-4FE5-90EB-C449AC56F0A7}"/>
               </a:ext>
             </a:extLst>
           </p:cNvPr>
@@ -6247,7 +6524,7 @@
           <p:cNvPr id="4" name="flow-3">
             <a:extLst xmlns:a="http://schemas.openxmlformats.org/drawingml/2006/main">
               <a:ext uri="{FF2B5EF4-FFF2-40B4-BE49-F238E27FC236}">
-                <a16:creationId xmlns:a16="http://schemas.microsoft.com/office/drawing/2014/main" id="{3B5408A9-C725-4BB3-9473-9646C4AEA137}"/>
+                <a16:creationId xmlns:a16="http://schemas.microsoft.com/office/drawing/2014/main" id="{58EFC989-B258-42C5-85DF-600C5E1574AC}"/>
               </a:ext>
             </a:extLst>
           </p:cNvPr>
@@ -6304,7 +6581,7 @@
           <p:cNvPr id="5" name="flow-4">
             <a:extLst xmlns:a="http://schemas.openxmlformats.org/drawingml/2006/main">
               <a:ext uri="{FF2B5EF4-FFF2-40B4-BE49-F238E27FC236}">
-                <a16:creationId xmlns:a16="http://schemas.microsoft.com/office/drawing/2014/main" id="{2D8C5981-04E8-4735-AB32-B169F73B5EA0}"/>
+                <a16:creationId xmlns:a16="http://schemas.microsoft.com/office/drawing/2014/main" id="{33FB710A-7373-48D4-B0FB-332C0030B7F7}"/>
               </a:ext>
             </a:extLst>
           </p:cNvPr>
@@ -6358,7 +6635,7 @@
       </p:sp>
       <p:cxnSp>
         <p:nvCxnSpPr>
-          <p:cNvPr id="26" name=""/>
+          <p:cNvPr id="29" name=""/>
           <p:cNvCxnSpPr>
             <a:stCxn xmlns:a="http://schemas.openxmlformats.org/drawingml/2006/main" id="2" idx="3"/>
             <a:endCxn xmlns:a="http://schemas.openxmlformats.org/drawingml/2006/main" id="3" idx="1"/>
@@ -6384,7 +6661,7 @@
       </p:cxnSp>
       <p:cxnSp>
         <p:nvCxnSpPr>
-          <p:cNvPr id="27" name=""/>
+          <p:cNvPr id="30" name=""/>
           <p:cNvCxnSpPr>
             <a:stCxn xmlns:a="http://schemas.openxmlformats.org/drawingml/2006/main" id="3" idx="3"/>
             <a:endCxn xmlns:a="http://schemas.openxmlformats.org/drawingml/2006/main" id="4" idx="1"/>
@@ -6410,7 +6687,7 @@
       </p:cxnSp>
       <p:cxnSp>
         <p:nvCxnSpPr>
-          <p:cNvPr id="28" name=""/>
+          <p:cNvPr id="31" name=""/>
           <p:cNvCxnSpPr>
             <a:stCxn xmlns:a="http://schemas.openxmlformats.org/drawingml/2006/main" id="4" idx="3"/>
             <a:endCxn xmlns:a="http://schemas.openxmlformats.org/drawingml/2006/main" id="5" idx="1"/>
@@ -6439,7 +6716,7 @@
           <p:cNvPr id="9" name="eyebrow">
             <a:extLst xmlns:a="http://schemas.openxmlformats.org/drawingml/2006/main">
               <a:ext uri="{FF2B5EF4-FFF2-40B4-BE49-F238E27FC236}">
-                <a16:creationId xmlns:a16="http://schemas.microsoft.com/office/drawing/2014/main" id="{AAAC788F-3F5C-48D3-AD4E-8134ECE0449B}"/>
+                <a16:creationId xmlns:a16="http://schemas.microsoft.com/office/drawing/2014/main" id="{BD8BE20E-F83A-4500-9FC7-A14FA208337F}"/>
               </a:ext>
             </a:extLst>
           </p:cNvPr>
@@ -6487,10 +6764,69 @@
       </p:sp>
       <p:sp>
         <p:nvSpPr>
-          <p:cNvPr id="10" name="footer-rule">
-            <a:extLst xmlns:a="http://schemas.openxmlformats.org/drawingml/2006/main">
-              <a:ext uri="{FF2B5EF4-FFF2-40B4-BE49-F238E27FC236}">
-                <a16:creationId xmlns:a16="http://schemas.microsoft.com/office/drawing/2014/main" id="{E9EE11C5-8E98-4F47-B70A-16E6C38339C2}"/>
+          <p:cNvPr id="10" name="rescue-point-logo-background">
+            <a:extLst xmlns:a="http://schemas.openxmlformats.org/drawingml/2006/main">
+              <a:ext uri="{FF2B5EF4-FFF2-40B4-BE49-F238E27FC236}">
+                <a16:creationId xmlns:a16="http://schemas.microsoft.com/office/drawing/2014/main" id="{80344A12-6CA2-4D13-A8B6-44E9701AA9F8}"/>
+              </a:ext>
+            </a:extLst>
+          </p:cNvPr>
+          <p:cNvSpPr>
+            <a:spLocks xmlns:a="http://schemas.openxmlformats.org/drawingml/2006/main" noGrp="1"/>
+          </p:cNvSpPr>
+          <p:nvPr/>
+        </p:nvSpPr>
+        <p:spPr>
+          <a:xfrm xmlns:a="http://schemas.openxmlformats.org/drawingml/2006/main">
+            <a:off x="9772650" y="133350"/>
+            <a:ext cx="1733550" cy="457200"/>
+          </a:xfrm>
+          <a:prstGeom xmlns:a="http://schemas.openxmlformats.org/drawingml/2006/main" prst="roundRect">
+            <a:avLst>
+              <a:gd name="adj" fmla="val 16667"/>
+            </a:avLst>
+          </a:prstGeom>
+          <a:solidFill xmlns:a="http://schemas.openxmlformats.org/drawingml/2006/main">
+            <a:srgbClr val="06142E"/>
+          </a:solidFill>
+          <a:ln xmlns:a="http://schemas.openxmlformats.org/drawingml/2006/main" w="9525">
+            <a:solidFill>
+              <a:srgbClr val="1EC5FF">
+                <a:alpha val="33333"/>
+              </a:srgbClr>
+            </a:solidFill>
+            <a:prstDash val="solid"/>
+          </a:ln>
+        </p:spPr>
+      </p:sp>
+      <p:pic>
+        <p:nvPicPr>
+          <p:cNvPr id="34" name="" descr="Figura oficial da documentação dbt usada para explicar: Contexto melhora antes da resposta — Pergunta."/>
+          <p:cNvPicPr>
+            <a:picLocks xmlns:a="http://schemas.openxmlformats.org/drawingml/2006/main" noChangeAspect="1"/>
+          </p:cNvPicPr>
+          <p:nvPr/>
+        </p:nvPicPr>
+        <p:blipFill>
+          <a:blip xmlns:r="http://schemas.openxmlformats.org/officeDocument/2006/relationships" xmlns:a="http://schemas.openxmlformats.org/drawingml/2006/main" r:embed="Rec01de03476b44b9"/>
+          <a:stretch xmlns:a="http://schemas.openxmlformats.org/drawingml/2006/main"/>
+        </p:blipFill>
+        <p:spPr>
+          <a:xfrm xmlns:a="http://schemas.openxmlformats.org/drawingml/2006/main">
+            <a:off x="9893718" y="209550"/>
+            <a:ext cx="1491414" cy="323850"/>
+          </a:xfrm>
+          <a:prstGeom xmlns:a="http://schemas.openxmlformats.org/drawingml/2006/main" prst="rect">
+            <a:avLst/>
+          </a:prstGeom>
+        </p:spPr>
+      </p:pic>
+      <p:sp>
+        <p:nvSpPr>
+          <p:cNvPr id="12" name="footer-rule">
+            <a:extLst xmlns:a="http://schemas.openxmlformats.org/drawingml/2006/main">
+              <a:ext uri="{FF2B5EF4-FFF2-40B4-BE49-F238E27FC236}">
+                <a16:creationId xmlns:a16="http://schemas.microsoft.com/office/drawing/2014/main" id="{97D0E026-A5C7-4D07-9E5C-E87EED8D5591}"/>
               </a:ext>
             </a:extLst>
           </p:cNvPr>
@@ -6520,10 +6856,10 @@
       </p:sp>
       <p:sp>
         <p:nvSpPr>
-          <p:cNvPr id="11" name="footer">
-            <a:extLst xmlns:a="http://schemas.openxmlformats.org/drawingml/2006/main">
-              <a:ext uri="{FF2B5EF4-FFF2-40B4-BE49-F238E27FC236}">
-                <a16:creationId xmlns:a16="http://schemas.microsoft.com/office/drawing/2014/main" id="{1F1E0157-FA02-43A7-98E5-1EE9746A887A}"/>
+          <p:cNvPr id="13" name="footer">
+            <a:extLst xmlns:a="http://schemas.openxmlformats.org/drawingml/2006/main">
+              <a:ext uri="{FF2B5EF4-FFF2-40B4-BE49-F238E27FC236}">
+                <a16:creationId xmlns:a16="http://schemas.microsoft.com/office/drawing/2014/main" id="{7689B5C6-334C-4E78-B408-19E70ADF94BA}"/>
               </a:ext>
             </a:extLst>
           </p:cNvPr>
@@ -6575,10 +6911,10 @@
       </p:sp>
       <p:sp>
         <p:nvSpPr>
-          <p:cNvPr id="12" name="page-number">
-            <a:extLst xmlns:a="http://schemas.openxmlformats.org/drawingml/2006/main">
-              <a:ext uri="{FF2B5EF4-FFF2-40B4-BE49-F238E27FC236}">
-                <a16:creationId xmlns:a16="http://schemas.microsoft.com/office/drawing/2014/main" id="{80ACBCE8-A6A7-4FF4-B239-904866CED565}"/>
+          <p:cNvPr id="14" name="page-number">
+            <a:extLst xmlns:a="http://schemas.openxmlformats.org/drawingml/2006/main">
+              <a:ext uri="{FF2B5EF4-FFF2-40B4-BE49-F238E27FC236}">
+                <a16:creationId xmlns:a16="http://schemas.microsoft.com/office/drawing/2014/main" id="{CA2F6AFC-0049-4920-BE9B-EF556D93D790}"/>
               </a:ext>
             </a:extLst>
           </p:cNvPr>
@@ -6631,7 +6967,7 @@
     </p:spTree>
     <p:extLst>
       <p:ext uri="{BB962C8B-B14F-4D97-AF65-F5344CB8AC3E}">
-        <p14:creationId xmlns:p14="http://schemas.microsoft.com/office/powerpoint/2010/main" val="619394807"/>
+        <p14:creationId xmlns:p14="http://schemas.microsoft.com/office/powerpoint/2010/main" val="893235974"/>
       </p:ext>
     </p:extLst>
   </p:cSld>
@@ -6667,10 +7003,10 @@
       </p:grpSpPr>
       <p:sp>
         <p:nvSpPr>
-          <p:cNvPr id="9" name="slide-title">
-            <a:extLst xmlns:a="http://schemas.openxmlformats.org/drawingml/2006/main">
-              <a:ext uri="{FF2B5EF4-FFF2-40B4-BE49-F238E27FC236}">
-                <a16:creationId xmlns:a16="http://schemas.microsoft.com/office/drawing/2014/main" id="{8C63F14B-1A49-45AB-9E99-DE10FBDC80FE}"/>
+          <p:cNvPr id="11" name="slide-title">
+            <a:extLst xmlns:a="http://schemas.openxmlformats.org/drawingml/2006/main">
+              <a:ext uri="{FF2B5EF4-FFF2-40B4-BE49-F238E27FC236}">
+                <a16:creationId xmlns:a16="http://schemas.microsoft.com/office/drawing/2014/main" id="{24A1A755-91BD-4846-AB97-7F449370CD8A}"/>
               </a:ext>
             </a:extLst>
           </p:cNvPr>
@@ -6721,7 +7057,7 @@
           <p:cNvPr id="2" name="code-surface">
             <a:extLst xmlns:a="http://schemas.openxmlformats.org/drawingml/2006/main">
               <a:ext uri="{FF2B5EF4-FFF2-40B4-BE49-F238E27FC236}">
-                <a16:creationId xmlns:a16="http://schemas.microsoft.com/office/drawing/2014/main" id="{8628E389-B916-4476-975A-990F36FA067E}"/>
+                <a16:creationId xmlns:a16="http://schemas.microsoft.com/office/drawing/2014/main" id="{70721D4B-06CB-44CE-A7AD-D61EFA4E0D46}"/>
               </a:ext>
             </a:extLst>
           </p:cNvPr>
@@ -6756,7 +7092,7 @@
           <p:cNvPr id="3" name="command">
             <a:extLst xmlns:a="http://schemas.openxmlformats.org/drawingml/2006/main">
               <a:ext uri="{FF2B5EF4-FFF2-40B4-BE49-F238E27FC236}">
-                <a16:creationId xmlns:a16="http://schemas.microsoft.com/office/drawing/2014/main" id="{22490A8F-A967-492F-A3EB-91895ED2366F}"/>
+                <a16:creationId xmlns:a16="http://schemas.microsoft.com/office/drawing/2014/main" id="{32A96472-DFE3-4278-B29C-1164F604AC81}"/>
               </a:ext>
             </a:extLst>
           </p:cNvPr>
@@ -6807,7 +7143,7 @@
           <p:cNvPr id="4" name="command-help">
             <a:extLst xmlns:a="http://schemas.openxmlformats.org/drawingml/2006/main">
               <a:ext uri="{FF2B5EF4-FFF2-40B4-BE49-F238E27FC236}">
-                <a16:creationId xmlns:a16="http://schemas.microsoft.com/office/drawing/2014/main" id="{042CF1BD-FAF3-4B28-BF3E-5B7F54631A86}"/>
+                <a16:creationId xmlns:a16="http://schemas.microsoft.com/office/drawing/2014/main" id="{17A3394A-D045-406F-8B9F-F50AD730CD8C}"/>
               </a:ext>
             </a:extLst>
           </p:cNvPr>
@@ -6858,7 +7194,7 @@
           <p:cNvPr id="5" name="eyebrow">
             <a:extLst xmlns:a="http://schemas.openxmlformats.org/drawingml/2006/main">
               <a:ext uri="{FF2B5EF4-FFF2-40B4-BE49-F238E27FC236}">
-                <a16:creationId xmlns:a16="http://schemas.microsoft.com/office/drawing/2014/main" id="{E2755CCB-F2B5-4C00-807E-5A3A7575B97B}"/>
+                <a16:creationId xmlns:a16="http://schemas.microsoft.com/office/drawing/2014/main" id="{3B8F3BB1-0746-4C08-8355-8BBBE3C2556B}"/>
               </a:ext>
             </a:extLst>
           </p:cNvPr>
@@ -6906,10 +7242,69 @@
       </p:sp>
       <p:sp>
         <p:nvSpPr>
-          <p:cNvPr id="6" name="footer-rule">
-            <a:extLst xmlns:a="http://schemas.openxmlformats.org/drawingml/2006/main">
-              <a:ext uri="{FF2B5EF4-FFF2-40B4-BE49-F238E27FC236}">
-                <a16:creationId xmlns:a16="http://schemas.microsoft.com/office/drawing/2014/main" id="{D19DEA49-DBE5-4351-985A-CD8C6BB35AD8}"/>
+          <p:cNvPr id="6" name="rescue-point-logo-background">
+            <a:extLst xmlns:a="http://schemas.openxmlformats.org/drawingml/2006/main">
+              <a:ext uri="{FF2B5EF4-FFF2-40B4-BE49-F238E27FC236}">
+                <a16:creationId xmlns:a16="http://schemas.microsoft.com/office/drawing/2014/main" id="{E38616CB-D54B-40DC-8A71-A7412CCDE610}"/>
+              </a:ext>
+            </a:extLst>
+          </p:cNvPr>
+          <p:cNvSpPr>
+            <a:spLocks xmlns:a="http://schemas.openxmlformats.org/drawingml/2006/main" noGrp="1"/>
+          </p:cNvSpPr>
+          <p:nvPr/>
+        </p:nvSpPr>
+        <p:spPr>
+          <a:xfrm xmlns:a="http://schemas.openxmlformats.org/drawingml/2006/main">
+            <a:off x="9772650" y="133350"/>
+            <a:ext cx="1733550" cy="457200"/>
+          </a:xfrm>
+          <a:prstGeom xmlns:a="http://schemas.openxmlformats.org/drawingml/2006/main" prst="roundRect">
+            <a:avLst>
+              <a:gd name="adj" fmla="val 16667"/>
+            </a:avLst>
+          </a:prstGeom>
+          <a:solidFill xmlns:a="http://schemas.openxmlformats.org/drawingml/2006/main">
+            <a:srgbClr val="06142E"/>
+          </a:solidFill>
+          <a:ln xmlns:a="http://schemas.openxmlformats.org/drawingml/2006/main" w="9525">
+            <a:solidFill>
+              <a:srgbClr val="1EC5FF">
+                <a:alpha val="33333"/>
+              </a:srgbClr>
+            </a:solidFill>
+            <a:prstDash val="solid"/>
+          </a:ln>
+        </p:spPr>
+      </p:sp>
+      <p:pic>
+        <p:nvPicPr>
+          <p:cNvPr id="19" name="" descr="Figura oficial da documentação dbt usada para explicar: Demonstração — execute — python course.py checkpoint 11."/>
+          <p:cNvPicPr>
+            <a:picLocks xmlns:a="http://schemas.openxmlformats.org/drawingml/2006/main" noChangeAspect="1"/>
+          </p:cNvPicPr>
+          <p:nvPr/>
+        </p:nvPicPr>
+        <p:blipFill>
+          <a:blip xmlns:r="http://schemas.openxmlformats.org/officeDocument/2006/relationships" xmlns:a="http://schemas.openxmlformats.org/drawingml/2006/main" r:embed="Rb7bea07cfcc240b5"/>
+          <a:stretch xmlns:a="http://schemas.openxmlformats.org/drawingml/2006/main"/>
+        </p:blipFill>
+        <p:spPr>
+          <a:xfrm xmlns:a="http://schemas.openxmlformats.org/drawingml/2006/main">
+            <a:off x="9893718" y="209550"/>
+            <a:ext cx="1491414" cy="323850"/>
+          </a:xfrm>
+          <a:prstGeom xmlns:a="http://schemas.openxmlformats.org/drawingml/2006/main" prst="rect">
+            <a:avLst/>
+          </a:prstGeom>
+        </p:spPr>
+      </p:pic>
+      <p:sp>
+        <p:nvSpPr>
+          <p:cNvPr id="8" name="footer-rule">
+            <a:extLst xmlns:a="http://schemas.openxmlformats.org/drawingml/2006/main">
+              <a:ext uri="{FF2B5EF4-FFF2-40B4-BE49-F238E27FC236}">
+                <a16:creationId xmlns:a16="http://schemas.microsoft.com/office/drawing/2014/main" id="{91940A11-13F3-4783-9D36-6AB9BDAC7C06}"/>
               </a:ext>
             </a:extLst>
           </p:cNvPr>
@@ -6939,10 +7334,10 @@
       </p:sp>
       <p:sp>
         <p:nvSpPr>
-          <p:cNvPr id="7" name="footer">
-            <a:extLst xmlns:a="http://schemas.openxmlformats.org/drawingml/2006/main">
-              <a:ext uri="{FF2B5EF4-FFF2-40B4-BE49-F238E27FC236}">
-                <a16:creationId xmlns:a16="http://schemas.microsoft.com/office/drawing/2014/main" id="{C5D94BE5-F931-4107-AF49-D1BEB33FA024}"/>
+          <p:cNvPr id="9" name="footer">
+            <a:extLst xmlns:a="http://schemas.openxmlformats.org/drawingml/2006/main">
+              <a:ext uri="{FF2B5EF4-FFF2-40B4-BE49-F238E27FC236}">
+                <a16:creationId xmlns:a16="http://schemas.microsoft.com/office/drawing/2014/main" id="{321395EC-2F01-498D-96D1-EFD2395D2338}"/>
               </a:ext>
             </a:extLst>
           </p:cNvPr>
@@ -6994,10 +7389,10 @@
       </p:sp>
       <p:sp>
         <p:nvSpPr>
-          <p:cNvPr id="8" name="page-number">
-            <a:extLst xmlns:a="http://schemas.openxmlformats.org/drawingml/2006/main">
-              <a:ext uri="{FF2B5EF4-FFF2-40B4-BE49-F238E27FC236}">
-                <a16:creationId xmlns:a16="http://schemas.microsoft.com/office/drawing/2014/main" id="{BE6A343E-35B3-48FB-BD68-78F8ABD643D3}"/>
+          <p:cNvPr id="10" name="page-number">
+            <a:extLst xmlns:a="http://schemas.openxmlformats.org/drawingml/2006/main">
+              <a:ext uri="{FF2B5EF4-FFF2-40B4-BE49-F238E27FC236}">
+                <a16:creationId xmlns:a16="http://schemas.microsoft.com/office/drawing/2014/main" id="{BC79E9F3-ED95-4CD4-8ACD-04231028945A}"/>
               </a:ext>
             </a:extLst>
           </p:cNvPr>
@@ -7050,7 +7445,7 @@
     </p:spTree>
     <p:extLst>
       <p:ext uri="{BB962C8B-B14F-4D97-AF65-F5344CB8AC3E}">
-        <p14:creationId xmlns:p14="http://schemas.microsoft.com/office/powerpoint/2010/main" val="895850089"/>
+        <p14:creationId xmlns:p14="http://schemas.microsoft.com/office/powerpoint/2010/main" val="1903211899"/>
       </p:ext>
     </p:extLst>
   </p:cSld>
@@ -7078,10 +7473,10 @@
       </p:grpSpPr>
       <p:sp>
         <p:nvSpPr>
-          <p:cNvPr id="14" name="slide-title">
-            <a:extLst xmlns:a="http://schemas.openxmlformats.org/drawingml/2006/main">
-              <a:ext uri="{FF2B5EF4-FFF2-40B4-BE49-F238E27FC236}">
-                <a16:creationId xmlns:a16="http://schemas.microsoft.com/office/drawing/2014/main" id="{D411D292-EEC3-461D-BBA2-E46AFB3867D5}"/>
+          <p:cNvPr id="16" name="slide-title">
+            <a:extLst xmlns:a="http://schemas.openxmlformats.org/drawingml/2006/main">
+              <a:ext uri="{FF2B5EF4-FFF2-40B4-BE49-F238E27FC236}">
+                <a16:creationId xmlns:a16="http://schemas.microsoft.com/office/drawing/2014/main" id="{69A5A843-FEAC-427C-9472-E651F50B0A8B}"/>
               </a:ext>
             </a:extLst>
           </p:cNvPr>
@@ -7132,7 +7527,7 @@
           <p:cNvPr id="2" name="step-num-1">
             <a:extLst xmlns:a="http://schemas.openxmlformats.org/drawingml/2006/main">
               <a:ext uri="{FF2B5EF4-FFF2-40B4-BE49-F238E27FC236}">
-                <a16:creationId xmlns:a16="http://schemas.microsoft.com/office/drawing/2014/main" id="{F8367CBF-7A28-4D74-8281-AACF84752AF8}"/>
+                <a16:creationId xmlns:a16="http://schemas.microsoft.com/office/drawing/2014/main" id="{F10BD472-8BEE-4198-86A9-691D90AFD42F}"/>
               </a:ext>
             </a:extLst>
           </p:cNvPr>
@@ -7183,7 +7578,7 @@
           <p:cNvPr id="3" name="step-label-1">
             <a:extLst xmlns:a="http://schemas.openxmlformats.org/drawingml/2006/main">
               <a:ext uri="{FF2B5EF4-FFF2-40B4-BE49-F238E27FC236}">
-                <a16:creationId xmlns:a16="http://schemas.microsoft.com/office/drawing/2014/main" id="{90DDEF93-2851-4B96-B66E-D9A8C925CAF9}"/>
+                <a16:creationId xmlns:a16="http://schemas.microsoft.com/office/drawing/2014/main" id="{09D6B082-5997-4AB2-926F-ACA3DD2F2C70}"/>
               </a:ext>
             </a:extLst>
           </p:cNvPr>
@@ -7234,7 +7629,7 @@
           <p:cNvPr id="4" name="step-line-1">
             <a:extLst xmlns:a="http://schemas.openxmlformats.org/drawingml/2006/main">
               <a:ext uri="{FF2B5EF4-FFF2-40B4-BE49-F238E27FC236}">
-                <a16:creationId xmlns:a16="http://schemas.microsoft.com/office/drawing/2014/main" id="{F2981018-3ED2-4E44-A2BB-B0242A52FA77}"/>
+                <a16:creationId xmlns:a16="http://schemas.microsoft.com/office/drawing/2014/main" id="{FFE81310-BBFA-40B7-8BEA-44CCD183DA1D}"/>
               </a:ext>
             </a:extLst>
           </p:cNvPr>
@@ -7265,7 +7660,7 @@
           <p:cNvPr id="5" name="step-num-2">
             <a:extLst xmlns:a="http://schemas.openxmlformats.org/drawingml/2006/main">
               <a:ext uri="{FF2B5EF4-FFF2-40B4-BE49-F238E27FC236}">
-                <a16:creationId xmlns:a16="http://schemas.microsoft.com/office/drawing/2014/main" id="{CDD40FC0-BE8A-4492-919B-8307BFECD2FF}"/>
+                <a16:creationId xmlns:a16="http://schemas.microsoft.com/office/drawing/2014/main" id="{21446C13-20C2-4CBB-8E4A-AC3B4CA11320}"/>
               </a:ext>
             </a:extLst>
           </p:cNvPr>
@@ -7316,7 +7711,7 @@
           <p:cNvPr id="6" name="step-label-2">
             <a:extLst xmlns:a="http://schemas.openxmlformats.org/drawingml/2006/main">
               <a:ext uri="{FF2B5EF4-FFF2-40B4-BE49-F238E27FC236}">
-                <a16:creationId xmlns:a16="http://schemas.microsoft.com/office/drawing/2014/main" id="{014AB3A5-19A0-4A5C-84F2-17D8A19BB471}"/>
+                <a16:creationId xmlns:a16="http://schemas.microsoft.com/office/drawing/2014/main" id="{A66F39EA-BA2E-4B57-9DDF-94DFBB5E64D4}"/>
               </a:ext>
             </a:extLst>
           </p:cNvPr>
@@ -7367,7 +7762,7 @@
           <p:cNvPr id="7" name="step-line-2">
             <a:extLst xmlns:a="http://schemas.openxmlformats.org/drawingml/2006/main">
               <a:ext uri="{FF2B5EF4-FFF2-40B4-BE49-F238E27FC236}">
-                <a16:creationId xmlns:a16="http://schemas.microsoft.com/office/drawing/2014/main" id="{8FBC306C-A519-47F8-957C-DB3AA8E01E28}"/>
+                <a16:creationId xmlns:a16="http://schemas.microsoft.com/office/drawing/2014/main" id="{2153D565-99BD-4A7E-A0A4-40C6090B5F95}"/>
               </a:ext>
             </a:extLst>
           </p:cNvPr>
@@ -7398,7 +7793,7 @@
           <p:cNvPr id="8" name="step-num-3">
             <a:extLst xmlns:a="http://schemas.openxmlformats.org/drawingml/2006/main">
               <a:ext uri="{FF2B5EF4-FFF2-40B4-BE49-F238E27FC236}">
-                <a16:creationId xmlns:a16="http://schemas.microsoft.com/office/drawing/2014/main" id="{4D1BD30F-8CB1-4DD8-AAD0-ABDD67A4B064}"/>
+                <a16:creationId xmlns:a16="http://schemas.microsoft.com/office/drawing/2014/main" id="{3DAABC66-419A-49C4-BB40-3F8B694D8A7E}"/>
               </a:ext>
             </a:extLst>
           </p:cNvPr>
@@ -7449,7 +7844,7 @@
           <p:cNvPr id="9" name="step-label-3">
             <a:extLst xmlns:a="http://schemas.openxmlformats.org/drawingml/2006/main">
               <a:ext uri="{FF2B5EF4-FFF2-40B4-BE49-F238E27FC236}">
-                <a16:creationId xmlns:a16="http://schemas.microsoft.com/office/drawing/2014/main" id="{E2B91D38-7AD1-4415-A0E1-D75F2B2E66BC}"/>
+                <a16:creationId xmlns:a16="http://schemas.microsoft.com/office/drawing/2014/main" id="{6435AC22-9A35-4D06-8FB7-110E380BC8D3}"/>
               </a:ext>
             </a:extLst>
           </p:cNvPr>
@@ -7500,7 +7895,7 @@
           <p:cNvPr id="10" name="eyebrow">
             <a:extLst xmlns:a="http://schemas.openxmlformats.org/drawingml/2006/main">
               <a:ext uri="{FF2B5EF4-FFF2-40B4-BE49-F238E27FC236}">
-                <a16:creationId xmlns:a16="http://schemas.microsoft.com/office/drawing/2014/main" id="{C2E2A8FA-610A-4202-A5C2-E752BF1ED18D}"/>
+                <a16:creationId xmlns:a16="http://schemas.microsoft.com/office/drawing/2014/main" id="{422E6720-E275-421E-9111-FCB9C4612436}"/>
               </a:ext>
             </a:extLst>
           </p:cNvPr>
@@ -7548,10 +7943,69 @@
       </p:sp>
       <p:sp>
         <p:nvSpPr>
-          <p:cNvPr id="11" name="footer-rule">
-            <a:extLst xmlns:a="http://schemas.openxmlformats.org/drawingml/2006/main">
-              <a:ext uri="{FF2B5EF4-FFF2-40B4-BE49-F238E27FC236}">
-                <a16:creationId xmlns:a16="http://schemas.microsoft.com/office/drawing/2014/main" id="{03904675-A9C0-4D50-834B-E4FC4252B81F}"/>
+          <p:cNvPr id="11" name="rescue-point-logo-background">
+            <a:extLst xmlns:a="http://schemas.openxmlformats.org/drawingml/2006/main">
+              <a:ext uri="{FF2B5EF4-FFF2-40B4-BE49-F238E27FC236}">
+                <a16:creationId xmlns:a16="http://schemas.microsoft.com/office/drawing/2014/main" id="{8488659E-FDF4-4C6B-AB18-41515B8C58D1}"/>
+              </a:ext>
+            </a:extLst>
+          </p:cNvPr>
+          <p:cNvSpPr>
+            <a:spLocks xmlns:a="http://schemas.openxmlformats.org/drawingml/2006/main" noGrp="1"/>
+          </p:cNvSpPr>
+          <p:nvPr/>
+        </p:nvSpPr>
+        <p:spPr>
+          <a:xfrm xmlns:a="http://schemas.openxmlformats.org/drawingml/2006/main">
+            <a:off x="9772650" y="133350"/>
+            <a:ext cx="1733550" cy="457200"/>
+          </a:xfrm>
+          <a:prstGeom xmlns:a="http://schemas.openxmlformats.org/drawingml/2006/main" prst="roundRect">
+            <a:avLst>
+              <a:gd name="adj" fmla="val 16667"/>
+            </a:avLst>
+          </a:prstGeom>
+          <a:solidFill xmlns:a="http://schemas.openxmlformats.org/drawingml/2006/main">
+            <a:srgbClr val="06142E"/>
+          </a:solidFill>
+          <a:ln xmlns:a="http://schemas.openxmlformats.org/drawingml/2006/main" w="9525">
+            <a:solidFill>
+              <a:srgbClr val="1EC5FF">
+                <a:alpha val="33333"/>
+              </a:srgbClr>
+            </a:solidFill>
+            <a:prstDash val="solid"/>
+          </a:ln>
+        </p:spPr>
+      </p:sp>
+      <p:pic>
+        <p:nvPicPr>
+          <p:cNvPr id="29" name="" descr="Figura oficial da documentação dbt usada para explicar: Demonstração — observe — 01."/>
+          <p:cNvPicPr>
+            <a:picLocks xmlns:a="http://schemas.openxmlformats.org/drawingml/2006/main" noChangeAspect="1"/>
+          </p:cNvPicPr>
+          <p:nvPr/>
+        </p:nvPicPr>
+        <p:blipFill>
+          <a:blip xmlns:r="http://schemas.openxmlformats.org/officeDocument/2006/relationships" xmlns:a="http://schemas.openxmlformats.org/drawingml/2006/main" r:embed="Re6202aefb9394162"/>
+          <a:stretch xmlns:a="http://schemas.openxmlformats.org/drawingml/2006/main"/>
+        </p:blipFill>
+        <p:spPr>
+          <a:xfrm xmlns:a="http://schemas.openxmlformats.org/drawingml/2006/main">
+            <a:off x="9893718" y="209550"/>
+            <a:ext cx="1491414" cy="323850"/>
+          </a:xfrm>
+          <a:prstGeom xmlns:a="http://schemas.openxmlformats.org/drawingml/2006/main" prst="rect">
+            <a:avLst/>
+          </a:prstGeom>
+        </p:spPr>
+      </p:pic>
+      <p:sp>
+        <p:nvSpPr>
+          <p:cNvPr id="13" name="footer-rule">
+            <a:extLst xmlns:a="http://schemas.openxmlformats.org/drawingml/2006/main">
+              <a:ext uri="{FF2B5EF4-FFF2-40B4-BE49-F238E27FC236}">
+                <a16:creationId xmlns:a16="http://schemas.microsoft.com/office/drawing/2014/main" id="{2F9D9941-9949-46FB-B8AE-96168778DB41}"/>
               </a:ext>
             </a:extLst>
           </p:cNvPr>
@@ -7581,10 +8035,10 @@
       </p:sp>
       <p:sp>
         <p:nvSpPr>
-          <p:cNvPr id="12" name="footer">
-            <a:extLst xmlns:a="http://schemas.openxmlformats.org/drawingml/2006/main">
-              <a:ext uri="{FF2B5EF4-FFF2-40B4-BE49-F238E27FC236}">
-                <a16:creationId xmlns:a16="http://schemas.microsoft.com/office/drawing/2014/main" id="{1C564C9E-2BBC-4A59-985A-BC19A6F08F2E}"/>
+          <p:cNvPr id="14" name="footer">
+            <a:extLst xmlns:a="http://schemas.openxmlformats.org/drawingml/2006/main">
+              <a:ext uri="{FF2B5EF4-FFF2-40B4-BE49-F238E27FC236}">
+                <a16:creationId xmlns:a16="http://schemas.microsoft.com/office/drawing/2014/main" id="{24B9015F-E524-4C79-B9EC-538F7379DA32}"/>
               </a:ext>
             </a:extLst>
           </p:cNvPr>
@@ -7636,10 +8090,10 @@
       </p:sp>
       <p:sp>
         <p:nvSpPr>
-          <p:cNvPr id="13" name="page-number">
-            <a:extLst xmlns:a="http://schemas.openxmlformats.org/drawingml/2006/main">
-              <a:ext uri="{FF2B5EF4-FFF2-40B4-BE49-F238E27FC236}">
-                <a16:creationId xmlns:a16="http://schemas.microsoft.com/office/drawing/2014/main" id="{7A55363F-018D-4804-8AAB-806A507088DC}"/>
+          <p:cNvPr id="15" name="page-number">
+            <a:extLst xmlns:a="http://schemas.openxmlformats.org/drawingml/2006/main">
+              <a:ext uri="{FF2B5EF4-FFF2-40B4-BE49-F238E27FC236}">
+                <a16:creationId xmlns:a16="http://schemas.microsoft.com/office/drawing/2014/main" id="{8CC81F71-E80A-4038-B172-CCE1C8193B28}"/>
               </a:ext>
             </a:extLst>
           </p:cNvPr>
@@ -7692,7 +8146,7 @@
     </p:spTree>
     <p:extLst>
       <p:ext uri="{BB962C8B-B14F-4D97-AF65-F5344CB8AC3E}">
-        <p14:creationId xmlns:p14="http://schemas.microsoft.com/office/powerpoint/2010/main" val="566065504"/>
+        <p14:creationId xmlns:p14="http://schemas.microsoft.com/office/powerpoint/2010/main" val="1031073777"/>
       </p:ext>
     </p:extLst>
   </p:cSld>
@@ -7728,10 +8182,10 @@
       </p:grpSpPr>
       <p:sp>
         <p:nvSpPr>
-          <p:cNvPr id="10" name="result-label">
-            <a:extLst xmlns:a="http://schemas.openxmlformats.org/drawingml/2006/main">
-              <a:ext uri="{FF2B5EF4-FFF2-40B4-BE49-F238E27FC236}">
-                <a16:creationId xmlns:a16="http://schemas.microsoft.com/office/drawing/2014/main" id="{C950A628-62BD-46A3-8D27-69D87F8CD90C}"/>
+          <p:cNvPr id="12" name="result-label">
+            <a:extLst xmlns:a="http://schemas.openxmlformats.org/drawingml/2006/main">
+              <a:ext uri="{FF2B5EF4-FFF2-40B4-BE49-F238E27FC236}">
+                <a16:creationId xmlns:a16="http://schemas.microsoft.com/office/drawing/2014/main" id="{CD7357F0-B491-48A6-B995-39C90B1927EE}"/>
               </a:ext>
             </a:extLst>
           </p:cNvPr>
@@ -7782,7 +8236,7 @@
           <p:cNvPr id="2" name="result">
             <a:extLst xmlns:a="http://schemas.openxmlformats.org/drawingml/2006/main">
               <a:ext uri="{FF2B5EF4-FFF2-40B4-BE49-F238E27FC236}">
-                <a16:creationId xmlns:a16="http://schemas.microsoft.com/office/drawing/2014/main" id="{6847E7B4-057B-4D4E-8DB6-2DA9C1679A68}"/>
+                <a16:creationId xmlns:a16="http://schemas.microsoft.com/office/drawing/2014/main" id="{0487357D-62AB-4583-A362-EBFEF8D6B406}"/>
               </a:ext>
             </a:extLst>
           </p:cNvPr>
@@ -7833,7 +8287,7 @@
           <p:cNvPr id="3" name="result-meta">
             <a:extLst xmlns:a="http://schemas.openxmlformats.org/drawingml/2006/main">
               <a:ext uri="{FF2B5EF4-FFF2-40B4-BE49-F238E27FC236}">
-                <a16:creationId xmlns:a16="http://schemas.microsoft.com/office/drawing/2014/main" id="{4747F771-980C-4594-925C-BA85080DE543}"/>
+                <a16:creationId xmlns:a16="http://schemas.microsoft.com/office/drawing/2014/main" id="{E24CDED2-9B8F-4236-BCE7-E78D69FF2CEE}"/>
               </a:ext>
             </a:extLst>
           </p:cNvPr>
@@ -7884,7 +8338,7 @@
           <p:cNvPr id="4" name="ambient-glow">
             <a:extLst xmlns:a="http://schemas.openxmlformats.org/drawingml/2006/main">
               <a:ext uri="{FF2B5EF4-FFF2-40B4-BE49-F238E27FC236}">
-                <a16:creationId xmlns:a16="http://schemas.microsoft.com/office/drawing/2014/main" id="{889C6223-B0E6-483C-9120-2A9552D167CD}"/>
+                <a16:creationId xmlns:a16="http://schemas.microsoft.com/office/drawing/2014/main" id="{EA115495-358C-4B9C-B18F-B36EFD8B8D1A}"/>
               </a:ext>
             </a:extLst>
           </p:cNvPr>
@@ -7921,7 +8375,7 @@
           <p:cNvPr id="5" name="ambient-core">
             <a:extLst xmlns:a="http://schemas.openxmlformats.org/drawingml/2006/main">
               <a:ext uri="{FF2B5EF4-FFF2-40B4-BE49-F238E27FC236}">
-                <a16:creationId xmlns:a16="http://schemas.microsoft.com/office/drawing/2014/main" id="{955C4519-4756-48DA-9C05-8CB0A441C9B5}"/>
+                <a16:creationId xmlns:a16="http://schemas.microsoft.com/office/drawing/2014/main" id="{85EE3019-4B5D-47B1-B6C8-578B0E459C92}"/>
               </a:ext>
             </a:extLst>
           </p:cNvPr>
@@ -7958,7 +8412,7 @@
           <p:cNvPr id="6" name="eyebrow">
             <a:extLst xmlns:a="http://schemas.openxmlformats.org/drawingml/2006/main">
               <a:ext uri="{FF2B5EF4-FFF2-40B4-BE49-F238E27FC236}">
-                <a16:creationId xmlns:a16="http://schemas.microsoft.com/office/drawing/2014/main" id="{B28A25A4-E5F5-40FD-9C76-EB2158B1A098}"/>
+                <a16:creationId xmlns:a16="http://schemas.microsoft.com/office/drawing/2014/main" id="{B0A78D9C-DC75-472C-A5B0-193E39056441}"/>
               </a:ext>
             </a:extLst>
           </p:cNvPr>
@@ -8006,10 +8460,69 @@
       </p:sp>
       <p:sp>
         <p:nvSpPr>
-          <p:cNvPr id="7" name="footer-rule">
-            <a:extLst xmlns:a="http://schemas.openxmlformats.org/drawingml/2006/main">
-              <a:ext uri="{FF2B5EF4-FFF2-40B4-BE49-F238E27FC236}">
-                <a16:creationId xmlns:a16="http://schemas.microsoft.com/office/drawing/2014/main" id="{A09C4C93-9271-40FE-AC59-36310F4040BB}"/>
+          <p:cNvPr id="7" name="rescue-point-logo-background">
+            <a:extLst xmlns:a="http://schemas.openxmlformats.org/drawingml/2006/main">
+              <a:ext uri="{FF2B5EF4-FFF2-40B4-BE49-F238E27FC236}">
+                <a16:creationId xmlns:a16="http://schemas.microsoft.com/office/drawing/2014/main" id="{1DA1283D-D260-42ED-B98D-0794FAD4D9BE}"/>
+              </a:ext>
+            </a:extLst>
+          </p:cNvPr>
+          <p:cNvSpPr>
+            <a:spLocks xmlns:a="http://schemas.openxmlformats.org/drawingml/2006/main" noGrp="1"/>
+          </p:cNvSpPr>
+          <p:nvPr/>
+        </p:nvSpPr>
+        <p:spPr>
+          <a:xfrm xmlns:a="http://schemas.openxmlformats.org/drawingml/2006/main">
+            <a:off x="9772650" y="133350"/>
+            <a:ext cx="1733550" cy="457200"/>
+          </a:xfrm>
+          <a:prstGeom xmlns:a="http://schemas.openxmlformats.org/drawingml/2006/main" prst="roundRect">
+            <a:avLst>
+              <a:gd name="adj" fmla="val 16667"/>
+            </a:avLst>
+          </a:prstGeom>
+          <a:solidFill xmlns:a="http://schemas.openxmlformats.org/drawingml/2006/main">
+            <a:srgbClr val="06142E"/>
+          </a:solidFill>
+          <a:ln xmlns:a="http://schemas.openxmlformats.org/drawingml/2006/main" w="9525">
+            <a:solidFill>
+              <a:srgbClr val="1EC5FF">
+                <a:alpha val="33333"/>
+              </a:srgbClr>
+            </a:solidFill>
+            <a:prstDash val="solid"/>
+          </a:ln>
+        </p:spPr>
+      </p:sp>
+      <p:pic>
+        <p:nvPicPr>
+          <p:cNvPr id="21" name="" descr="Figura oficial da documentação dbt usada para explicar: RESULTADO ESPERADO — MCP somente leitura validado."/>
+          <p:cNvPicPr>
+            <a:picLocks xmlns:a="http://schemas.openxmlformats.org/drawingml/2006/main" noChangeAspect="1"/>
+          </p:cNvPicPr>
+          <p:nvPr/>
+        </p:nvPicPr>
+        <p:blipFill>
+          <a:blip xmlns:r="http://schemas.openxmlformats.org/officeDocument/2006/relationships" xmlns:a="http://schemas.openxmlformats.org/drawingml/2006/main" r:embed="Rd51f81b543d34915"/>
+          <a:stretch xmlns:a="http://schemas.openxmlformats.org/drawingml/2006/main"/>
+        </p:blipFill>
+        <p:spPr>
+          <a:xfrm xmlns:a="http://schemas.openxmlformats.org/drawingml/2006/main">
+            <a:off x="9893718" y="209550"/>
+            <a:ext cx="1491414" cy="323850"/>
+          </a:xfrm>
+          <a:prstGeom xmlns:a="http://schemas.openxmlformats.org/drawingml/2006/main" prst="rect">
+            <a:avLst/>
+          </a:prstGeom>
+        </p:spPr>
+      </p:pic>
+      <p:sp>
+        <p:nvSpPr>
+          <p:cNvPr id="9" name="footer-rule">
+            <a:extLst xmlns:a="http://schemas.openxmlformats.org/drawingml/2006/main">
+              <a:ext uri="{FF2B5EF4-FFF2-40B4-BE49-F238E27FC236}">
+                <a16:creationId xmlns:a16="http://schemas.microsoft.com/office/drawing/2014/main" id="{082B18F2-C2DC-4754-91E6-01252DAE6C61}"/>
               </a:ext>
             </a:extLst>
           </p:cNvPr>
@@ -8039,10 +8552,10 @@
       </p:sp>
       <p:sp>
         <p:nvSpPr>
-          <p:cNvPr id="8" name="footer">
-            <a:extLst xmlns:a="http://schemas.openxmlformats.org/drawingml/2006/main">
-              <a:ext uri="{FF2B5EF4-FFF2-40B4-BE49-F238E27FC236}">
-                <a16:creationId xmlns:a16="http://schemas.microsoft.com/office/drawing/2014/main" id="{F40AB899-0624-47B0-B62C-3A1FF65BEA0B}"/>
+          <p:cNvPr id="10" name="footer">
+            <a:extLst xmlns:a="http://schemas.openxmlformats.org/drawingml/2006/main">
+              <a:ext uri="{FF2B5EF4-FFF2-40B4-BE49-F238E27FC236}">
+                <a16:creationId xmlns:a16="http://schemas.microsoft.com/office/drawing/2014/main" id="{27379F01-4320-46C8-BA49-C67B77E0E9F6}"/>
               </a:ext>
             </a:extLst>
           </p:cNvPr>
@@ -8094,10 +8607,10 @@
       </p:sp>
       <p:sp>
         <p:nvSpPr>
-          <p:cNvPr id="9" name="page-number">
-            <a:extLst xmlns:a="http://schemas.openxmlformats.org/drawingml/2006/main">
-              <a:ext uri="{FF2B5EF4-FFF2-40B4-BE49-F238E27FC236}">
-                <a16:creationId xmlns:a16="http://schemas.microsoft.com/office/drawing/2014/main" id="{C307DD94-9BF1-409E-8A3F-8752739DAB8E}"/>
+          <p:cNvPr id="11" name="page-number">
+            <a:extLst xmlns:a="http://schemas.openxmlformats.org/drawingml/2006/main">
+              <a:ext uri="{FF2B5EF4-FFF2-40B4-BE49-F238E27FC236}">
+                <a16:creationId xmlns:a16="http://schemas.microsoft.com/office/drawing/2014/main" id="{5FB69296-2197-424B-8D36-624ADFC405CA}"/>
               </a:ext>
             </a:extLst>
           </p:cNvPr>
@@ -8150,7 +8663,7 @@
     </p:spTree>
     <p:extLst>
       <p:ext uri="{BB962C8B-B14F-4D97-AF65-F5344CB8AC3E}">
-        <p14:creationId xmlns:p14="http://schemas.microsoft.com/office/powerpoint/2010/main" val="1295793587"/>
+        <p14:creationId xmlns:p14="http://schemas.microsoft.com/office/powerpoint/2010/main" val="945507816"/>
       </p:ext>
     </p:extLst>
   </p:cSld>
@@ -8178,10 +8691,10 @@
       </p:grpSpPr>
       <p:sp>
         <p:nvSpPr>
-          <p:cNvPr id="14" name="slide-title">
-            <a:extLst xmlns:a="http://schemas.openxmlformats.org/drawingml/2006/main">
-              <a:ext uri="{FF2B5EF4-FFF2-40B4-BE49-F238E27FC236}">
-                <a16:creationId xmlns:a16="http://schemas.microsoft.com/office/drawing/2014/main" id="{B72BB3E0-77FD-4AD2-BA4B-76EFF2439488}"/>
+          <p:cNvPr id="16" name="slide-title">
+            <a:extLst xmlns:a="http://schemas.openxmlformats.org/drawingml/2006/main">
+              <a:ext uri="{FF2B5EF4-FFF2-40B4-BE49-F238E27FC236}">
+                <a16:creationId xmlns:a16="http://schemas.microsoft.com/office/drawing/2014/main" id="{3258DAA3-2297-44D9-911F-FA561E3CCFBC}"/>
               </a:ext>
             </a:extLst>
           </p:cNvPr>
@@ -8232,7 +8745,7 @@
           <p:cNvPr id="2" name="step-num-1">
             <a:extLst xmlns:a="http://schemas.openxmlformats.org/drawingml/2006/main">
               <a:ext uri="{FF2B5EF4-FFF2-40B4-BE49-F238E27FC236}">
-                <a16:creationId xmlns:a16="http://schemas.microsoft.com/office/drawing/2014/main" id="{4908B4F5-9241-4150-BB95-41732AF0DE5A}"/>
+                <a16:creationId xmlns:a16="http://schemas.microsoft.com/office/drawing/2014/main" id="{D2CF494F-3E4B-4E20-ADA1-F0118B5FD4CA}"/>
               </a:ext>
             </a:extLst>
           </p:cNvPr>
@@ -8283,7 +8796,7 @@
           <p:cNvPr id="3" name="step-label-1">
             <a:extLst xmlns:a="http://schemas.openxmlformats.org/drawingml/2006/main">
               <a:ext uri="{FF2B5EF4-FFF2-40B4-BE49-F238E27FC236}">
-                <a16:creationId xmlns:a16="http://schemas.microsoft.com/office/drawing/2014/main" id="{E2525714-4F6C-4EE7-9EED-3FD5108F9CEC}"/>
+                <a16:creationId xmlns:a16="http://schemas.microsoft.com/office/drawing/2014/main" id="{61AE568A-5263-43CD-BFC7-F53C21A64D62}"/>
               </a:ext>
             </a:extLst>
           </p:cNvPr>
@@ -8334,7 +8847,7 @@
           <p:cNvPr id="4" name="step-line-1">
             <a:extLst xmlns:a="http://schemas.openxmlformats.org/drawingml/2006/main">
               <a:ext uri="{FF2B5EF4-FFF2-40B4-BE49-F238E27FC236}">
-                <a16:creationId xmlns:a16="http://schemas.microsoft.com/office/drawing/2014/main" id="{C9434E7A-E2B2-419C-B8D1-B10702C36692}"/>
+                <a16:creationId xmlns:a16="http://schemas.microsoft.com/office/drawing/2014/main" id="{0FBFB9C4-B9F4-49E4-A83F-799F00D5BAC2}"/>
               </a:ext>
             </a:extLst>
           </p:cNvPr>
@@ -8365,7 +8878,7 @@
           <p:cNvPr id="5" name="step-num-2">
             <a:extLst xmlns:a="http://schemas.openxmlformats.org/drawingml/2006/main">
               <a:ext uri="{FF2B5EF4-FFF2-40B4-BE49-F238E27FC236}">
-                <a16:creationId xmlns:a16="http://schemas.microsoft.com/office/drawing/2014/main" id="{1B279942-AFE8-4C0E-9B83-870B2685A6D8}"/>
+                <a16:creationId xmlns:a16="http://schemas.microsoft.com/office/drawing/2014/main" id="{9044EDA1-06B8-4DA0-A818-2AD5ECF6A99F}"/>
               </a:ext>
             </a:extLst>
           </p:cNvPr>
@@ -8416,7 +8929,7 @@
           <p:cNvPr id="6" name="step-label-2">
             <a:extLst xmlns:a="http://schemas.openxmlformats.org/drawingml/2006/main">
               <a:ext uri="{FF2B5EF4-FFF2-40B4-BE49-F238E27FC236}">
-                <a16:creationId xmlns:a16="http://schemas.microsoft.com/office/drawing/2014/main" id="{3638FCE1-E803-4893-BAFA-DCE853242179}"/>
+                <a16:creationId xmlns:a16="http://schemas.microsoft.com/office/drawing/2014/main" id="{25057355-53BD-4929-9241-D62C95D75D50}"/>
               </a:ext>
             </a:extLst>
           </p:cNvPr>
@@ -8467,7 +8980,7 @@
           <p:cNvPr id="7" name="step-line-2">
             <a:extLst xmlns:a="http://schemas.openxmlformats.org/drawingml/2006/main">
               <a:ext uri="{FF2B5EF4-FFF2-40B4-BE49-F238E27FC236}">
-                <a16:creationId xmlns:a16="http://schemas.microsoft.com/office/drawing/2014/main" id="{C795AC5D-37C0-431F-A1B6-57800265C0CE}"/>
+                <a16:creationId xmlns:a16="http://schemas.microsoft.com/office/drawing/2014/main" id="{D896B3FF-46ED-411D-A606-3CCC6E319BD2}"/>
               </a:ext>
             </a:extLst>
           </p:cNvPr>
@@ -8498,7 +9011,7 @@
           <p:cNvPr id="8" name="step-num-3">
             <a:extLst xmlns:a="http://schemas.openxmlformats.org/drawingml/2006/main">
               <a:ext uri="{FF2B5EF4-FFF2-40B4-BE49-F238E27FC236}">
-                <a16:creationId xmlns:a16="http://schemas.microsoft.com/office/drawing/2014/main" id="{3DF031FC-097F-4E9C-84F3-9E9CA5993DB6}"/>
+                <a16:creationId xmlns:a16="http://schemas.microsoft.com/office/drawing/2014/main" id="{6F49A044-2BD3-4C5C-ABE5-0982AB50292A}"/>
               </a:ext>
             </a:extLst>
           </p:cNvPr>
@@ -8549,7 +9062,7 @@
           <p:cNvPr id="9" name="step-label-3">
             <a:extLst xmlns:a="http://schemas.openxmlformats.org/drawingml/2006/main">
               <a:ext uri="{FF2B5EF4-FFF2-40B4-BE49-F238E27FC236}">
-                <a16:creationId xmlns:a16="http://schemas.microsoft.com/office/drawing/2014/main" id="{F5C4DF74-4658-46B9-A65C-62D8BA86F3C0}"/>
+                <a16:creationId xmlns:a16="http://schemas.microsoft.com/office/drawing/2014/main" id="{030B4B76-DA2E-49B8-BDD3-5A189D868F38}"/>
               </a:ext>
             </a:extLst>
           </p:cNvPr>
@@ -8600,7 +9113,7 @@
           <p:cNvPr id="10" name="eyebrow">
             <a:extLst xmlns:a="http://schemas.openxmlformats.org/drawingml/2006/main">
               <a:ext uri="{FF2B5EF4-FFF2-40B4-BE49-F238E27FC236}">
-                <a16:creationId xmlns:a16="http://schemas.microsoft.com/office/drawing/2014/main" id="{A4BCD720-F781-4BEC-919E-49F78DC9C6FD}"/>
+                <a16:creationId xmlns:a16="http://schemas.microsoft.com/office/drawing/2014/main" id="{C559FDDC-F051-4ECE-9545-06748F79FC27}"/>
               </a:ext>
             </a:extLst>
           </p:cNvPr>
@@ -8648,10 +9161,69 @@
       </p:sp>
       <p:sp>
         <p:nvSpPr>
-          <p:cNvPr id="11" name="footer-rule">
-            <a:extLst xmlns:a="http://schemas.openxmlformats.org/drawingml/2006/main">
-              <a:ext uri="{FF2B5EF4-FFF2-40B4-BE49-F238E27FC236}">
-                <a16:creationId xmlns:a16="http://schemas.microsoft.com/office/drawing/2014/main" id="{4530A0FA-9F2A-4174-95A8-93B28276F26E}"/>
+          <p:cNvPr id="11" name="rescue-point-logo-background">
+            <a:extLst xmlns:a="http://schemas.openxmlformats.org/drawingml/2006/main">
+              <a:ext uri="{FF2B5EF4-FFF2-40B4-BE49-F238E27FC236}">
+                <a16:creationId xmlns:a16="http://schemas.microsoft.com/office/drawing/2014/main" id="{FB1CEFD0-E42B-493E-A419-6D10B02B25B5}"/>
+              </a:ext>
+            </a:extLst>
+          </p:cNvPr>
+          <p:cNvSpPr>
+            <a:spLocks xmlns:a="http://schemas.openxmlformats.org/drawingml/2006/main" noGrp="1"/>
+          </p:cNvSpPr>
+          <p:nvPr/>
+        </p:nvSpPr>
+        <p:spPr>
+          <a:xfrm xmlns:a="http://schemas.openxmlformats.org/drawingml/2006/main">
+            <a:off x="9772650" y="133350"/>
+            <a:ext cx="1733550" cy="457200"/>
+          </a:xfrm>
+          <a:prstGeom xmlns:a="http://schemas.openxmlformats.org/drawingml/2006/main" prst="roundRect">
+            <a:avLst>
+              <a:gd name="adj" fmla="val 16667"/>
+            </a:avLst>
+          </a:prstGeom>
+          <a:solidFill xmlns:a="http://schemas.openxmlformats.org/drawingml/2006/main">
+            <a:srgbClr val="06142E"/>
+          </a:solidFill>
+          <a:ln xmlns:a="http://schemas.openxmlformats.org/drawingml/2006/main" w="9525">
+            <a:solidFill>
+              <a:srgbClr val="1EC5FF">
+                <a:alpha val="33333"/>
+              </a:srgbClr>
+            </a:solidFill>
+            <a:prstDash val="solid"/>
+          </a:ln>
+        </p:spPr>
+      </p:sp>
+      <p:pic>
+        <p:nvPicPr>
+          <p:cNvPr id="29" name="" descr="Figura oficial da documentação dbt usada para explicar: O mesmo recurso afeta três decisões — 01."/>
+          <p:cNvPicPr>
+            <a:picLocks xmlns:a="http://schemas.openxmlformats.org/drawingml/2006/main" noChangeAspect="1"/>
+          </p:cNvPicPr>
+          <p:nvPr/>
+        </p:nvPicPr>
+        <p:blipFill>
+          <a:blip xmlns:r="http://schemas.openxmlformats.org/officeDocument/2006/relationships" xmlns:a="http://schemas.openxmlformats.org/drawingml/2006/main" r:embed="R2b95818b95a24f36"/>
+          <a:stretch xmlns:a="http://schemas.openxmlformats.org/drawingml/2006/main"/>
+        </p:blipFill>
+        <p:spPr>
+          <a:xfrm xmlns:a="http://schemas.openxmlformats.org/drawingml/2006/main">
+            <a:off x="9893718" y="209550"/>
+            <a:ext cx="1491414" cy="323850"/>
+          </a:xfrm>
+          <a:prstGeom xmlns:a="http://schemas.openxmlformats.org/drawingml/2006/main" prst="rect">
+            <a:avLst/>
+          </a:prstGeom>
+        </p:spPr>
+      </p:pic>
+      <p:sp>
+        <p:nvSpPr>
+          <p:cNvPr id="13" name="footer-rule">
+            <a:extLst xmlns:a="http://schemas.openxmlformats.org/drawingml/2006/main">
+              <a:ext uri="{FF2B5EF4-FFF2-40B4-BE49-F238E27FC236}">
+                <a16:creationId xmlns:a16="http://schemas.microsoft.com/office/drawing/2014/main" id="{DD9346C2-F760-4A96-B753-F45D0FA6CF72}"/>
               </a:ext>
             </a:extLst>
           </p:cNvPr>
@@ -8681,10 +9253,10 @@
       </p:sp>
       <p:sp>
         <p:nvSpPr>
-          <p:cNvPr id="12" name="footer">
-            <a:extLst xmlns:a="http://schemas.openxmlformats.org/drawingml/2006/main">
-              <a:ext uri="{FF2B5EF4-FFF2-40B4-BE49-F238E27FC236}">
-                <a16:creationId xmlns:a16="http://schemas.microsoft.com/office/drawing/2014/main" id="{ACCFBC57-3ADD-4E6A-9071-17286BFF09B3}"/>
+          <p:cNvPr id="14" name="footer">
+            <a:extLst xmlns:a="http://schemas.openxmlformats.org/drawingml/2006/main">
+              <a:ext uri="{FF2B5EF4-FFF2-40B4-BE49-F238E27FC236}">
+                <a16:creationId xmlns:a16="http://schemas.microsoft.com/office/drawing/2014/main" id="{3DD40DEE-CBF7-40DF-9672-C58D97499CA0}"/>
               </a:ext>
             </a:extLst>
           </p:cNvPr>
@@ -8736,10 +9308,10 @@
       </p:sp>
       <p:sp>
         <p:nvSpPr>
-          <p:cNvPr id="13" name="page-number">
-            <a:extLst xmlns:a="http://schemas.openxmlformats.org/drawingml/2006/main">
-              <a:ext uri="{FF2B5EF4-FFF2-40B4-BE49-F238E27FC236}">
-                <a16:creationId xmlns:a16="http://schemas.microsoft.com/office/drawing/2014/main" id="{3AB73DB1-98D5-4566-8297-F87CA1C0E095}"/>
+          <p:cNvPr id="15" name="page-number">
+            <a:extLst xmlns:a="http://schemas.openxmlformats.org/drawingml/2006/main">
+              <a:ext uri="{FF2B5EF4-FFF2-40B4-BE49-F238E27FC236}">
+                <a16:creationId xmlns:a16="http://schemas.microsoft.com/office/drawing/2014/main" id="{9A3FB169-85FB-4DC7-AA10-E3C3B1BCF2FB}"/>
               </a:ext>
             </a:extLst>
           </p:cNvPr>
@@ -8792,7 +9364,7 @@
     </p:spTree>
     <p:extLst>
       <p:ext uri="{BB962C8B-B14F-4D97-AF65-F5344CB8AC3E}">
-        <p14:creationId xmlns:p14="http://schemas.microsoft.com/office/powerpoint/2010/main" val="241671365"/>
+        <p14:creationId xmlns:p14="http://schemas.microsoft.com/office/powerpoint/2010/main" val="394466085"/>
       </p:ext>
     </p:extLst>
   </p:cSld>
@@ -8828,10 +9400,10 @@
       </p:grpSpPr>
       <p:sp>
         <p:nvSpPr>
-          <p:cNvPr id="9" name="case-number">
-            <a:extLst xmlns:a="http://schemas.openxmlformats.org/drawingml/2006/main">
-              <a:ext uri="{FF2B5EF4-FFF2-40B4-BE49-F238E27FC236}">
-                <a16:creationId xmlns:a16="http://schemas.microsoft.com/office/drawing/2014/main" id="{9E0C591B-8D3F-4C5E-81A8-30388F84B435}"/>
+          <p:cNvPr id="11" name="case-number">
+            <a:extLst xmlns:a="http://schemas.openxmlformats.org/drawingml/2006/main">
+              <a:ext uri="{FF2B5EF4-FFF2-40B4-BE49-F238E27FC236}">
+                <a16:creationId xmlns:a16="http://schemas.microsoft.com/office/drawing/2014/main" id="{DF7CCFFF-4592-4A42-B9C2-EEEEA2CB3A45}"/>
               </a:ext>
             </a:extLst>
           </p:cNvPr>
@@ -8882,7 +9454,7 @@
           <p:cNvPr id="2" name="case-label">
             <a:extLst xmlns:a="http://schemas.openxmlformats.org/drawingml/2006/main">
               <a:ext uri="{FF2B5EF4-FFF2-40B4-BE49-F238E27FC236}">
-                <a16:creationId xmlns:a16="http://schemas.microsoft.com/office/drawing/2014/main" id="{AEDFC73D-A8C9-4438-90F4-79278D40608E}"/>
+                <a16:creationId xmlns:a16="http://schemas.microsoft.com/office/drawing/2014/main" id="{6E5E0C7E-5A58-44DC-8C35-2BB889BB314B}"/>
               </a:ext>
             </a:extLst>
           </p:cNvPr>
@@ -8933,7 +9505,7 @@
           <p:cNvPr id="3" name="case-divider">
             <a:extLst xmlns:a="http://schemas.openxmlformats.org/drawingml/2006/main">
               <a:ext uri="{FF2B5EF4-FFF2-40B4-BE49-F238E27FC236}">
-                <a16:creationId xmlns:a16="http://schemas.microsoft.com/office/drawing/2014/main" id="{56D098AD-7A90-4EE2-B5C6-BEEDBCF10276}"/>
+                <a16:creationId xmlns:a16="http://schemas.microsoft.com/office/drawing/2014/main" id="{193E0580-97EC-42F7-AB10-B4382F7DFFAB}"/>
               </a:ext>
             </a:extLst>
           </p:cNvPr>
@@ -8966,7 +9538,7 @@
           <p:cNvPr id="4" name="case-caveat">
             <a:extLst xmlns:a="http://schemas.openxmlformats.org/drawingml/2006/main">
               <a:ext uri="{FF2B5EF4-FFF2-40B4-BE49-F238E27FC236}">
-                <a16:creationId xmlns:a16="http://schemas.microsoft.com/office/drawing/2014/main" id="{BFAF98FC-A6E6-456F-89C2-F7F6034A70A2}"/>
+                <a16:creationId xmlns:a16="http://schemas.microsoft.com/office/drawing/2014/main" id="{4554E9E0-725B-468D-871F-488F9C3607C9}"/>
               </a:ext>
             </a:extLst>
           </p:cNvPr>
@@ -9017,7 +9589,7 @@
           <p:cNvPr id="5" name="eyebrow">
             <a:extLst xmlns:a="http://schemas.openxmlformats.org/drawingml/2006/main">
               <a:ext uri="{FF2B5EF4-FFF2-40B4-BE49-F238E27FC236}">
-                <a16:creationId xmlns:a16="http://schemas.microsoft.com/office/drawing/2014/main" id="{9B8C349D-1171-4491-AC10-3D7DCDBCAC2B}"/>
+                <a16:creationId xmlns:a16="http://schemas.microsoft.com/office/drawing/2014/main" id="{D742C20E-DDEE-4AA7-8712-EE96F63C383A}"/>
               </a:ext>
             </a:extLst>
           </p:cNvPr>
@@ -9065,10 +9637,69 @@
       </p:sp>
       <p:sp>
         <p:nvSpPr>
-          <p:cNvPr id="6" name="footer-rule">
-            <a:extLst xmlns:a="http://schemas.openxmlformats.org/drawingml/2006/main">
-              <a:ext uri="{FF2B5EF4-FFF2-40B4-BE49-F238E27FC236}">
-                <a16:creationId xmlns:a16="http://schemas.microsoft.com/office/drawing/2014/main" id="{E205542B-36F6-4104-BEFC-B29F18C2492F}"/>
+          <p:cNvPr id="6" name="rescue-point-logo-background">
+            <a:extLst xmlns:a="http://schemas.openxmlformats.org/drawingml/2006/main">
+              <a:ext uri="{FF2B5EF4-FFF2-40B4-BE49-F238E27FC236}">
+                <a16:creationId xmlns:a16="http://schemas.microsoft.com/office/drawing/2014/main" id="{FC307F74-0132-4586-AE62-B762879AC133}"/>
+              </a:ext>
+            </a:extLst>
+          </p:cNvPr>
+          <p:cNvSpPr>
+            <a:spLocks xmlns:a="http://schemas.openxmlformats.org/drawingml/2006/main" noGrp="1"/>
+          </p:cNvSpPr>
+          <p:nvPr/>
+        </p:nvSpPr>
+        <p:spPr>
+          <a:xfrm xmlns:a="http://schemas.openxmlformats.org/drawingml/2006/main">
+            <a:off x="9772650" y="133350"/>
+            <a:ext cx="1733550" cy="457200"/>
+          </a:xfrm>
+          <a:prstGeom xmlns:a="http://schemas.openxmlformats.org/drawingml/2006/main" prst="roundRect">
+            <a:avLst>
+              <a:gd name="adj" fmla="val 16667"/>
+            </a:avLst>
+          </a:prstGeom>
+          <a:solidFill xmlns:a="http://schemas.openxmlformats.org/drawingml/2006/main">
+            <a:srgbClr val="06142E"/>
+          </a:solidFill>
+          <a:ln xmlns:a="http://schemas.openxmlformats.org/drawingml/2006/main" w="9525">
+            <a:solidFill>
+              <a:srgbClr val="1EC5FF">
+                <a:alpha val="33333"/>
+              </a:srgbClr>
+            </a:solidFill>
+            <a:prstDash val="solid"/>
+          </a:ln>
+        </p:spPr>
+      </p:sp>
+      <p:pic>
+        <p:nvPicPr>
+          <p:cNvPr id="19" name="" descr="Figura oficial da documentação dbt usada para explicar: interface governada — padrão reportado pela impact.com."/>
+          <p:cNvPicPr>
+            <a:picLocks xmlns:a="http://schemas.openxmlformats.org/drawingml/2006/main" noChangeAspect="1"/>
+          </p:cNvPicPr>
+          <p:nvPr/>
+        </p:nvPicPr>
+        <p:blipFill>
+          <a:blip xmlns:r="http://schemas.openxmlformats.org/officeDocument/2006/relationships" xmlns:a="http://schemas.openxmlformats.org/drawingml/2006/main" r:embed="Rf675239cc23d4381"/>
+          <a:stretch xmlns:a="http://schemas.openxmlformats.org/drawingml/2006/main"/>
+        </p:blipFill>
+        <p:spPr>
+          <a:xfrm xmlns:a="http://schemas.openxmlformats.org/drawingml/2006/main">
+            <a:off x="9893718" y="209550"/>
+            <a:ext cx="1491414" cy="323850"/>
+          </a:xfrm>
+          <a:prstGeom xmlns:a="http://schemas.openxmlformats.org/drawingml/2006/main" prst="rect">
+            <a:avLst/>
+          </a:prstGeom>
+        </p:spPr>
+      </p:pic>
+      <p:sp>
+        <p:nvSpPr>
+          <p:cNvPr id="8" name="footer-rule">
+            <a:extLst xmlns:a="http://schemas.openxmlformats.org/drawingml/2006/main">
+              <a:ext uri="{FF2B5EF4-FFF2-40B4-BE49-F238E27FC236}">
+                <a16:creationId xmlns:a16="http://schemas.microsoft.com/office/drawing/2014/main" id="{2CC55955-4D7D-4C41-8422-36A19A6B8C6E}"/>
               </a:ext>
             </a:extLst>
           </p:cNvPr>
@@ -9098,10 +9729,10 @@
       </p:sp>
       <p:sp>
         <p:nvSpPr>
-          <p:cNvPr id="7" name="footer">
-            <a:extLst xmlns:a="http://schemas.openxmlformats.org/drawingml/2006/main">
-              <a:ext uri="{FF2B5EF4-FFF2-40B4-BE49-F238E27FC236}">
-                <a16:creationId xmlns:a16="http://schemas.microsoft.com/office/drawing/2014/main" id="{2BF31869-CB6E-4BF0-B354-9E0ED19978AE}"/>
+          <p:cNvPr id="9" name="footer">
+            <a:extLst xmlns:a="http://schemas.openxmlformats.org/drawingml/2006/main">
+              <a:ext uri="{FF2B5EF4-FFF2-40B4-BE49-F238E27FC236}">
+                <a16:creationId xmlns:a16="http://schemas.microsoft.com/office/drawing/2014/main" id="{E76EC665-2ED6-4D31-8612-125DE5307667}"/>
               </a:ext>
             </a:extLst>
           </p:cNvPr>
@@ -9153,10 +9784,10 @@
       </p:sp>
       <p:sp>
         <p:nvSpPr>
-          <p:cNvPr id="8" name="page-number">
-            <a:extLst xmlns:a="http://schemas.openxmlformats.org/drawingml/2006/main">
-              <a:ext uri="{FF2B5EF4-FFF2-40B4-BE49-F238E27FC236}">
-                <a16:creationId xmlns:a16="http://schemas.microsoft.com/office/drawing/2014/main" id="{5003176F-0E15-4233-B8EF-65BC5EBA96C3}"/>
+          <p:cNvPr id="10" name="page-number">
+            <a:extLst xmlns:a="http://schemas.openxmlformats.org/drawingml/2006/main">
+              <a:ext uri="{FF2B5EF4-FFF2-40B4-BE49-F238E27FC236}">
+                <a16:creationId xmlns:a16="http://schemas.microsoft.com/office/drawing/2014/main" id="{6F58400A-463B-46E5-B288-8CD26CD4B5E7}"/>
               </a:ext>
             </a:extLst>
           </p:cNvPr>
@@ -9209,7 +9840,7 @@
     </p:spTree>
     <p:extLst>
       <p:ext uri="{BB962C8B-B14F-4D97-AF65-F5344CB8AC3E}">
-        <p14:creationId xmlns:p14="http://schemas.microsoft.com/office/powerpoint/2010/main" val="614962127"/>
+        <p14:creationId xmlns:p14="http://schemas.microsoft.com/office/powerpoint/2010/main" val="1830756484"/>
       </p:ext>
     </p:extLst>
   </p:cSld>
@@ -9237,10 +9868,10 @@
       </p:grpSpPr>
       <p:sp>
         <p:nvSpPr>
-          <p:cNvPr id="7" name="slide-title">
-            <a:extLst xmlns:a="http://schemas.openxmlformats.org/drawingml/2006/main">
-              <a:ext uri="{FF2B5EF4-FFF2-40B4-BE49-F238E27FC236}">
-                <a16:creationId xmlns:a16="http://schemas.microsoft.com/office/drawing/2014/main" id="{BCCD378F-CD9A-48D2-9761-5ED49994A3C0}"/>
+          <p:cNvPr id="9" name="slide-title">
+            <a:extLst xmlns:a="http://schemas.openxmlformats.org/drawingml/2006/main">
+              <a:ext uri="{FF2B5EF4-FFF2-40B4-BE49-F238E27FC236}">
+                <a16:creationId xmlns:a16="http://schemas.microsoft.com/office/drawing/2014/main" id="{10454038-2AB4-4FD4-8E82-78C37CACD39F}"/>
               </a:ext>
             </a:extLst>
           </p:cNvPr>
@@ -9291,7 +9922,7 @@
           <p:cNvPr id="2" name="bullets">
             <a:extLst xmlns:a="http://schemas.openxmlformats.org/drawingml/2006/main">
               <a:ext uri="{FF2B5EF4-FFF2-40B4-BE49-F238E27FC236}">
-                <a16:creationId xmlns:a16="http://schemas.microsoft.com/office/drawing/2014/main" id="{133E2B77-D2DA-4E99-9436-8A38EA1D5BF5}"/>
+                <a16:creationId xmlns:a16="http://schemas.microsoft.com/office/drawing/2014/main" id="{872F0E6F-69E4-416E-833C-B87F2F8F25F4}"/>
               </a:ext>
             </a:extLst>
           </p:cNvPr>
@@ -9378,7 +10009,7 @@
           <p:cNvPr id="3" name="eyebrow">
             <a:extLst xmlns:a="http://schemas.openxmlformats.org/drawingml/2006/main">
               <a:ext uri="{FF2B5EF4-FFF2-40B4-BE49-F238E27FC236}">
-                <a16:creationId xmlns:a16="http://schemas.microsoft.com/office/drawing/2014/main" id="{9C3F265E-1998-45F7-AA1B-5D46223D76FB}"/>
+                <a16:creationId xmlns:a16="http://schemas.microsoft.com/office/drawing/2014/main" id="{6ABB028A-A9EF-4DB5-8942-5E9E6EA11894}"/>
               </a:ext>
             </a:extLst>
           </p:cNvPr>
@@ -9426,10 +10057,69 @@
       </p:sp>
       <p:sp>
         <p:nvSpPr>
-          <p:cNvPr id="4" name="footer-rule">
-            <a:extLst xmlns:a="http://schemas.openxmlformats.org/drawingml/2006/main">
-              <a:ext uri="{FF2B5EF4-FFF2-40B4-BE49-F238E27FC236}">
-                <a16:creationId xmlns:a16="http://schemas.microsoft.com/office/drawing/2014/main" id="{9FF4155A-999D-4569-B65F-7F189BF95D74}"/>
+          <p:cNvPr id="4" name="rescue-point-logo-background">
+            <a:extLst xmlns:a="http://schemas.openxmlformats.org/drawingml/2006/main">
+              <a:ext uri="{FF2B5EF4-FFF2-40B4-BE49-F238E27FC236}">
+                <a16:creationId xmlns:a16="http://schemas.microsoft.com/office/drawing/2014/main" id="{13829695-7CF9-454E-96D1-94587EFDC8C8}"/>
+              </a:ext>
+            </a:extLst>
+          </p:cNvPr>
+          <p:cNvSpPr>
+            <a:spLocks xmlns:a="http://schemas.openxmlformats.org/drawingml/2006/main" noGrp="1"/>
+          </p:cNvSpPr>
+          <p:nvPr/>
+        </p:nvSpPr>
+        <p:spPr>
+          <a:xfrm xmlns:a="http://schemas.openxmlformats.org/drawingml/2006/main">
+            <a:off x="9772650" y="133350"/>
+            <a:ext cx="1733550" cy="457200"/>
+          </a:xfrm>
+          <a:prstGeom xmlns:a="http://schemas.openxmlformats.org/drawingml/2006/main" prst="roundRect">
+            <a:avLst>
+              <a:gd name="adj" fmla="val 16667"/>
+            </a:avLst>
+          </a:prstGeom>
+          <a:solidFill xmlns:a="http://schemas.openxmlformats.org/drawingml/2006/main">
+            <a:srgbClr val="06142E"/>
+          </a:solidFill>
+          <a:ln xmlns:a="http://schemas.openxmlformats.org/drawingml/2006/main" w="9525">
+            <a:solidFill>
+              <a:srgbClr val="1EC5FF">
+                <a:alpha val="33333"/>
+              </a:srgbClr>
+            </a:solidFill>
+            <a:prstDash val="solid"/>
+          </a:ln>
+        </p:spPr>
+      </p:sp>
+      <p:pic>
+        <p:nvPicPr>
+          <p:cNvPr id="15" name="" descr="Figura oficial da documentação dbt usada para explicar: Limitações que precisam permanecer visíveis — • MCP não corrige metadata ruim."/>
+          <p:cNvPicPr>
+            <a:picLocks xmlns:a="http://schemas.openxmlformats.org/drawingml/2006/main" noChangeAspect="1"/>
+          </p:cNvPicPr>
+          <p:nvPr/>
+        </p:nvPicPr>
+        <p:blipFill>
+          <a:blip xmlns:r="http://schemas.openxmlformats.org/officeDocument/2006/relationships" xmlns:a="http://schemas.openxmlformats.org/drawingml/2006/main" r:embed="R8c5685ed23554014"/>
+          <a:stretch xmlns:a="http://schemas.openxmlformats.org/drawingml/2006/main"/>
+        </p:blipFill>
+        <p:spPr>
+          <a:xfrm xmlns:a="http://schemas.openxmlformats.org/drawingml/2006/main">
+            <a:off x="9893718" y="209550"/>
+            <a:ext cx="1491414" cy="323850"/>
+          </a:xfrm>
+          <a:prstGeom xmlns:a="http://schemas.openxmlformats.org/drawingml/2006/main" prst="rect">
+            <a:avLst/>
+          </a:prstGeom>
+        </p:spPr>
+      </p:pic>
+      <p:sp>
+        <p:nvSpPr>
+          <p:cNvPr id="6" name="footer-rule">
+            <a:extLst xmlns:a="http://schemas.openxmlformats.org/drawingml/2006/main">
+              <a:ext uri="{FF2B5EF4-FFF2-40B4-BE49-F238E27FC236}">
+                <a16:creationId xmlns:a16="http://schemas.microsoft.com/office/drawing/2014/main" id="{675714CE-17A2-4626-96EA-A33BC2665A22}"/>
               </a:ext>
             </a:extLst>
           </p:cNvPr>
@@ -9459,10 +10149,10 @@
       </p:sp>
       <p:sp>
         <p:nvSpPr>
-          <p:cNvPr id="5" name="footer">
-            <a:extLst xmlns:a="http://schemas.openxmlformats.org/drawingml/2006/main">
-              <a:ext uri="{FF2B5EF4-FFF2-40B4-BE49-F238E27FC236}">
-                <a16:creationId xmlns:a16="http://schemas.microsoft.com/office/drawing/2014/main" id="{FDB55590-628F-40D8-97DA-2497DDEA8D13}"/>
+          <p:cNvPr id="7" name="footer">
+            <a:extLst xmlns:a="http://schemas.openxmlformats.org/drawingml/2006/main">
+              <a:ext uri="{FF2B5EF4-FFF2-40B4-BE49-F238E27FC236}">
+                <a16:creationId xmlns:a16="http://schemas.microsoft.com/office/drawing/2014/main" id="{496D841A-743C-4CD1-9D15-FD56A2A7E8D6}"/>
               </a:ext>
             </a:extLst>
           </p:cNvPr>
@@ -9514,10 +10204,10 @@
       </p:sp>
       <p:sp>
         <p:nvSpPr>
-          <p:cNvPr id="6" name="page-number">
-            <a:extLst xmlns:a="http://schemas.openxmlformats.org/drawingml/2006/main">
-              <a:ext uri="{FF2B5EF4-FFF2-40B4-BE49-F238E27FC236}">
-                <a16:creationId xmlns:a16="http://schemas.microsoft.com/office/drawing/2014/main" id="{C77D5665-EBEB-498D-A558-F0453A57587E}"/>
+          <p:cNvPr id="8" name="page-number">
+            <a:extLst xmlns:a="http://schemas.openxmlformats.org/drawingml/2006/main">
+              <a:ext uri="{FF2B5EF4-FFF2-40B4-BE49-F238E27FC236}">
+                <a16:creationId xmlns:a16="http://schemas.microsoft.com/office/drawing/2014/main" id="{3628D02B-7CEA-4988-B7B4-F6C7741FF6DB}"/>
               </a:ext>
             </a:extLst>
           </p:cNvPr>
@@ -9570,7 +10260,7 @@
     </p:spTree>
     <p:extLst>
       <p:ext uri="{BB962C8B-B14F-4D97-AF65-F5344CB8AC3E}">
-        <p14:creationId xmlns:p14="http://schemas.microsoft.com/office/powerpoint/2010/main" val="1821035915"/>
+        <p14:creationId xmlns:p14="http://schemas.microsoft.com/office/powerpoint/2010/main" val="957377926"/>
       </p:ext>
     </p:extLst>
   </p:cSld>
@@ -9606,10 +10296,10 @@
       </p:grpSpPr>
       <p:sp>
         <p:nvSpPr>
-          <p:cNvPr id="10" name="radar-label">
-            <a:extLst xmlns:a="http://schemas.openxmlformats.org/drawingml/2006/main">
-              <a:ext uri="{FF2B5EF4-FFF2-40B4-BE49-F238E27FC236}">
-                <a16:creationId xmlns:a16="http://schemas.microsoft.com/office/drawing/2014/main" id="{88303ED3-8173-492E-AA5E-194F0F94BEC5}"/>
+          <p:cNvPr id="12" name="radar-label">
+            <a:extLst xmlns:a="http://schemas.openxmlformats.org/drawingml/2006/main">
+              <a:ext uri="{FF2B5EF4-FFF2-40B4-BE49-F238E27FC236}">
+                <a16:creationId xmlns:a16="http://schemas.microsoft.com/office/drawing/2014/main" id="{74B05E0A-721C-47EE-8AB1-230505F40714}"/>
               </a:ext>
             </a:extLst>
           </p:cNvPr>
@@ -9660,7 +10350,7 @@
           <p:cNvPr id="2" name="radar-text">
             <a:extLst xmlns:a="http://schemas.openxmlformats.org/drawingml/2006/main">
               <a:ext uri="{FF2B5EF4-FFF2-40B4-BE49-F238E27FC236}">
-                <a16:creationId xmlns:a16="http://schemas.microsoft.com/office/drawing/2014/main" id="{6745250D-2799-4594-8030-D27BBB68E5EA}"/>
+                <a16:creationId xmlns:a16="http://schemas.microsoft.com/office/drawing/2014/main" id="{7217E439-39D8-46A2-8075-6801A41FB780}"/>
               </a:ext>
             </a:extLst>
           </p:cNvPr>
@@ -9711,7 +10401,7 @@
           <p:cNvPr id="3" name="radar-rule">
             <a:extLst xmlns:a="http://schemas.openxmlformats.org/drawingml/2006/main">
               <a:ext uri="{FF2B5EF4-FFF2-40B4-BE49-F238E27FC236}">
-                <a16:creationId xmlns:a16="http://schemas.microsoft.com/office/drawing/2014/main" id="{2E950566-1580-4454-AEF5-BB3C5A523DF5}"/>
+                <a16:creationId xmlns:a16="http://schemas.microsoft.com/office/drawing/2014/main" id="{623B01D3-B469-44CE-B3BC-8FA43FD6D289}"/>
               </a:ext>
             </a:extLst>
           </p:cNvPr>
@@ -9762,7 +10452,7 @@
           <p:cNvPr id="4" name="ambient-glow">
             <a:extLst xmlns:a="http://schemas.openxmlformats.org/drawingml/2006/main">
               <a:ext uri="{FF2B5EF4-FFF2-40B4-BE49-F238E27FC236}">
-                <a16:creationId xmlns:a16="http://schemas.microsoft.com/office/drawing/2014/main" id="{E3B69562-90D9-42FB-BF5E-154A9160946E}"/>
+                <a16:creationId xmlns:a16="http://schemas.microsoft.com/office/drawing/2014/main" id="{78983E34-BF82-4270-9960-FA4ACDB29FC7}"/>
               </a:ext>
             </a:extLst>
           </p:cNvPr>
@@ -9799,7 +10489,7 @@
           <p:cNvPr id="5" name="ambient-core">
             <a:extLst xmlns:a="http://schemas.openxmlformats.org/drawingml/2006/main">
               <a:ext uri="{FF2B5EF4-FFF2-40B4-BE49-F238E27FC236}">
-                <a16:creationId xmlns:a16="http://schemas.microsoft.com/office/drawing/2014/main" id="{16FDD075-976C-4EB0-8D3C-496389DA6293}"/>
+                <a16:creationId xmlns:a16="http://schemas.microsoft.com/office/drawing/2014/main" id="{C3BEC4C1-ECA7-4C10-B4C4-4D4B560F0966}"/>
               </a:ext>
             </a:extLst>
           </p:cNvPr>
@@ -9836,7 +10526,7 @@
           <p:cNvPr id="6" name="eyebrow">
             <a:extLst xmlns:a="http://schemas.openxmlformats.org/drawingml/2006/main">
               <a:ext uri="{FF2B5EF4-FFF2-40B4-BE49-F238E27FC236}">
-                <a16:creationId xmlns:a16="http://schemas.microsoft.com/office/drawing/2014/main" id="{A8900577-D4E1-4803-8CF7-AD45DD202FAB}"/>
+                <a16:creationId xmlns:a16="http://schemas.microsoft.com/office/drawing/2014/main" id="{227D73C4-283A-429D-A10B-EAAB52D8F09A}"/>
               </a:ext>
             </a:extLst>
           </p:cNvPr>
@@ -9884,10 +10574,69 @@
       </p:sp>
       <p:sp>
         <p:nvSpPr>
-          <p:cNvPr id="7" name="footer-rule">
-            <a:extLst xmlns:a="http://schemas.openxmlformats.org/drawingml/2006/main">
-              <a:ext uri="{FF2B5EF4-FFF2-40B4-BE49-F238E27FC236}">
-                <a16:creationId xmlns:a16="http://schemas.microsoft.com/office/drawing/2014/main" id="{4861259F-5FAA-46D8-8885-FE05856D4260}"/>
+          <p:cNvPr id="7" name="rescue-point-logo-background">
+            <a:extLst xmlns:a="http://schemas.openxmlformats.org/drawingml/2006/main">
+              <a:ext uri="{FF2B5EF4-FFF2-40B4-BE49-F238E27FC236}">
+                <a16:creationId xmlns:a16="http://schemas.microsoft.com/office/drawing/2014/main" id="{BCA6FC7E-2E69-442A-9E0F-6C7064E2B0BC}"/>
+              </a:ext>
+            </a:extLst>
+          </p:cNvPr>
+          <p:cNvSpPr>
+            <a:spLocks xmlns:a="http://schemas.openxmlformats.org/drawingml/2006/main" noGrp="1"/>
+          </p:cNvSpPr>
+          <p:nvPr/>
+        </p:nvSpPr>
+        <p:spPr>
+          <a:xfrm xmlns:a="http://schemas.openxmlformats.org/drawingml/2006/main">
+            <a:off x="9772650" y="133350"/>
+            <a:ext cx="1733550" cy="457200"/>
+          </a:xfrm>
+          <a:prstGeom xmlns:a="http://schemas.openxmlformats.org/drawingml/2006/main" prst="roundRect">
+            <a:avLst>
+              <a:gd name="adj" fmla="val 16667"/>
+            </a:avLst>
+          </a:prstGeom>
+          <a:solidFill xmlns:a="http://schemas.openxmlformats.org/drawingml/2006/main">
+            <a:srgbClr val="06142E"/>
+          </a:solidFill>
+          <a:ln xmlns:a="http://schemas.openxmlformats.org/drawingml/2006/main" w="9525">
+            <a:solidFill>
+              <a:srgbClr val="1EC5FF">
+                <a:alpha val="33333"/>
+              </a:srgbClr>
+            </a:solidFill>
+            <a:prstDash val="solid"/>
+          </a:ln>
+        </p:spPr>
+      </p:sp>
+      <p:pic>
+        <p:nvPicPr>
+          <p:cNvPr id="21" name="" descr="Figura oficial da documentação dbt usada para explicar: RADAR — Tools gerenciadas e SQL entram somente na temporada de plataforma.."/>
+          <p:cNvPicPr>
+            <a:picLocks xmlns:a="http://schemas.openxmlformats.org/drawingml/2006/main" noChangeAspect="1"/>
+          </p:cNvPicPr>
+          <p:nvPr/>
+        </p:nvPicPr>
+        <p:blipFill>
+          <a:blip xmlns:r="http://schemas.openxmlformats.org/officeDocument/2006/relationships" xmlns:a="http://schemas.openxmlformats.org/drawingml/2006/main" r:embed="R475dbbe4013f4ec4"/>
+          <a:stretch xmlns:a="http://schemas.openxmlformats.org/drawingml/2006/main"/>
+        </p:blipFill>
+        <p:spPr>
+          <a:xfrm xmlns:a="http://schemas.openxmlformats.org/drawingml/2006/main">
+            <a:off x="9893718" y="209550"/>
+            <a:ext cx="1491414" cy="323850"/>
+          </a:xfrm>
+          <a:prstGeom xmlns:a="http://schemas.openxmlformats.org/drawingml/2006/main" prst="rect">
+            <a:avLst/>
+          </a:prstGeom>
+        </p:spPr>
+      </p:pic>
+      <p:sp>
+        <p:nvSpPr>
+          <p:cNvPr id="9" name="footer-rule">
+            <a:extLst xmlns:a="http://schemas.openxmlformats.org/drawingml/2006/main">
+              <a:ext uri="{FF2B5EF4-FFF2-40B4-BE49-F238E27FC236}">
+                <a16:creationId xmlns:a16="http://schemas.microsoft.com/office/drawing/2014/main" id="{5651B3C8-FAEA-440E-A54C-1FB02243C1DB}"/>
               </a:ext>
             </a:extLst>
           </p:cNvPr>
@@ -9917,10 +10666,10 @@
       </p:sp>
       <p:sp>
         <p:nvSpPr>
-          <p:cNvPr id="8" name="footer">
-            <a:extLst xmlns:a="http://schemas.openxmlformats.org/drawingml/2006/main">
-              <a:ext uri="{FF2B5EF4-FFF2-40B4-BE49-F238E27FC236}">
-                <a16:creationId xmlns:a16="http://schemas.microsoft.com/office/drawing/2014/main" id="{1C6EEF9A-C79B-4BB7-A7C8-C7D130E5037D}"/>
+          <p:cNvPr id="10" name="footer">
+            <a:extLst xmlns:a="http://schemas.openxmlformats.org/drawingml/2006/main">
+              <a:ext uri="{FF2B5EF4-FFF2-40B4-BE49-F238E27FC236}">
+                <a16:creationId xmlns:a16="http://schemas.microsoft.com/office/drawing/2014/main" id="{7E160BB5-417B-4EBB-B3AF-9571B24A7EF4}"/>
               </a:ext>
             </a:extLst>
           </p:cNvPr>
@@ -9972,10 +10721,10 @@
       </p:sp>
       <p:sp>
         <p:nvSpPr>
-          <p:cNvPr id="9" name="page-number">
-            <a:extLst xmlns:a="http://schemas.openxmlformats.org/drawingml/2006/main">
-              <a:ext uri="{FF2B5EF4-FFF2-40B4-BE49-F238E27FC236}">
-                <a16:creationId xmlns:a16="http://schemas.microsoft.com/office/drawing/2014/main" id="{83AF9975-E6DB-4547-8E1A-F141A3EBF9E7}"/>
+          <p:cNvPr id="11" name="page-number">
+            <a:extLst xmlns:a="http://schemas.openxmlformats.org/drawingml/2006/main">
+              <a:ext uri="{FF2B5EF4-FFF2-40B4-BE49-F238E27FC236}">
+                <a16:creationId xmlns:a16="http://schemas.microsoft.com/office/drawing/2014/main" id="{AD003A29-1F50-43A7-8402-D53EAAD94756}"/>
               </a:ext>
             </a:extLst>
           </p:cNvPr>
@@ -10028,7 +10777,7 @@
     </p:spTree>
     <p:extLst>
       <p:ext uri="{BB962C8B-B14F-4D97-AF65-F5344CB8AC3E}">
-        <p14:creationId xmlns:p14="http://schemas.microsoft.com/office/powerpoint/2010/main" val="365835451"/>
+        <p14:creationId xmlns:p14="http://schemas.microsoft.com/office/powerpoint/2010/main" val="208560816"/>
       </p:ext>
     </p:extLst>
   </p:cSld>
@@ -10056,10 +10805,10 @@
       </p:grpSpPr>
       <p:sp>
         <p:nvSpPr>
-          <p:cNvPr id="10" name="hook">
-            <a:extLst xmlns:a="http://schemas.openxmlformats.org/drawingml/2006/main">
-              <a:ext uri="{FF2B5EF4-FFF2-40B4-BE49-F238E27FC236}">
-                <a16:creationId xmlns:a16="http://schemas.microsoft.com/office/drawing/2014/main" id="{A2B13042-35BE-404C-9DFE-95248E7C345D}"/>
+          <p:cNvPr id="12" name="hook">
+            <a:extLst xmlns:a="http://schemas.openxmlformats.org/drawingml/2006/main">
+              <a:ext uri="{FF2B5EF4-FFF2-40B4-BE49-F238E27FC236}">
+                <a16:creationId xmlns:a16="http://schemas.microsoft.com/office/drawing/2014/main" id="{7AE3CDAF-BC5D-4334-909D-F16F03DF7871}"/>
               </a:ext>
             </a:extLst>
           </p:cNvPr>
@@ -10110,7 +10859,7 @@
           <p:cNvPr id="2" name="hook-rule">
             <a:extLst xmlns:a="http://schemas.openxmlformats.org/drawingml/2006/main">
               <a:ext uri="{FF2B5EF4-FFF2-40B4-BE49-F238E27FC236}">
-                <a16:creationId xmlns:a16="http://schemas.microsoft.com/office/drawing/2014/main" id="{23877674-CA6D-41E7-BCE1-47EAD2301B42}"/>
+                <a16:creationId xmlns:a16="http://schemas.microsoft.com/office/drawing/2014/main" id="{5F2A0C97-BA26-4E7C-B2E7-164083CAB3DA}"/>
               </a:ext>
             </a:extLst>
           </p:cNvPr>
@@ -10141,7 +10890,7 @@
           <p:cNvPr id="3" name="hook-label">
             <a:extLst xmlns:a="http://schemas.openxmlformats.org/drawingml/2006/main">
               <a:ext uri="{FF2B5EF4-FFF2-40B4-BE49-F238E27FC236}">
-                <a16:creationId xmlns:a16="http://schemas.microsoft.com/office/drawing/2014/main" id="{5CD119B9-DABF-4A52-98EE-399F9E51B54E}"/>
+                <a16:creationId xmlns:a16="http://schemas.microsoft.com/office/drawing/2014/main" id="{44B7151F-4A4A-4DC7-B9A1-16BF2FF3350B}"/>
               </a:ext>
             </a:extLst>
           </p:cNvPr>
@@ -10192,7 +10941,7 @@
           <p:cNvPr id="4" name="diagram-surface">
             <a:extLst xmlns:a="http://schemas.openxmlformats.org/drawingml/2006/main">
               <a:ext uri="{FF2B5EF4-FFF2-40B4-BE49-F238E27FC236}">
-                <a16:creationId xmlns:a16="http://schemas.microsoft.com/office/drawing/2014/main" id="{B6EB6137-8AC9-4844-94C8-A8DD637BBDE9}"/>
+                <a16:creationId xmlns:a16="http://schemas.microsoft.com/office/drawing/2014/main" id="{F2EA78FA-CF77-4152-8E59-D3C05917C437}"/>
               </a:ext>
             </a:extLst>
           </p:cNvPr>
@@ -10224,14 +10973,14 @@
       </p:sp>
       <p:pic>
         <p:nvPicPr>
-          <p:cNvPr id="16" name="" descr="Diagrama didático autoral que apresenta: MCP não torna o agente confiável; torna a fronteira de contexto explícita. — A pergunta que guia a aula."/>
+          <p:cNvPr id="19" name="" descr="Diagrama didático autoral que apresenta: MCP não torna o agente confiável; torna a fronteira de contexto explícita. — A pergunta que guia a aula."/>
           <p:cNvPicPr>
             <a:picLocks xmlns:a="http://schemas.openxmlformats.org/drawingml/2006/main" noChangeAspect="1"/>
           </p:cNvPicPr>
           <p:nvPr/>
         </p:nvPicPr>
         <p:blipFill>
-          <a:blip xmlns:r="http://schemas.openxmlformats.org/officeDocument/2006/relationships" xmlns:a="http://schemas.openxmlformats.org/drawingml/2006/main" r:embed="Rfda5ddb0ef584e81"/>
+          <a:blip xmlns:r="http://schemas.openxmlformats.org/officeDocument/2006/relationships" xmlns:a="http://schemas.openxmlformats.org/drawingml/2006/main" r:embed="Ra6a97da7d55646a0"/>
           <a:stretch xmlns:a="http://schemas.openxmlformats.org/drawingml/2006/main"/>
         </p:blipFill>
         <p:spPr>
@@ -10249,7 +10998,7 @@
           <p:cNvPr id="6" name="eyebrow">
             <a:extLst xmlns:a="http://schemas.openxmlformats.org/drawingml/2006/main">
               <a:ext uri="{FF2B5EF4-FFF2-40B4-BE49-F238E27FC236}">
-                <a16:creationId xmlns:a16="http://schemas.microsoft.com/office/drawing/2014/main" id="{2D1DF55A-5728-44FB-9E19-8E124B71505E}"/>
+                <a16:creationId xmlns:a16="http://schemas.microsoft.com/office/drawing/2014/main" id="{0787EE2E-0474-4381-9D6B-BADE6A71BCF2}"/>
               </a:ext>
             </a:extLst>
           </p:cNvPr>
@@ -10297,10 +11046,69 @@
       </p:sp>
       <p:sp>
         <p:nvSpPr>
-          <p:cNvPr id="7" name="footer-rule">
-            <a:extLst xmlns:a="http://schemas.openxmlformats.org/drawingml/2006/main">
-              <a:ext uri="{FF2B5EF4-FFF2-40B4-BE49-F238E27FC236}">
-                <a16:creationId xmlns:a16="http://schemas.microsoft.com/office/drawing/2014/main" id="{C24F414D-5100-46AD-9336-249CE28D3219}"/>
+          <p:cNvPr id="7" name="rescue-point-logo-background">
+            <a:extLst xmlns:a="http://schemas.openxmlformats.org/drawingml/2006/main">
+              <a:ext uri="{FF2B5EF4-FFF2-40B4-BE49-F238E27FC236}">
+                <a16:creationId xmlns:a16="http://schemas.microsoft.com/office/drawing/2014/main" id="{D88A0986-CFA6-46CD-8C90-C81CD8573E83}"/>
+              </a:ext>
+            </a:extLst>
+          </p:cNvPr>
+          <p:cNvSpPr>
+            <a:spLocks xmlns:a="http://schemas.openxmlformats.org/drawingml/2006/main" noGrp="1"/>
+          </p:cNvSpPr>
+          <p:nvPr/>
+        </p:nvSpPr>
+        <p:spPr>
+          <a:xfrm xmlns:a="http://schemas.openxmlformats.org/drawingml/2006/main">
+            <a:off x="9772650" y="133350"/>
+            <a:ext cx="1733550" cy="457200"/>
+          </a:xfrm>
+          <a:prstGeom xmlns:a="http://schemas.openxmlformats.org/drawingml/2006/main" prst="roundRect">
+            <a:avLst>
+              <a:gd name="adj" fmla="val 16667"/>
+            </a:avLst>
+          </a:prstGeom>
+          <a:solidFill xmlns:a="http://schemas.openxmlformats.org/drawingml/2006/main">
+            <a:srgbClr val="06142E"/>
+          </a:solidFill>
+          <a:ln xmlns:a="http://schemas.openxmlformats.org/drawingml/2006/main" w="9525">
+            <a:solidFill>
+              <a:srgbClr val="1EC5FF">
+                <a:alpha val="33333"/>
+              </a:srgbClr>
+            </a:solidFill>
+            <a:prstDash val="solid"/>
+          </a:ln>
+        </p:spPr>
+      </p:sp>
+      <p:pic>
+        <p:nvPicPr>
+          <p:cNvPr id="22" name="" descr="Diagrama didático autoral que apresenta: MCP não torna o agente confiável; torna a fronteira de contexto explícita. — A pergunta que guia a aula."/>
+          <p:cNvPicPr>
+            <a:picLocks xmlns:a="http://schemas.openxmlformats.org/drawingml/2006/main" noChangeAspect="1"/>
+          </p:cNvPicPr>
+          <p:nvPr/>
+        </p:nvPicPr>
+        <p:blipFill>
+          <a:blip xmlns:r="http://schemas.openxmlformats.org/officeDocument/2006/relationships" xmlns:a="http://schemas.openxmlformats.org/drawingml/2006/main" r:embed="R521ff210864546fc"/>
+          <a:stretch xmlns:a="http://schemas.openxmlformats.org/drawingml/2006/main"/>
+        </p:blipFill>
+        <p:spPr>
+          <a:xfrm xmlns:a="http://schemas.openxmlformats.org/drawingml/2006/main">
+            <a:off x="9893718" y="209550"/>
+            <a:ext cx="1491414" cy="323850"/>
+          </a:xfrm>
+          <a:prstGeom xmlns:a="http://schemas.openxmlformats.org/drawingml/2006/main" prst="rect">
+            <a:avLst/>
+          </a:prstGeom>
+        </p:spPr>
+      </p:pic>
+      <p:sp>
+        <p:nvSpPr>
+          <p:cNvPr id="9" name="footer-rule">
+            <a:extLst xmlns:a="http://schemas.openxmlformats.org/drawingml/2006/main">
+              <a:ext uri="{FF2B5EF4-FFF2-40B4-BE49-F238E27FC236}">
+                <a16:creationId xmlns:a16="http://schemas.microsoft.com/office/drawing/2014/main" id="{61115B64-FAF2-41CA-A79F-7D741430476B}"/>
               </a:ext>
             </a:extLst>
           </p:cNvPr>
@@ -10330,10 +11138,10 @@
       </p:sp>
       <p:sp>
         <p:nvSpPr>
-          <p:cNvPr id="8" name="footer">
-            <a:extLst xmlns:a="http://schemas.openxmlformats.org/drawingml/2006/main">
-              <a:ext uri="{FF2B5EF4-FFF2-40B4-BE49-F238E27FC236}">
-                <a16:creationId xmlns:a16="http://schemas.microsoft.com/office/drawing/2014/main" id="{FA640D06-D292-4310-AB14-9A3EF7118497}"/>
+          <p:cNvPr id="10" name="footer">
+            <a:extLst xmlns:a="http://schemas.openxmlformats.org/drawingml/2006/main">
+              <a:ext uri="{FF2B5EF4-FFF2-40B4-BE49-F238E27FC236}">
+                <a16:creationId xmlns:a16="http://schemas.microsoft.com/office/drawing/2014/main" id="{543BE037-BAB5-4D7C-A73E-7C430ECB0125}"/>
               </a:ext>
             </a:extLst>
           </p:cNvPr>
@@ -10385,10 +11193,10 @@
       </p:sp>
       <p:sp>
         <p:nvSpPr>
-          <p:cNvPr id="9" name="page-number">
-            <a:extLst xmlns:a="http://schemas.openxmlformats.org/drawingml/2006/main">
-              <a:ext uri="{FF2B5EF4-FFF2-40B4-BE49-F238E27FC236}">
-                <a16:creationId xmlns:a16="http://schemas.microsoft.com/office/drawing/2014/main" id="{53FDC8C5-9D46-4D24-BCE0-45A6DD43034E}"/>
+          <p:cNvPr id="11" name="page-number">
+            <a:extLst xmlns:a="http://schemas.openxmlformats.org/drawingml/2006/main">
+              <a:ext uri="{FF2B5EF4-FFF2-40B4-BE49-F238E27FC236}">
+                <a16:creationId xmlns:a16="http://schemas.microsoft.com/office/drawing/2014/main" id="{D6DAD140-DC1C-4EFA-81BB-386A217C805F}"/>
               </a:ext>
             </a:extLst>
           </p:cNvPr>
@@ -10441,7 +11249,7 @@
     </p:spTree>
     <p:extLst>
       <p:ext uri="{BB962C8B-B14F-4D97-AF65-F5344CB8AC3E}">
-        <p14:creationId xmlns:p14="http://schemas.microsoft.com/office/powerpoint/2010/main" val="781200210"/>
+        <p14:creationId xmlns:p14="http://schemas.microsoft.com/office/powerpoint/2010/main" val="846357844"/>
       </p:ext>
     </p:extLst>
   </p:cSld>
@@ -10469,10 +11277,10 @@
       </p:grpSpPr>
       <p:sp>
         <p:nvSpPr>
-          <p:cNvPr id="8" name="cta-label">
-            <a:extLst xmlns:a="http://schemas.openxmlformats.org/drawingml/2006/main">
-              <a:ext uri="{FF2B5EF4-FFF2-40B4-BE49-F238E27FC236}">
-                <a16:creationId xmlns:a16="http://schemas.microsoft.com/office/drawing/2014/main" id="{05012C23-23F3-4972-9E3E-76368296A863}"/>
+          <p:cNvPr id="10" name="cta-label">
+            <a:extLst xmlns:a="http://schemas.openxmlformats.org/drawingml/2006/main">
+              <a:ext uri="{FF2B5EF4-FFF2-40B4-BE49-F238E27FC236}">
+                <a16:creationId xmlns:a16="http://schemas.microsoft.com/office/drawing/2014/main" id="{EBD5FCD3-0114-4EAD-82CD-01FF5835E82E}"/>
               </a:ext>
             </a:extLst>
           </p:cNvPr>
@@ -10523,7 +11331,7 @@
           <p:cNvPr id="2" name="cta">
             <a:extLst xmlns:a="http://schemas.openxmlformats.org/drawingml/2006/main">
               <a:ext uri="{FF2B5EF4-FFF2-40B4-BE49-F238E27FC236}">
-                <a16:creationId xmlns:a16="http://schemas.microsoft.com/office/drawing/2014/main" id="{40D5AE62-5E77-483A-9508-B8723C8E80C0}"/>
+                <a16:creationId xmlns:a16="http://schemas.microsoft.com/office/drawing/2014/main" id="{0574A3C6-8E5C-42BB-A2DC-F80329A504AB}"/>
               </a:ext>
             </a:extLst>
           </p:cNvPr>
@@ -10574,7 +11382,7 @@
           <p:cNvPr id="3" name="cta-meta">
             <a:extLst xmlns:a="http://schemas.openxmlformats.org/drawingml/2006/main">
               <a:ext uri="{FF2B5EF4-FFF2-40B4-BE49-F238E27FC236}">
-                <a16:creationId xmlns:a16="http://schemas.microsoft.com/office/drawing/2014/main" id="{25BC8B45-4E69-4F74-ABA8-7C484988C80B}"/>
+                <a16:creationId xmlns:a16="http://schemas.microsoft.com/office/drawing/2014/main" id="{1C15E6F3-2F4F-4F3F-BBB6-735CFDFEE72C}"/>
               </a:ext>
             </a:extLst>
           </p:cNvPr>
@@ -10625,7 +11433,7 @@
           <p:cNvPr id="4" name="eyebrow">
             <a:extLst xmlns:a="http://schemas.openxmlformats.org/drawingml/2006/main">
               <a:ext uri="{FF2B5EF4-FFF2-40B4-BE49-F238E27FC236}">
-                <a16:creationId xmlns:a16="http://schemas.microsoft.com/office/drawing/2014/main" id="{2E62C158-7831-49FB-B762-BE034B8FEDCF}"/>
+                <a16:creationId xmlns:a16="http://schemas.microsoft.com/office/drawing/2014/main" id="{E4BA6C49-15CF-4A6D-B3BB-BCE519E154A3}"/>
               </a:ext>
             </a:extLst>
           </p:cNvPr>
@@ -10673,10 +11481,69 @@
       </p:sp>
       <p:sp>
         <p:nvSpPr>
-          <p:cNvPr id="5" name="footer-rule">
-            <a:extLst xmlns:a="http://schemas.openxmlformats.org/drawingml/2006/main">
-              <a:ext uri="{FF2B5EF4-FFF2-40B4-BE49-F238E27FC236}">
-                <a16:creationId xmlns:a16="http://schemas.microsoft.com/office/drawing/2014/main" id="{01D42232-97E0-446A-8846-5785ABB68B12}"/>
+          <p:cNvPr id="5" name="rescue-point-logo-background">
+            <a:extLst xmlns:a="http://schemas.openxmlformats.org/drawingml/2006/main">
+              <a:ext uri="{FF2B5EF4-FFF2-40B4-BE49-F238E27FC236}">
+                <a16:creationId xmlns:a16="http://schemas.microsoft.com/office/drawing/2014/main" id="{6F21CF45-B705-42E0-BE55-FDCF1EDDAF8B}"/>
+              </a:ext>
+            </a:extLst>
+          </p:cNvPr>
+          <p:cNvSpPr>
+            <a:spLocks xmlns:a="http://schemas.openxmlformats.org/drawingml/2006/main" noGrp="1"/>
+          </p:cNvSpPr>
+          <p:nvPr/>
+        </p:nvSpPr>
+        <p:spPr>
+          <a:xfrm xmlns:a="http://schemas.openxmlformats.org/drawingml/2006/main">
+            <a:off x="9772650" y="133350"/>
+            <a:ext cx="1733550" cy="457200"/>
+          </a:xfrm>
+          <a:prstGeom xmlns:a="http://schemas.openxmlformats.org/drawingml/2006/main" prst="roundRect">
+            <a:avLst>
+              <a:gd name="adj" fmla="val 16667"/>
+            </a:avLst>
+          </a:prstGeom>
+          <a:solidFill xmlns:a="http://schemas.openxmlformats.org/drawingml/2006/main">
+            <a:srgbClr val="06142E"/>
+          </a:solidFill>
+          <a:ln xmlns:a="http://schemas.openxmlformats.org/drawingml/2006/main" w="9525">
+            <a:solidFill>
+              <a:srgbClr val="1EC5FF">
+                <a:alpha val="33333"/>
+              </a:srgbClr>
+            </a:solidFill>
+            <a:prstDash val="solid"/>
+          </a:ln>
+        </p:spPr>
+      </p:sp>
+      <p:pic>
+        <p:nvPicPr>
+          <p:cNvPr id="17" name="" descr="Figura oficial da documentação dbt usada para explicar: PRÓXIMO PASSO — Liste as ferramentas permitidas e prove que uma proibida é rejeitada.."/>
+          <p:cNvPicPr>
+            <a:picLocks xmlns:a="http://schemas.openxmlformats.org/drawingml/2006/main" noChangeAspect="1"/>
+          </p:cNvPicPr>
+          <p:nvPr/>
+        </p:nvPicPr>
+        <p:blipFill>
+          <a:blip xmlns:r="http://schemas.openxmlformats.org/officeDocument/2006/relationships" xmlns:a="http://schemas.openxmlformats.org/drawingml/2006/main" r:embed="Rd2bd21daa3894ca3"/>
+          <a:stretch xmlns:a="http://schemas.openxmlformats.org/drawingml/2006/main"/>
+        </p:blipFill>
+        <p:spPr>
+          <a:xfrm xmlns:a="http://schemas.openxmlformats.org/drawingml/2006/main">
+            <a:off x="9893718" y="209550"/>
+            <a:ext cx="1491414" cy="323850"/>
+          </a:xfrm>
+          <a:prstGeom xmlns:a="http://schemas.openxmlformats.org/drawingml/2006/main" prst="rect">
+            <a:avLst/>
+          </a:prstGeom>
+        </p:spPr>
+      </p:pic>
+      <p:sp>
+        <p:nvSpPr>
+          <p:cNvPr id="7" name="footer-rule">
+            <a:extLst xmlns:a="http://schemas.openxmlformats.org/drawingml/2006/main">
+              <a:ext uri="{FF2B5EF4-FFF2-40B4-BE49-F238E27FC236}">
+                <a16:creationId xmlns:a16="http://schemas.microsoft.com/office/drawing/2014/main" id="{A7A6DFA3-EC14-49D6-A190-93E2C1699818}"/>
               </a:ext>
             </a:extLst>
           </p:cNvPr>
@@ -10706,10 +11573,10 @@
       </p:sp>
       <p:sp>
         <p:nvSpPr>
-          <p:cNvPr id="6" name="footer">
-            <a:extLst xmlns:a="http://schemas.openxmlformats.org/drawingml/2006/main">
-              <a:ext uri="{FF2B5EF4-FFF2-40B4-BE49-F238E27FC236}">
-                <a16:creationId xmlns:a16="http://schemas.microsoft.com/office/drawing/2014/main" id="{9D018A14-1248-46CF-9223-49ACF3D0AE41}"/>
+          <p:cNvPr id="8" name="footer">
+            <a:extLst xmlns:a="http://schemas.openxmlformats.org/drawingml/2006/main">
+              <a:ext uri="{FF2B5EF4-FFF2-40B4-BE49-F238E27FC236}">
+                <a16:creationId xmlns:a16="http://schemas.microsoft.com/office/drawing/2014/main" id="{CBC02799-AF9E-498F-ABC7-52ACE3074094}"/>
               </a:ext>
             </a:extLst>
           </p:cNvPr>
@@ -10761,10 +11628,10 @@
       </p:sp>
       <p:sp>
         <p:nvSpPr>
-          <p:cNvPr id="7" name="page-number">
-            <a:extLst xmlns:a="http://schemas.openxmlformats.org/drawingml/2006/main">
-              <a:ext uri="{FF2B5EF4-FFF2-40B4-BE49-F238E27FC236}">
-                <a16:creationId xmlns:a16="http://schemas.microsoft.com/office/drawing/2014/main" id="{43BC653B-8394-459D-B416-8EE3EA5A9EC4}"/>
+          <p:cNvPr id="9" name="page-number">
+            <a:extLst xmlns:a="http://schemas.openxmlformats.org/drawingml/2006/main">
+              <a:ext uri="{FF2B5EF4-FFF2-40B4-BE49-F238E27FC236}">
+                <a16:creationId xmlns:a16="http://schemas.microsoft.com/office/drawing/2014/main" id="{E5F5E503-B978-44AD-B419-8547F29C232A}"/>
               </a:ext>
             </a:extLst>
           </p:cNvPr>
@@ -10817,7 +11684,7 @@
     </p:spTree>
     <p:extLst>
       <p:ext uri="{BB962C8B-B14F-4D97-AF65-F5344CB8AC3E}">
-        <p14:creationId xmlns:p14="http://schemas.microsoft.com/office/powerpoint/2010/main" val="2144304652"/>
+        <p14:creationId xmlns:p14="http://schemas.microsoft.com/office/powerpoint/2010/main" val="1181998565"/>
       </p:ext>
     </p:extLst>
   </p:cSld>
@@ -10853,10 +11720,10 @@
       </p:grpSpPr>
       <p:sp>
         <p:nvSpPr>
-          <p:cNvPr id="14" name="slide-title">
-            <a:extLst xmlns:a="http://schemas.openxmlformats.org/drawingml/2006/main">
-              <a:ext uri="{FF2B5EF4-FFF2-40B4-BE49-F238E27FC236}">
-                <a16:creationId xmlns:a16="http://schemas.microsoft.com/office/drawing/2014/main" id="{C8127141-74FF-4D70-9619-25E4AE6137FF}"/>
+          <p:cNvPr id="16" name="slide-title">
+            <a:extLst xmlns:a="http://schemas.openxmlformats.org/drawingml/2006/main">
+              <a:ext uri="{FF2B5EF4-FFF2-40B4-BE49-F238E27FC236}">
+                <a16:creationId xmlns:a16="http://schemas.microsoft.com/office/drawing/2014/main" id="{8A4A3A65-3A41-47B3-8F68-B2A76C9E4B82}"/>
               </a:ext>
             </a:extLst>
           </p:cNvPr>
@@ -10907,7 +11774,7 @@
           <p:cNvPr id="2" name="step-num-1">
             <a:extLst xmlns:a="http://schemas.openxmlformats.org/drawingml/2006/main">
               <a:ext uri="{FF2B5EF4-FFF2-40B4-BE49-F238E27FC236}">
-                <a16:creationId xmlns:a16="http://schemas.microsoft.com/office/drawing/2014/main" id="{F8A51DDC-D01F-4D25-8D9F-928B06A6090C}"/>
+                <a16:creationId xmlns:a16="http://schemas.microsoft.com/office/drawing/2014/main" id="{596FFB6F-7BD5-494D-B30F-0D64356E994B}"/>
               </a:ext>
             </a:extLst>
           </p:cNvPr>
@@ -10958,7 +11825,7 @@
           <p:cNvPr id="3" name="step-label-1">
             <a:extLst xmlns:a="http://schemas.openxmlformats.org/drawingml/2006/main">
               <a:ext uri="{FF2B5EF4-FFF2-40B4-BE49-F238E27FC236}">
-                <a16:creationId xmlns:a16="http://schemas.microsoft.com/office/drawing/2014/main" id="{6C833894-D322-4E39-9C17-24F50A1C4B64}"/>
+                <a16:creationId xmlns:a16="http://schemas.microsoft.com/office/drawing/2014/main" id="{DC4DBEAF-1465-4EB1-89F1-147B8ACDF051}"/>
               </a:ext>
             </a:extLst>
           </p:cNvPr>
@@ -11009,7 +11876,7 @@
           <p:cNvPr id="4" name="step-line-1">
             <a:extLst xmlns:a="http://schemas.openxmlformats.org/drawingml/2006/main">
               <a:ext uri="{FF2B5EF4-FFF2-40B4-BE49-F238E27FC236}">
-                <a16:creationId xmlns:a16="http://schemas.microsoft.com/office/drawing/2014/main" id="{8E4463DE-BA76-4E1B-9EDF-395B8669E66C}"/>
+                <a16:creationId xmlns:a16="http://schemas.microsoft.com/office/drawing/2014/main" id="{FF7D1E5F-5017-455C-94B8-44E7D21A6B46}"/>
               </a:ext>
             </a:extLst>
           </p:cNvPr>
@@ -11040,7 +11907,7 @@
           <p:cNvPr id="5" name="step-num-2">
             <a:extLst xmlns:a="http://schemas.openxmlformats.org/drawingml/2006/main">
               <a:ext uri="{FF2B5EF4-FFF2-40B4-BE49-F238E27FC236}">
-                <a16:creationId xmlns:a16="http://schemas.microsoft.com/office/drawing/2014/main" id="{A80E80F0-D599-4271-B209-311FABB71E38}"/>
+                <a16:creationId xmlns:a16="http://schemas.microsoft.com/office/drawing/2014/main" id="{F4B8537B-46C7-42A2-B8C4-9737970C2343}"/>
               </a:ext>
             </a:extLst>
           </p:cNvPr>
@@ -11091,7 +11958,7 @@
           <p:cNvPr id="6" name="step-label-2">
             <a:extLst xmlns:a="http://schemas.openxmlformats.org/drawingml/2006/main">
               <a:ext uri="{FF2B5EF4-FFF2-40B4-BE49-F238E27FC236}">
-                <a16:creationId xmlns:a16="http://schemas.microsoft.com/office/drawing/2014/main" id="{1B504A4D-23F1-4013-B916-BE669D7E956A}"/>
+                <a16:creationId xmlns:a16="http://schemas.microsoft.com/office/drawing/2014/main" id="{07488822-03DF-4EE9-8F20-1FE98036666E}"/>
               </a:ext>
             </a:extLst>
           </p:cNvPr>
@@ -11142,7 +12009,7 @@
           <p:cNvPr id="7" name="step-line-2">
             <a:extLst xmlns:a="http://schemas.openxmlformats.org/drawingml/2006/main">
               <a:ext uri="{FF2B5EF4-FFF2-40B4-BE49-F238E27FC236}">
-                <a16:creationId xmlns:a16="http://schemas.microsoft.com/office/drawing/2014/main" id="{D241B31A-5D8E-47E5-A660-F7A7F08A3F6A}"/>
+                <a16:creationId xmlns:a16="http://schemas.microsoft.com/office/drawing/2014/main" id="{2EEB3FD6-250D-4DCC-9FEC-5C28FB519A73}"/>
               </a:ext>
             </a:extLst>
           </p:cNvPr>
@@ -11173,7 +12040,7 @@
           <p:cNvPr id="8" name="step-num-3">
             <a:extLst xmlns:a="http://schemas.openxmlformats.org/drawingml/2006/main">
               <a:ext uri="{FF2B5EF4-FFF2-40B4-BE49-F238E27FC236}">
-                <a16:creationId xmlns:a16="http://schemas.microsoft.com/office/drawing/2014/main" id="{C39DB3E5-2B54-43C4-8EA4-2BBC188E7A35}"/>
+                <a16:creationId xmlns:a16="http://schemas.microsoft.com/office/drawing/2014/main" id="{E4B96B1C-269A-472C-A6FE-AFC1FB56AB7F}"/>
               </a:ext>
             </a:extLst>
           </p:cNvPr>
@@ -11224,7 +12091,7 @@
           <p:cNvPr id="9" name="step-label-3">
             <a:extLst xmlns:a="http://schemas.openxmlformats.org/drawingml/2006/main">
               <a:ext uri="{FF2B5EF4-FFF2-40B4-BE49-F238E27FC236}">
-                <a16:creationId xmlns:a16="http://schemas.microsoft.com/office/drawing/2014/main" id="{195B41A3-667F-4292-ACA8-21A18F00C345}"/>
+                <a16:creationId xmlns:a16="http://schemas.microsoft.com/office/drawing/2014/main" id="{FC06BE62-1171-4CB1-856A-8C49070A1EE3}"/>
               </a:ext>
             </a:extLst>
           </p:cNvPr>
@@ -11275,7 +12142,7 @@
           <p:cNvPr id="10" name="eyebrow">
             <a:extLst xmlns:a="http://schemas.openxmlformats.org/drawingml/2006/main">
               <a:ext uri="{FF2B5EF4-FFF2-40B4-BE49-F238E27FC236}">
-                <a16:creationId xmlns:a16="http://schemas.microsoft.com/office/drawing/2014/main" id="{507FBBC1-15A6-4E00-A10D-7BCE5D8DD44C}"/>
+                <a16:creationId xmlns:a16="http://schemas.microsoft.com/office/drawing/2014/main" id="{EACD4770-FE6A-488D-A651-E5179F25385B}"/>
               </a:ext>
             </a:extLst>
           </p:cNvPr>
@@ -11323,10 +12190,69 @@
       </p:sp>
       <p:sp>
         <p:nvSpPr>
-          <p:cNvPr id="11" name="footer-rule">
-            <a:extLst xmlns:a="http://schemas.openxmlformats.org/drawingml/2006/main">
-              <a:ext uri="{FF2B5EF4-FFF2-40B4-BE49-F238E27FC236}">
-                <a16:creationId xmlns:a16="http://schemas.microsoft.com/office/drawing/2014/main" id="{DA76CFCA-63EA-4408-A1D7-1D20F5CEE33C}"/>
+          <p:cNvPr id="11" name="rescue-point-logo-background">
+            <a:extLst xmlns:a="http://schemas.openxmlformats.org/drawingml/2006/main">
+              <a:ext uri="{FF2B5EF4-FFF2-40B4-BE49-F238E27FC236}">
+                <a16:creationId xmlns:a16="http://schemas.microsoft.com/office/drawing/2014/main" id="{BA8A0450-C2BC-4DCE-AAE6-852FFA4895C8}"/>
+              </a:ext>
+            </a:extLst>
+          </p:cNvPr>
+          <p:cNvSpPr>
+            <a:spLocks xmlns:a="http://schemas.openxmlformats.org/drawingml/2006/main" noGrp="1"/>
+          </p:cNvSpPr>
+          <p:nvPr/>
+        </p:nvSpPr>
+        <p:spPr>
+          <a:xfrm xmlns:a="http://schemas.openxmlformats.org/drawingml/2006/main">
+            <a:off x="9772650" y="133350"/>
+            <a:ext cx="1733550" cy="457200"/>
+          </a:xfrm>
+          <a:prstGeom xmlns:a="http://schemas.openxmlformats.org/drawingml/2006/main" prst="roundRect">
+            <a:avLst>
+              <a:gd name="adj" fmla="val 16667"/>
+            </a:avLst>
+          </a:prstGeom>
+          <a:solidFill xmlns:a="http://schemas.openxmlformats.org/drawingml/2006/main">
+            <a:srgbClr val="06142E"/>
+          </a:solidFill>
+          <a:ln xmlns:a="http://schemas.openxmlformats.org/drawingml/2006/main" w="9525">
+            <a:solidFill>
+              <a:srgbClr val="1EC5FF">
+                <a:alpha val="33333"/>
+              </a:srgbClr>
+            </a:solidFill>
+            <a:prstDash val="solid"/>
+          </a:ln>
+        </p:spPr>
+      </p:sp>
+      <p:pic>
+        <p:nvPicPr>
+          <p:cNvPr id="29" name="" descr="Figura oficial da documentação dbt usada para explicar: Ao final, você consegue... — 01."/>
+          <p:cNvPicPr>
+            <a:picLocks xmlns:a="http://schemas.openxmlformats.org/drawingml/2006/main" noChangeAspect="1"/>
+          </p:cNvPicPr>
+          <p:nvPr/>
+        </p:nvPicPr>
+        <p:blipFill>
+          <a:blip xmlns:r="http://schemas.openxmlformats.org/officeDocument/2006/relationships" xmlns:a="http://schemas.openxmlformats.org/drawingml/2006/main" r:embed="Ra3f4c6a05d274945"/>
+          <a:stretch xmlns:a="http://schemas.openxmlformats.org/drawingml/2006/main"/>
+        </p:blipFill>
+        <p:spPr>
+          <a:xfrm xmlns:a="http://schemas.openxmlformats.org/drawingml/2006/main">
+            <a:off x="9893718" y="209550"/>
+            <a:ext cx="1491414" cy="323850"/>
+          </a:xfrm>
+          <a:prstGeom xmlns:a="http://schemas.openxmlformats.org/drawingml/2006/main" prst="rect">
+            <a:avLst/>
+          </a:prstGeom>
+        </p:spPr>
+      </p:pic>
+      <p:sp>
+        <p:nvSpPr>
+          <p:cNvPr id="13" name="footer-rule">
+            <a:extLst xmlns:a="http://schemas.openxmlformats.org/drawingml/2006/main">
+              <a:ext uri="{FF2B5EF4-FFF2-40B4-BE49-F238E27FC236}">
+                <a16:creationId xmlns:a16="http://schemas.microsoft.com/office/drawing/2014/main" id="{FF3C7281-82C0-4C62-A6E2-144E8A809FEC}"/>
               </a:ext>
             </a:extLst>
           </p:cNvPr>
@@ -11356,10 +12282,10 @@
       </p:sp>
       <p:sp>
         <p:nvSpPr>
-          <p:cNvPr id="12" name="footer">
-            <a:extLst xmlns:a="http://schemas.openxmlformats.org/drawingml/2006/main">
-              <a:ext uri="{FF2B5EF4-FFF2-40B4-BE49-F238E27FC236}">
-                <a16:creationId xmlns:a16="http://schemas.microsoft.com/office/drawing/2014/main" id="{215EA71D-5B40-49B7-B90B-C3C35A661D7B}"/>
+          <p:cNvPr id="14" name="footer">
+            <a:extLst xmlns:a="http://schemas.openxmlformats.org/drawingml/2006/main">
+              <a:ext uri="{FF2B5EF4-FFF2-40B4-BE49-F238E27FC236}">
+                <a16:creationId xmlns:a16="http://schemas.microsoft.com/office/drawing/2014/main" id="{149AB794-A549-4D91-BC92-D7F0F9BED5A7}"/>
               </a:ext>
             </a:extLst>
           </p:cNvPr>
@@ -11411,10 +12337,10 @@
       </p:sp>
       <p:sp>
         <p:nvSpPr>
-          <p:cNvPr id="13" name="page-number">
-            <a:extLst xmlns:a="http://schemas.openxmlformats.org/drawingml/2006/main">
-              <a:ext uri="{FF2B5EF4-FFF2-40B4-BE49-F238E27FC236}">
-                <a16:creationId xmlns:a16="http://schemas.microsoft.com/office/drawing/2014/main" id="{FD751F96-0A30-4793-AA9D-8556FFBF1945}"/>
+          <p:cNvPr id="15" name="page-number">
+            <a:extLst xmlns:a="http://schemas.openxmlformats.org/drawingml/2006/main">
+              <a:ext uri="{FF2B5EF4-FFF2-40B4-BE49-F238E27FC236}">
+                <a16:creationId xmlns:a16="http://schemas.microsoft.com/office/drawing/2014/main" id="{CF708DEE-CB01-49AD-8772-D5F3E9BC5C66}"/>
               </a:ext>
             </a:extLst>
           </p:cNvPr>
@@ -11467,7 +12393,7 @@
     </p:spTree>
     <p:extLst>
       <p:ext uri="{BB962C8B-B14F-4D97-AF65-F5344CB8AC3E}">
-        <p14:creationId xmlns:p14="http://schemas.microsoft.com/office/powerpoint/2010/main" val="997833217"/>
+        <p14:creationId xmlns:p14="http://schemas.microsoft.com/office/powerpoint/2010/main" val="1033294163"/>
       </p:ext>
     </p:extLst>
   </p:cSld>
@@ -11503,10 +12429,10 @@
       </p:grpSpPr>
       <p:sp>
         <p:nvSpPr>
-          <p:cNvPr id="11" name="slide-title">
-            <a:extLst xmlns:a="http://schemas.openxmlformats.org/drawingml/2006/main">
-              <a:ext uri="{FF2B5EF4-FFF2-40B4-BE49-F238E27FC236}">
-                <a16:creationId xmlns:a16="http://schemas.microsoft.com/office/drawing/2014/main" id="{3B8DA1B4-E6F9-48BF-89E8-2A478BC397EC}"/>
+          <p:cNvPr id="13" name="slide-title">
+            <a:extLst xmlns:a="http://schemas.openxmlformats.org/drawingml/2006/main">
+              <a:ext uri="{FF2B5EF4-FFF2-40B4-BE49-F238E27FC236}">
+                <a16:creationId xmlns:a16="http://schemas.microsoft.com/office/drawing/2014/main" id="{AA4F4957-46FA-4EF5-925D-63FD44037CE1}"/>
               </a:ext>
             </a:extLst>
           </p:cNvPr>
@@ -11557,7 +12483,7 @@
           <p:cNvPr id="2" name="slide-subtitle">
             <a:extLst xmlns:a="http://schemas.openxmlformats.org/drawingml/2006/main">
               <a:ext uri="{FF2B5EF4-FFF2-40B4-BE49-F238E27FC236}">
-                <a16:creationId xmlns:a16="http://schemas.microsoft.com/office/drawing/2014/main" id="{653C4104-7899-4FB3-A1D7-4D2E8B703678}"/>
+                <a16:creationId xmlns:a16="http://schemas.microsoft.com/office/drawing/2014/main" id="{7C9C4705-9E0C-4ADA-85A4-81EB18002BDD}"/>
               </a:ext>
             </a:extLst>
           </p:cNvPr>
@@ -11608,7 +12534,7 @@
           <p:cNvPr id="3" name="bullets">
             <a:extLst xmlns:a="http://schemas.openxmlformats.org/drawingml/2006/main">
               <a:ext uri="{FF2B5EF4-FFF2-40B4-BE49-F238E27FC236}">
-                <a16:creationId xmlns:a16="http://schemas.microsoft.com/office/drawing/2014/main" id="{C19F9400-C91D-41EB-8D83-03A7B337FE02}"/>
+                <a16:creationId xmlns:a16="http://schemas.microsoft.com/office/drawing/2014/main" id="{7885C9F2-C3D5-4EF0-A448-1D524447A941}"/>
               </a:ext>
             </a:extLst>
           </p:cNvPr>
@@ -11695,7 +12621,7 @@
           <p:cNvPr id="4" name="ambient-glow">
             <a:extLst xmlns:a="http://schemas.openxmlformats.org/drawingml/2006/main">
               <a:ext uri="{FF2B5EF4-FFF2-40B4-BE49-F238E27FC236}">
-                <a16:creationId xmlns:a16="http://schemas.microsoft.com/office/drawing/2014/main" id="{D9B8368D-137E-4F3C-8A04-1194EF2E4432}"/>
+                <a16:creationId xmlns:a16="http://schemas.microsoft.com/office/drawing/2014/main" id="{82F9689C-7F6E-430E-9EB2-EC5ED6B18587}"/>
               </a:ext>
             </a:extLst>
           </p:cNvPr>
@@ -11732,7 +12658,7 @@
           <p:cNvPr id="5" name="ambient-core">
             <a:extLst xmlns:a="http://schemas.openxmlformats.org/drawingml/2006/main">
               <a:ext uri="{FF2B5EF4-FFF2-40B4-BE49-F238E27FC236}">
-                <a16:creationId xmlns:a16="http://schemas.microsoft.com/office/drawing/2014/main" id="{69F1E2A5-707F-44D8-8643-42FCB2000540}"/>
+                <a16:creationId xmlns:a16="http://schemas.microsoft.com/office/drawing/2014/main" id="{9EC9DF27-3713-4E5A-9513-4A0A52C53CD1}"/>
               </a:ext>
             </a:extLst>
           </p:cNvPr>
@@ -11769,7 +12695,7 @@
           <p:cNvPr id="6" name="section-number">
             <a:extLst xmlns:a="http://schemas.openxmlformats.org/drawingml/2006/main">
               <a:ext uri="{FF2B5EF4-FFF2-40B4-BE49-F238E27FC236}">
-                <a16:creationId xmlns:a16="http://schemas.microsoft.com/office/drawing/2014/main" id="{18DB018C-4BF2-4515-AFF5-8E5BA0D7F0FE}"/>
+                <a16:creationId xmlns:a16="http://schemas.microsoft.com/office/drawing/2014/main" id="{8CEAA7AB-1E29-4753-B241-9BE3819906E4}"/>
               </a:ext>
             </a:extLst>
           </p:cNvPr>
@@ -11820,7 +12746,7 @@
           <p:cNvPr id="7" name="eyebrow">
             <a:extLst xmlns:a="http://schemas.openxmlformats.org/drawingml/2006/main">
               <a:ext uri="{FF2B5EF4-FFF2-40B4-BE49-F238E27FC236}">
-                <a16:creationId xmlns:a16="http://schemas.microsoft.com/office/drawing/2014/main" id="{10D4792D-7E00-4EA3-8840-27384793FBF2}"/>
+                <a16:creationId xmlns:a16="http://schemas.microsoft.com/office/drawing/2014/main" id="{6A5C2FB1-50BB-4D95-9DA5-3A80ABA5B482}"/>
               </a:ext>
             </a:extLst>
           </p:cNvPr>
@@ -11868,10 +12794,69 @@
       </p:sp>
       <p:sp>
         <p:nvSpPr>
-          <p:cNvPr id="8" name="footer-rule">
-            <a:extLst xmlns:a="http://schemas.openxmlformats.org/drawingml/2006/main">
-              <a:ext uri="{FF2B5EF4-FFF2-40B4-BE49-F238E27FC236}">
-                <a16:creationId xmlns:a16="http://schemas.microsoft.com/office/drawing/2014/main" id="{6C1105CC-6169-485F-AE34-85B9F8763488}"/>
+          <p:cNvPr id="8" name="rescue-point-logo-background">
+            <a:extLst xmlns:a="http://schemas.openxmlformats.org/drawingml/2006/main">
+              <a:ext uri="{FF2B5EF4-FFF2-40B4-BE49-F238E27FC236}">
+                <a16:creationId xmlns:a16="http://schemas.microsoft.com/office/drawing/2014/main" id="{B4F7B533-D7E4-44FC-ACE5-6C0E025122A4}"/>
+              </a:ext>
+            </a:extLst>
+          </p:cNvPr>
+          <p:cNvSpPr>
+            <a:spLocks xmlns:a="http://schemas.openxmlformats.org/drawingml/2006/main" noGrp="1"/>
+          </p:cNvSpPr>
+          <p:nvPr/>
+        </p:nvSpPr>
+        <p:spPr>
+          <a:xfrm xmlns:a="http://schemas.openxmlformats.org/drawingml/2006/main">
+            <a:off x="9772650" y="133350"/>
+            <a:ext cx="1733550" cy="457200"/>
+          </a:xfrm>
+          <a:prstGeom xmlns:a="http://schemas.openxmlformats.org/drawingml/2006/main" prst="roundRect">
+            <a:avLst>
+              <a:gd name="adj" fmla="val 16667"/>
+            </a:avLst>
+          </a:prstGeom>
+          <a:solidFill xmlns:a="http://schemas.openxmlformats.org/drawingml/2006/main">
+            <a:srgbClr val="06142E"/>
+          </a:solidFill>
+          <a:ln xmlns:a="http://schemas.openxmlformats.org/drawingml/2006/main" w="9525">
+            <a:solidFill>
+              <a:srgbClr val="1EC5FF">
+                <a:alpha val="33333"/>
+              </a:srgbClr>
+            </a:solidFill>
+            <a:prstDash val="solid"/>
+          </a:ln>
+        </p:spPr>
+      </p:sp>
+      <p:pic>
+        <p:nvPicPr>
+          <p:cNvPr id="23" name="" descr="Figura oficial da documentação dbt usada para explicar: MCP separa cliente e contexto — O protocolo descreve ferramentas; o servidor decide o que expor.."/>
+          <p:cNvPicPr>
+            <a:picLocks xmlns:a="http://schemas.openxmlformats.org/drawingml/2006/main" noChangeAspect="1"/>
+          </p:cNvPicPr>
+          <p:nvPr/>
+        </p:nvPicPr>
+        <p:blipFill>
+          <a:blip xmlns:r="http://schemas.openxmlformats.org/officeDocument/2006/relationships" xmlns:a="http://schemas.openxmlformats.org/drawingml/2006/main" r:embed="R54ee5dec164a4763"/>
+          <a:stretch xmlns:a="http://schemas.openxmlformats.org/drawingml/2006/main"/>
+        </p:blipFill>
+        <p:spPr>
+          <a:xfrm xmlns:a="http://schemas.openxmlformats.org/drawingml/2006/main">
+            <a:off x="9893718" y="209550"/>
+            <a:ext cx="1491414" cy="323850"/>
+          </a:xfrm>
+          <a:prstGeom xmlns:a="http://schemas.openxmlformats.org/drawingml/2006/main" prst="rect">
+            <a:avLst/>
+          </a:prstGeom>
+        </p:spPr>
+      </p:pic>
+      <p:sp>
+        <p:nvSpPr>
+          <p:cNvPr id="10" name="footer-rule">
+            <a:extLst xmlns:a="http://schemas.openxmlformats.org/drawingml/2006/main">
+              <a:ext uri="{FF2B5EF4-FFF2-40B4-BE49-F238E27FC236}">
+                <a16:creationId xmlns:a16="http://schemas.microsoft.com/office/drawing/2014/main" id="{334B8321-45A5-4D57-BB45-08107AD60704}"/>
               </a:ext>
             </a:extLst>
           </p:cNvPr>
@@ -11901,10 +12886,10 @@
       </p:sp>
       <p:sp>
         <p:nvSpPr>
-          <p:cNvPr id="9" name="footer">
-            <a:extLst xmlns:a="http://schemas.openxmlformats.org/drawingml/2006/main">
-              <a:ext uri="{FF2B5EF4-FFF2-40B4-BE49-F238E27FC236}">
-                <a16:creationId xmlns:a16="http://schemas.microsoft.com/office/drawing/2014/main" id="{68E9CB68-7597-44B1-A72F-BF68FB6BD0D4}"/>
+          <p:cNvPr id="11" name="footer">
+            <a:extLst xmlns:a="http://schemas.openxmlformats.org/drawingml/2006/main">
+              <a:ext uri="{FF2B5EF4-FFF2-40B4-BE49-F238E27FC236}">
+                <a16:creationId xmlns:a16="http://schemas.microsoft.com/office/drawing/2014/main" id="{200E0A6A-EA91-4F2C-8CBD-A93689DABB07}"/>
               </a:ext>
             </a:extLst>
           </p:cNvPr>
@@ -11956,10 +12941,10 @@
       </p:sp>
       <p:sp>
         <p:nvSpPr>
-          <p:cNvPr id="10" name="page-number">
-            <a:extLst xmlns:a="http://schemas.openxmlformats.org/drawingml/2006/main">
-              <a:ext uri="{FF2B5EF4-FFF2-40B4-BE49-F238E27FC236}">
-                <a16:creationId xmlns:a16="http://schemas.microsoft.com/office/drawing/2014/main" id="{E58C13B8-D907-4EAB-9A3E-68FBF8ACD03E}"/>
+          <p:cNvPr id="12" name="page-number">
+            <a:extLst xmlns:a="http://schemas.openxmlformats.org/drawingml/2006/main">
+              <a:ext uri="{FF2B5EF4-FFF2-40B4-BE49-F238E27FC236}">
+                <a16:creationId xmlns:a16="http://schemas.microsoft.com/office/drawing/2014/main" id="{8CD41F3F-8132-4C8E-9B67-B26657FC4BE8}"/>
               </a:ext>
             </a:extLst>
           </p:cNvPr>
@@ -12012,7 +12997,7 @@
     </p:spTree>
     <p:extLst>
       <p:ext uri="{BB962C8B-B14F-4D97-AF65-F5344CB8AC3E}">
-        <p14:creationId xmlns:p14="http://schemas.microsoft.com/office/powerpoint/2010/main" val="143683898"/>
+        <p14:creationId xmlns:p14="http://schemas.microsoft.com/office/powerpoint/2010/main" val="95793172"/>
       </p:ext>
     </p:extLst>
   </p:cSld>
@@ -12040,10 +13025,10 @@
       </p:grpSpPr>
       <p:sp>
         <p:nvSpPr>
-          <p:cNvPr id="11" name="slide-title">
-            <a:extLst xmlns:a="http://schemas.openxmlformats.org/drawingml/2006/main">
-              <a:ext uri="{FF2B5EF4-FFF2-40B4-BE49-F238E27FC236}">
-                <a16:creationId xmlns:a16="http://schemas.microsoft.com/office/drawing/2014/main" id="{E79EE6F9-963B-426B-B57E-196E3AD0367B}"/>
+          <p:cNvPr id="13" name="slide-title">
+            <a:extLst xmlns:a="http://schemas.openxmlformats.org/drawingml/2006/main">
+              <a:ext uri="{FF2B5EF4-FFF2-40B4-BE49-F238E27FC236}">
+                <a16:creationId xmlns:a16="http://schemas.microsoft.com/office/drawing/2014/main" id="{B3738A3F-754F-4A9A-A606-47F501462CD9}"/>
               </a:ext>
             </a:extLst>
           </p:cNvPr>
@@ -12094,7 +13079,7 @@
           <p:cNvPr id="2" name="slide-subtitle">
             <a:extLst xmlns:a="http://schemas.openxmlformats.org/drawingml/2006/main">
               <a:ext uri="{FF2B5EF4-FFF2-40B4-BE49-F238E27FC236}">
-                <a16:creationId xmlns:a16="http://schemas.microsoft.com/office/drawing/2014/main" id="{4BB30816-0D94-4B58-A136-7C5E19D8477A}"/>
+                <a16:creationId xmlns:a16="http://schemas.microsoft.com/office/drawing/2014/main" id="{31805654-F979-4915-8F67-E004B1860E66}"/>
               </a:ext>
             </a:extLst>
           </p:cNvPr>
@@ -12145,7 +13130,7 @@
           <p:cNvPr id="3" name="bullets">
             <a:extLst xmlns:a="http://schemas.openxmlformats.org/drawingml/2006/main">
               <a:ext uri="{FF2B5EF4-FFF2-40B4-BE49-F238E27FC236}">
-                <a16:creationId xmlns:a16="http://schemas.microsoft.com/office/drawing/2014/main" id="{86BB410C-BDBF-414F-964A-DB012F565872}"/>
+                <a16:creationId xmlns:a16="http://schemas.microsoft.com/office/drawing/2014/main" id="{379C9249-A01B-4ADA-99EF-5B91AF88677A}"/>
               </a:ext>
             </a:extLst>
           </p:cNvPr>
@@ -12232,7 +13217,7 @@
           <p:cNvPr id="4" name="ambient-glow">
             <a:extLst xmlns:a="http://schemas.openxmlformats.org/drawingml/2006/main">
               <a:ext uri="{FF2B5EF4-FFF2-40B4-BE49-F238E27FC236}">
-                <a16:creationId xmlns:a16="http://schemas.microsoft.com/office/drawing/2014/main" id="{4CB6CCA0-FDEF-43A4-A5E0-31A51B2B40C9}"/>
+                <a16:creationId xmlns:a16="http://schemas.microsoft.com/office/drawing/2014/main" id="{E42A7505-A0A1-48D5-B59D-BC9F0778B9B5}"/>
               </a:ext>
             </a:extLst>
           </p:cNvPr>
@@ -12269,7 +13254,7 @@
           <p:cNvPr id="5" name="ambient-core">
             <a:extLst xmlns:a="http://schemas.openxmlformats.org/drawingml/2006/main">
               <a:ext uri="{FF2B5EF4-FFF2-40B4-BE49-F238E27FC236}">
-                <a16:creationId xmlns:a16="http://schemas.microsoft.com/office/drawing/2014/main" id="{C5AB065E-278C-4C27-8189-1257C7C122E8}"/>
+                <a16:creationId xmlns:a16="http://schemas.microsoft.com/office/drawing/2014/main" id="{A3EC4200-8BA1-4DED-BD90-065CC881268C}"/>
               </a:ext>
             </a:extLst>
           </p:cNvPr>
@@ -12306,7 +13291,7 @@
           <p:cNvPr id="6" name="section-number">
             <a:extLst xmlns:a="http://schemas.openxmlformats.org/drawingml/2006/main">
               <a:ext uri="{FF2B5EF4-FFF2-40B4-BE49-F238E27FC236}">
-                <a16:creationId xmlns:a16="http://schemas.microsoft.com/office/drawing/2014/main" id="{FCE99446-2973-4108-9352-B2F573EB1756}"/>
+                <a16:creationId xmlns:a16="http://schemas.microsoft.com/office/drawing/2014/main" id="{312463CA-7D07-4B40-8B8D-597A396F4221}"/>
               </a:ext>
             </a:extLst>
           </p:cNvPr>
@@ -12357,7 +13342,7 @@
           <p:cNvPr id="7" name="eyebrow">
             <a:extLst xmlns:a="http://schemas.openxmlformats.org/drawingml/2006/main">
               <a:ext uri="{FF2B5EF4-FFF2-40B4-BE49-F238E27FC236}">
-                <a16:creationId xmlns:a16="http://schemas.microsoft.com/office/drawing/2014/main" id="{9CDB1577-E392-40A6-A63A-6C00199B76E1}"/>
+                <a16:creationId xmlns:a16="http://schemas.microsoft.com/office/drawing/2014/main" id="{6753135B-AA0A-4DB3-8D10-707E568B6E20}"/>
               </a:ext>
             </a:extLst>
           </p:cNvPr>
@@ -12405,10 +13390,69 @@
       </p:sp>
       <p:sp>
         <p:nvSpPr>
-          <p:cNvPr id="8" name="footer-rule">
-            <a:extLst xmlns:a="http://schemas.openxmlformats.org/drawingml/2006/main">
-              <a:ext uri="{FF2B5EF4-FFF2-40B4-BE49-F238E27FC236}">
-                <a16:creationId xmlns:a16="http://schemas.microsoft.com/office/drawing/2014/main" id="{B14149DE-15E6-46B9-8247-1D8434CDE972}"/>
+          <p:cNvPr id="8" name="rescue-point-logo-background">
+            <a:extLst xmlns:a="http://schemas.openxmlformats.org/drawingml/2006/main">
+              <a:ext uri="{FF2B5EF4-FFF2-40B4-BE49-F238E27FC236}">
+                <a16:creationId xmlns:a16="http://schemas.microsoft.com/office/drawing/2014/main" id="{D269403D-7363-4E07-A426-828A81D61D3D}"/>
+              </a:ext>
+            </a:extLst>
+          </p:cNvPr>
+          <p:cNvSpPr>
+            <a:spLocks xmlns:a="http://schemas.openxmlformats.org/drawingml/2006/main" noGrp="1"/>
+          </p:cNvSpPr>
+          <p:nvPr/>
+        </p:nvSpPr>
+        <p:spPr>
+          <a:xfrm xmlns:a="http://schemas.openxmlformats.org/drawingml/2006/main">
+            <a:off x="9772650" y="133350"/>
+            <a:ext cx="1733550" cy="457200"/>
+          </a:xfrm>
+          <a:prstGeom xmlns:a="http://schemas.openxmlformats.org/drawingml/2006/main" prst="roundRect">
+            <a:avLst>
+              <a:gd name="adj" fmla="val 16667"/>
+            </a:avLst>
+          </a:prstGeom>
+          <a:solidFill xmlns:a="http://schemas.openxmlformats.org/drawingml/2006/main">
+            <a:srgbClr val="06142E"/>
+          </a:solidFill>
+          <a:ln xmlns:a="http://schemas.openxmlformats.org/drawingml/2006/main" w="9525">
+            <a:solidFill>
+              <a:srgbClr val="1EC5FF">
+                <a:alpha val="33333"/>
+              </a:srgbClr>
+            </a:solidFill>
+            <a:prstDash val="solid"/>
+          </a:ln>
+        </p:spPr>
+      </p:sp>
+      <p:pic>
+        <p:nvPicPr>
+          <p:cNvPr id="23" name="" descr="Figura oficial da documentação dbt usada para explicar: A arquitetura oficial mostra múltiplos consumidores — O servidor conecta ativos dbt a diferentes fluxos de agente.."/>
+          <p:cNvPicPr>
+            <a:picLocks xmlns:a="http://schemas.openxmlformats.org/drawingml/2006/main" noChangeAspect="1"/>
+          </p:cNvPicPr>
+          <p:nvPr/>
+        </p:nvPicPr>
+        <p:blipFill>
+          <a:blip xmlns:r="http://schemas.openxmlformats.org/officeDocument/2006/relationships" xmlns:a="http://schemas.openxmlformats.org/drawingml/2006/main" r:embed="R58c99cd86d98475a"/>
+          <a:stretch xmlns:a="http://schemas.openxmlformats.org/drawingml/2006/main"/>
+        </p:blipFill>
+        <p:spPr>
+          <a:xfrm xmlns:a="http://schemas.openxmlformats.org/drawingml/2006/main">
+            <a:off x="9893718" y="209550"/>
+            <a:ext cx="1491414" cy="323850"/>
+          </a:xfrm>
+          <a:prstGeom xmlns:a="http://schemas.openxmlformats.org/drawingml/2006/main" prst="rect">
+            <a:avLst/>
+          </a:prstGeom>
+        </p:spPr>
+      </p:pic>
+      <p:sp>
+        <p:nvSpPr>
+          <p:cNvPr id="10" name="footer-rule">
+            <a:extLst xmlns:a="http://schemas.openxmlformats.org/drawingml/2006/main">
+              <a:ext uri="{FF2B5EF4-FFF2-40B4-BE49-F238E27FC236}">
+                <a16:creationId xmlns:a16="http://schemas.microsoft.com/office/drawing/2014/main" id="{3C200E1E-B069-48C8-A983-6C4A2EE7C9D3}"/>
               </a:ext>
             </a:extLst>
           </p:cNvPr>
@@ -12438,10 +13482,10 @@
       </p:sp>
       <p:sp>
         <p:nvSpPr>
-          <p:cNvPr id="9" name="footer">
-            <a:extLst xmlns:a="http://schemas.openxmlformats.org/drawingml/2006/main">
-              <a:ext uri="{FF2B5EF4-FFF2-40B4-BE49-F238E27FC236}">
-                <a16:creationId xmlns:a16="http://schemas.microsoft.com/office/drawing/2014/main" id="{29196975-5124-422A-9EF9-9D036528B536}"/>
+          <p:cNvPr id="11" name="footer">
+            <a:extLst xmlns:a="http://schemas.openxmlformats.org/drawingml/2006/main">
+              <a:ext uri="{FF2B5EF4-FFF2-40B4-BE49-F238E27FC236}">
+                <a16:creationId xmlns:a16="http://schemas.microsoft.com/office/drawing/2014/main" id="{512902AA-5D3B-4839-B182-9836667BBC8F}"/>
               </a:ext>
             </a:extLst>
           </p:cNvPr>
@@ -12493,10 +13537,10 @@
       </p:sp>
       <p:sp>
         <p:nvSpPr>
-          <p:cNvPr id="10" name="page-number">
-            <a:extLst xmlns:a="http://schemas.openxmlformats.org/drawingml/2006/main">
-              <a:ext uri="{FF2B5EF4-FFF2-40B4-BE49-F238E27FC236}">
-                <a16:creationId xmlns:a16="http://schemas.microsoft.com/office/drawing/2014/main" id="{ADC408B4-F263-4F14-A78A-8A263574BC0D}"/>
+          <p:cNvPr id="12" name="page-number">
+            <a:extLst xmlns:a="http://schemas.openxmlformats.org/drawingml/2006/main">
+              <a:ext uri="{FF2B5EF4-FFF2-40B4-BE49-F238E27FC236}">
+                <a16:creationId xmlns:a16="http://schemas.microsoft.com/office/drawing/2014/main" id="{1FF6BA44-D6EB-467D-8F06-2F45D4345F7B}"/>
               </a:ext>
             </a:extLst>
           </p:cNvPr>
@@ -12549,7 +13593,7 @@
     </p:spTree>
     <p:extLst>
       <p:ext uri="{BB962C8B-B14F-4D97-AF65-F5344CB8AC3E}">
-        <p14:creationId xmlns:p14="http://schemas.microsoft.com/office/powerpoint/2010/main" val="224529788"/>
+        <p14:creationId xmlns:p14="http://schemas.microsoft.com/office/powerpoint/2010/main" val="1210615775"/>
       </p:ext>
     </p:extLst>
   </p:cSld>
@@ -12585,10 +13629,10 @@
       </p:grpSpPr>
       <p:sp>
         <p:nvSpPr>
-          <p:cNvPr id="10" name="slide-title">
-            <a:extLst xmlns:a="http://schemas.openxmlformats.org/drawingml/2006/main">
-              <a:ext uri="{FF2B5EF4-FFF2-40B4-BE49-F238E27FC236}">
-                <a16:creationId xmlns:a16="http://schemas.microsoft.com/office/drawing/2014/main" id="{0BA602EE-196D-4CF7-919D-853E28D24B92}"/>
+          <p:cNvPr id="12" name="slide-title">
+            <a:extLst xmlns:a="http://schemas.openxmlformats.org/drawingml/2006/main">
+              <a:ext uri="{FF2B5EF4-FFF2-40B4-BE49-F238E27FC236}">
+                <a16:creationId xmlns:a16="http://schemas.microsoft.com/office/drawing/2014/main" id="{FE14C4BB-89D6-433F-9111-172AF5DAF495}"/>
               </a:ext>
             </a:extLst>
           </p:cNvPr>
@@ -12639,7 +13683,7 @@
           <p:cNvPr id="2" name="visual-claim">
             <a:extLst xmlns:a="http://schemas.openxmlformats.org/drawingml/2006/main">
               <a:ext uri="{FF2B5EF4-FFF2-40B4-BE49-F238E27FC236}">
-                <a16:creationId xmlns:a16="http://schemas.microsoft.com/office/drawing/2014/main" id="{0AC85F8D-8E33-453F-8611-239C07A7FFFD}"/>
+                <a16:creationId xmlns:a16="http://schemas.microsoft.com/office/drawing/2014/main" id="{5C95A729-BBD0-4B7D-9D07-3943AD737831}"/>
               </a:ext>
             </a:extLst>
           </p:cNvPr>
@@ -12690,7 +13734,7 @@
           <p:cNvPr id="3" name="image-surface">
             <a:extLst xmlns:a="http://schemas.openxmlformats.org/drawingml/2006/main">
               <a:ext uri="{FF2B5EF4-FFF2-40B4-BE49-F238E27FC236}">
-                <a16:creationId xmlns:a16="http://schemas.microsoft.com/office/drawing/2014/main" id="{E602683F-B304-4245-ACE6-03EDDF41C591}"/>
+                <a16:creationId xmlns:a16="http://schemas.microsoft.com/office/drawing/2014/main" id="{4A49716C-61C5-42C0-A1AC-6F16B93BA854}"/>
               </a:ext>
             </a:extLst>
           </p:cNvPr>
@@ -12724,14 +13768,14 @@
       </p:sp>
       <p:pic>
         <p:nvPicPr>
-          <p:cNvPr id="15" name="" descr="Figura oficial da documentação dbt usada para explicar: A arquitetura oficial mostra múltiplos consumidores — O servidor conecta ativos dbt a diferentes fluxos de agente.."/>
+          <p:cNvPr id="18" name="" descr="Figura oficial da documentação dbt usada para explicar: A arquitetura oficial mostra múltiplos consumidores — O servidor conecta ativos dbt a diferentes fluxos de agente.."/>
           <p:cNvPicPr>
             <a:picLocks xmlns:a="http://schemas.openxmlformats.org/drawingml/2006/main" noChangeAspect="1"/>
           </p:cNvPicPr>
           <p:nvPr/>
         </p:nvPicPr>
         <p:blipFill>
-          <a:blip xmlns:r="http://schemas.openxmlformats.org/officeDocument/2006/relationships" xmlns:a="http://schemas.openxmlformats.org/drawingml/2006/main" r:embed="R33f25d3bdf0d4c79"/>
+          <a:blip xmlns:r="http://schemas.openxmlformats.org/officeDocument/2006/relationships" xmlns:a="http://schemas.openxmlformats.org/drawingml/2006/main" r:embed="Rea4668c0015b449a"/>
           <a:stretch xmlns:a="http://schemas.openxmlformats.org/drawingml/2006/main"/>
         </p:blipFill>
         <p:spPr>
@@ -12749,7 +13793,7 @@
           <p:cNvPr id="5" name="image-caption">
             <a:extLst xmlns:a="http://schemas.openxmlformats.org/drawingml/2006/main">
               <a:ext uri="{FF2B5EF4-FFF2-40B4-BE49-F238E27FC236}">
-                <a16:creationId xmlns:a16="http://schemas.microsoft.com/office/drawing/2014/main" id="{E0019E11-86B4-443E-BBD5-644BD68864B6}"/>
+                <a16:creationId xmlns:a16="http://schemas.microsoft.com/office/drawing/2014/main" id="{F584FBD7-85C1-49C5-964D-5F080C1EFF23}"/>
               </a:ext>
             </a:extLst>
           </p:cNvPr>
@@ -12800,7 +13844,7 @@
           <p:cNvPr id="6" name="eyebrow">
             <a:extLst xmlns:a="http://schemas.openxmlformats.org/drawingml/2006/main">
               <a:ext uri="{FF2B5EF4-FFF2-40B4-BE49-F238E27FC236}">
-                <a16:creationId xmlns:a16="http://schemas.microsoft.com/office/drawing/2014/main" id="{B2023653-453C-4B49-8316-2C0C30A8524B}"/>
+                <a16:creationId xmlns:a16="http://schemas.microsoft.com/office/drawing/2014/main" id="{81305275-5AE0-4E40-B462-EA743722B226}"/>
               </a:ext>
             </a:extLst>
           </p:cNvPr>
@@ -12848,10 +13892,69 @@
       </p:sp>
       <p:sp>
         <p:nvSpPr>
-          <p:cNvPr id="7" name="footer-rule">
-            <a:extLst xmlns:a="http://schemas.openxmlformats.org/drawingml/2006/main">
-              <a:ext uri="{FF2B5EF4-FFF2-40B4-BE49-F238E27FC236}">
-                <a16:creationId xmlns:a16="http://schemas.microsoft.com/office/drawing/2014/main" id="{8427E15C-CCF2-4BE0-ADB5-1F496F5DEFEA}"/>
+          <p:cNvPr id="7" name="rescue-point-logo-background">
+            <a:extLst xmlns:a="http://schemas.openxmlformats.org/drawingml/2006/main">
+              <a:ext uri="{FF2B5EF4-FFF2-40B4-BE49-F238E27FC236}">
+                <a16:creationId xmlns:a16="http://schemas.microsoft.com/office/drawing/2014/main" id="{1EA6B798-0DDC-4167-8C84-DCA3B9CC2616}"/>
+              </a:ext>
+            </a:extLst>
+          </p:cNvPr>
+          <p:cNvSpPr>
+            <a:spLocks xmlns:a="http://schemas.openxmlformats.org/drawingml/2006/main" noGrp="1"/>
+          </p:cNvSpPr>
+          <p:nvPr/>
+        </p:nvSpPr>
+        <p:spPr>
+          <a:xfrm xmlns:a="http://schemas.openxmlformats.org/drawingml/2006/main">
+            <a:off x="9772650" y="133350"/>
+            <a:ext cx="1733550" cy="457200"/>
+          </a:xfrm>
+          <a:prstGeom xmlns:a="http://schemas.openxmlformats.org/drawingml/2006/main" prst="roundRect">
+            <a:avLst>
+              <a:gd name="adj" fmla="val 16667"/>
+            </a:avLst>
+          </a:prstGeom>
+          <a:solidFill xmlns:a="http://schemas.openxmlformats.org/drawingml/2006/main">
+            <a:srgbClr val="06142E"/>
+          </a:solidFill>
+          <a:ln xmlns:a="http://schemas.openxmlformats.org/drawingml/2006/main" w="9525">
+            <a:solidFill>
+              <a:srgbClr val="1EC5FF">
+                <a:alpha val="33333"/>
+              </a:srgbClr>
+            </a:solidFill>
+            <a:prstDash val="solid"/>
+          </a:ln>
+        </p:spPr>
+      </p:sp>
+      <p:pic>
+        <p:nvPicPr>
+          <p:cNvPr id="22" name="" descr="Figura oficial da documentação dbt usada para explicar: A arquitetura oficial mostra múltiplos consumidores — O servidor conecta ativos dbt a diferentes fluxos de agente.."/>
+          <p:cNvPicPr>
+            <a:picLocks xmlns:a="http://schemas.openxmlformats.org/drawingml/2006/main" noChangeAspect="1"/>
+          </p:cNvPicPr>
+          <p:nvPr/>
+        </p:nvPicPr>
+        <p:blipFill>
+          <a:blip xmlns:r="http://schemas.openxmlformats.org/officeDocument/2006/relationships" xmlns:a="http://schemas.openxmlformats.org/drawingml/2006/main" r:embed="R157afff213674312"/>
+          <a:stretch xmlns:a="http://schemas.openxmlformats.org/drawingml/2006/main"/>
+        </p:blipFill>
+        <p:spPr>
+          <a:xfrm xmlns:a="http://schemas.openxmlformats.org/drawingml/2006/main">
+            <a:off x="9893718" y="209550"/>
+            <a:ext cx="1491414" cy="323850"/>
+          </a:xfrm>
+          <a:prstGeom xmlns:a="http://schemas.openxmlformats.org/drawingml/2006/main" prst="rect">
+            <a:avLst/>
+          </a:prstGeom>
+        </p:spPr>
+      </p:pic>
+      <p:sp>
+        <p:nvSpPr>
+          <p:cNvPr id="9" name="footer-rule">
+            <a:extLst xmlns:a="http://schemas.openxmlformats.org/drawingml/2006/main">
+              <a:ext uri="{FF2B5EF4-FFF2-40B4-BE49-F238E27FC236}">
+                <a16:creationId xmlns:a16="http://schemas.microsoft.com/office/drawing/2014/main" id="{716FD17D-147E-49B0-8A1F-2F9D332492F0}"/>
               </a:ext>
             </a:extLst>
           </p:cNvPr>
@@ -12881,10 +13984,10 @@
       </p:sp>
       <p:sp>
         <p:nvSpPr>
-          <p:cNvPr id="8" name="footer">
-            <a:extLst xmlns:a="http://schemas.openxmlformats.org/drawingml/2006/main">
-              <a:ext uri="{FF2B5EF4-FFF2-40B4-BE49-F238E27FC236}">
-                <a16:creationId xmlns:a16="http://schemas.microsoft.com/office/drawing/2014/main" id="{B84D2C2F-55BC-4130-8B6A-B4DA75DC2692}"/>
+          <p:cNvPr id="10" name="footer">
+            <a:extLst xmlns:a="http://schemas.openxmlformats.org/drawingml/2006/main">
+              <a:ext uri="{FF2B5EF4-FFF2-40B4-BE49-F238E27FC236}">
+                <a16:creationId xmlns:a16="http://schemas.microsoft.com/office/drawing/2014/main" id="{12E44DE8-BD05-4678-AEE6-0A514181A2F7}"/>
               </a:ext>
             </a:extLst>
           </p:cNvPr>
@@ -12936,10 +14039,10 @@
       </p:sp>
       <p:sp>
         <p:nvSpPr>
-          <p:cNvPr id="9" name="page-number">
-            <a:extLst xmlns:a="http://schemas.openxmlformats.org/drawingml/2006/main">
-              <a:ext uri="{FF2B5EF4-FFF2-40B4-BE49-F238E27FC236}">
-                <a16:creationId xmlns:a16="http://schemas.microsoft.com/office/drawing/2014/main" id="{D87E4995-D785-4C8D-AF08-744D87C60AAC}"/>
+          <p:cNvPr id="11" name="page-number">
+            <a:extLst xmlns:a="http://schemas.openxmlformats.org/drawingml/2006/main">
+              <a:ext uri="{FF2B5EF4-FFF2-40B4-BE49-F238E27FC236}">
+                <a16:creationId xmlns:a16="http://schemas.microsoft.com/office/drawing/2014/main" id="{EB9D9C7A-9F35-456A-8E3E-B14FBA3477CB}"/>
               </a:ext>
             </a:extLst>
           </p:cNvPr>
@@ -12992,7 +14095,7 @@
     </p:spTree>
     <p:extLst>
       <p:ext uri="{BB962C8B-B14F-4D97-AF65-F5344CB8AC3E}">
-        <p14:creationId xmlns:p14="http://schemas.microsoft.com/office/powerpoint/2010/main" val="759031121"/>
+        <p14:creationId xmlns:p14="http://schemas.microsoft.com/office/powerpoint/2010/main" val="219861632"/>
       </p:ext>
     </p:extLst>
   </p:cSld>
@@ -13028,10 +14131,10 @@
       </p:grpSpPr>
       <p:sp>
         <p:nvSpPr>
-          <p:cNvPr id="11" name="slide-title">
-            <a:extLst xmlns:a="http://schemas.openxmlformats.org/drawingml/2006/main">
-              <a:ext uri="{FF2B5EF4-FFF2-40B4-BE49-F238E27FC236}">
-                <a16:creationId xmlns:a16="http://schemas.microsoft.com/office/drawing/2014/main" id="{7AED3B64-7D11-44E1-9065-58A341FFC963}"/>
+          <p:cNvPr id="13" name="slide-title">
+            <a:extLst xmlns:a="http://schemas.openxmlformats.org/drawingml/2006/main">
+              <a:ext uri="{FF2B5EF4-FFF2-40B4-BE49-F238E27FC236}">
+                <a16:creationId xmlns:a16="http://schemas.microsoft.com/office/drawing/2014/main" id="{4A2A49A5-B81C-4508-8EF7-33B12F17DA8D}"/>
               </a:ext>
             </a:extLst>
           </p:cNvPr>
@@ -13082,7 +14185,7 @@
           <p:cNvPr id="2" name="slide-subtitle">
             <a:extLst xmlns:a="http://schemas.openxmlformats.org/drawingml/2006/main">
               <a:ext uri="{FF2B5EF4-FFF2-40B4-BE49-F238E27FC236}">
-                <a16:creationId xmlns:a16="http://schemas.microsoft.com/office/drawing/2014/main" id="{3F2E23B5-0322-4925-BAB1-4E7AC11A215A}"/>
+                <a16:creationId xmlns:a16="http://schemas.microsoft.com/office/drawing/2014/main" id="{79A84F1E-7BB9-4E32-85DA-FB46CCF85D91}"/>
               </a:ext>
             </a:extLst>
           </p:cNvPr>
@@ -13133,7 +14236,7 @@
           <p:cNvPr id="3" name="bullets">
             <a:extLst xmlns:a="http://schemas.openxmlformats.org/drawingml/2006/main">
               <a:ext uri="{FF2B5EF4-FFF2-40B4-BE49-F238E27FC236}">
-                <a16:creationId xmlns:a16="http://schemas.microsoft.com/office/drawing/2014/main" id="{5554D2C4-CF15-42D3-AE55-BC84E053FACC}"/>
+                <a16:creationId xmlns:a16="http://schemas.microsoft.com/office/drawing/2014/main" id="{93E912A9-EFC0-4FB3-B855-DB7936955F9A}"/>
               </a:ext>
             </a:extLst>
           </p:cNvPr>
@@ -13238,7 +14341,7 @@
           <p:cNvPr id="4" name="ambient-glow">
             <a:extLst xmlns:a="http://schemas.openxmlformats.org/drawingml/2006/main">
               <a:ext uri="{FF2B5EF4-FFF2-40B4-BE49-F238E27FC236}">
-                <a16:creationId xmlns:a16="http://schemas.microsoft.com/office/drawing/2014/main" id="{565D0AC2-AA01-4A6E-AD05-C13BAA2C8AB9}"/>
+                <a16:creationId xmlns:a16="http://schemas.microsoft.com/office/drawing/2014/main" id="{F2DAC336-F699-4D2B-ACFA-01A8DCAEF96C}"/>
               </a:ext>
             </a:extLst>
           </p:cNvPr>
@@ -13275,7 +14378,7 @@
           <p:cNvPr id="5" name="ambient-core">
             <a:extLst xmlns:a="http://schemas.openxmlformats.org/drawingml/2006/main">
               <a:ext uri="{FF2B5EF4-FFF2-40B4-BE49-F238E27FC236}">
-                <a16:creationId xmlns:a16="http://schemas.microsoft.com/office/drawing/2014/main" id="{E9AF14FF-9CF0-4BD3-8818-96E87CCBC9B2}"/>
+                <a16:creationId xmlns:a16="http://schemas.microsoft.com/office/drawing/2014/main" id="{A09EB866-0927-4515-9B36-8841CD6E94AE}"/>
               </a:ext>
             </a:extLst>
           </p:cNvPr>
@@ -13312,7 +14415,7 @@
           <p:cNvPr id="6" name="section-number">
             <a:extLst xmlns:a="http://schemas.openxmlformats.org/drawingml/2006/main">
               <a:ext uri="{FF2B5EF4-FFF2-40B4-BE49-F238E27FC236}">
-                <a16:creationId xmlns:a16="http://schemas.microsoft.com/office/drawing/2014/main" id="{C9CBFA3D-3A4A-4B51-AAED-CDD09A653B1F}"/>
+                <a16:creationId xmlns:a16="http://schemas.microsoft.com/office/drawing/2014/main" id="{736CB1B1-1AD8-4060-88AF-B23CD43B68D3}"/>
               </a:ext>
             </a:extLst>
           </p:cNvPr>
@@ -13363,7 +14466,7 @@
           <p:cNvPr id="7" name="eyebrow">
             <a:extLst xmlns:a="http://schemas.openxmlformats.org/drawingml/2006/main">
               <a:ext uri="{FF2B5EF4-FFF2-40B4-BE49-F238E27FC236}">
-                <a16:creationId xmlns:a16="http://schemas.microsoft.com/office/drawing/2014/main" id="{B2CEF1F3-9EAD-4999-A9E9-5F627B278135}"/>
+                <a16:creationId xmlns:a16="http://schemas.microsoft.com/office/drawing/2014/main" id="{A1F7DA6F-2F63-4BAA-98C6-B8FA0E65A882}"/>
               </a:ext>
             </a:extLst>
           </p:cNvPr>
@@ -13411,10 +14514,69 @@
       </p:sp>
       <p:sp>
         <p:nvSpPr>
-          <p:cNvPr id="8" name="footer-rule">
-            <a:extLst xmlns:a="http://schemas.openxmlformats.org/drawingml/2006/main">
-              <a:ext uri="{FF2B5EF4-FFF2-40B4-BE49-F238E27FC236}">
-                <a16:creationId xmlns:a16="http://schemas.microsoft.com/office/drawing/2014/main" id="{E0F2269E-CE1D-4F95-965E-08DEEBE81540}"/>
+          <p:cNvPr id="8" name="rescue-point-logo-background">
+            <a:extLst xmlns:a="http://schemas.openxmlformats.org/drawingml/2006/main">
+              <a:ext uri="{FF2B5EF4-FFF2-40B4-BE49-F238E27FC236}">
+                <a16:creationId xmlns:a16="http://schemas.microsoft.com/office/drawing/2014/main" id="{2E92026C-DD4A-4085-8B6A-1C148D3E3F35}"/>
+              </a:ext>
+            </a:extLst>
+          </p:cNvPr>
+          <p:cNvSpPr>
+            <a:spLocks xmlns:a="http://schemas.openxmlformats.org/drawingml/2006/main" noGrp="1"/>
+          </p:cNvSpPr>
+          <p:nvPr/>
+        </p:nvSpPr>
+        <p:spPr>
+          <a:xfrm xmlns:a="http://schemas.openxmlformats.org/drawingml/2006/main">
+            <a:off x="9772650" y="133350"/>
+            <a:ext cx="1733550" cy="457200"/>
+          </a:xfrm>
+          <a:prstGeom xmlns:a="http://schemas.openxmlformats.org/drawingml/2006/main" prst="roundRect">
+            <a:avLst>
+              <a:gd name="adj" fmla="val 16667"/>
+            </a:avLst>
+          </a:prstGeom>
+          <a:solidFill xmlns:a="http://schemas.openxmlformats.org/drawingml/2006/main">
+            <a:srgbClr val="06142E"/>
+          </a:solidFill>
+          <a:ln xmlns:a="http://schemas.openxmlformats.org/drawingml/2006/main" w="9525">
+            <a:solidFill>
+              <a:srgbClr val="1EC5FF">
+                <a:alpha val="33333"/>
+              </a:srgbClr>
+            </a:solidFill>
+            <a:prstDash val="solid"/>
+          </a:ln>
+        </p:spPr>
+      </p:sp>
+      <p:pic>
+        <p:nvPicPr>
+          <p:cNvPr id="23" name="" descr="Figura oficial da documentação dbt usada para explicar: Modelo de ameaça vem antes da conexão — Leitura de metadata não deve abrir escrita ou SQL arbitrário.."/>
+          <p:cNvPicPr>
+            <a:picLocks xmlns:a="http://schemas.openxmlformats.org/drawingml/2006/main" noChangeAspect="1"/>
+          </p:cNvPicPr>
+          <p:nvPr/>
+        </p:nvPicPr>
+        <p:blipFill>
+          <a:blip xmlns:r="http://schemas.openxmlformats.org/officeDocument/2006/relationships" xmlns:a="http://schemas.openxmlformats.org/drawingml/2006/main" r:embed="R497fd70ae99b437a"/>
+          <a:stretch xmlns:a="http://schemas.openxmlformats.org/drawingml/2006/main"/>
+        </p:blipFill>
+        <p:spPr>
+          <a:xfrm xmlns:a="http://schemas.openxmlformats.org/drawingml/2006/main">
+            <a:off x="9893718" y="209550"/>
+            <a:ext cx="1491414" cy="323850"/>
+          </a:xfrm>
+          <a:prstGeom xmlns:a="http://schemas.openxmlformats.org/drawingml/2006/main" prst="rect">
+            <a:avLst/>
+          </a:prstGeom>
+        </p:spPr>
+      </p:pic>
+      <p:sp>
+        <p:nvSpPr>
+          <p:cNvPr id="10" name="footer-rule">
+            <a:extLst xmlns:a="http://schemas.openxmlformats.org/drawingml/2006/main">
+              <a:ext uri="{FF2B5EF4-FFF2-40B4-BE49-F238E27FC236}">
+                <a16:creationId xmlns:a16="http://schemas.microsoft.com/office/drawing/2014/main" id="{1DC9DBFB-32E9-4C62-9631-157324F388C1}"/>
               </a:ext>
             </a:extLst>
           </p:cNvPr>
@@ -13444,10 +14606,10 @@
       </p:sp>
       <p:sp>
         <p:nvSpPr>
-          <p:cNvPr id="9" name="footer">
-            <a:extLst xmlns:a="http://schemas.openxmlformats.org/drawingml/2006/main">
-              <a:ext uri="{FF2B5EF4-FFF2-40B4-BE49-F238E27FC236}">
-                <a16:creationId xmlns:a16="http://schemas.microsoft.com/office/drawing/2014/main" id="{334FB013-2C50-4742-A1DF-644F143F785F}"/>
+          <p:cNvPr id="11" name="footer">
+            <a:extLst xmlns:a="http://schemas.openxmlformats.org/drawingml/2006/main">
+              <a:ext uri="{FF2B5EF4-FFF2-40B4-BE49-F238E27FC236}">
+                <a16:creationId xmlns:a16="http://schemas.microsoft.com/office/drawing/2014/main" id="{E41D16B6-E6F4-4244-B56E-34457C84DE73}"/>
               </a:ext>
             </a:extLst>
           </p:cNvPr>
@@ -13499,10 +14661,10 @@
       </p:sp>
       <p:sp>
         <p:nvSpPr>
-          <p:cNvPr id="10" name="page-number">
-            <a:extLst xmlns:a="http://schemas.openxmlformats.org/drawingml/2006/main">
-              <a:ext uri="{FF2B5EF4-FFF2-40B4-BE49-F238E27FC236}">
-                <a16:creationId xmlns:a16="http://schemas.microsoft.com/office/drawing/2014/main" id="{18D1ECE8-B856-4512-ABB0-D4097D567BDD}"/>
+          <p:cNvPr id="12" name="page-number">
+            <a:extLst xmlns:a="http://schemas.openxmlformats.org/drawingml/2006/main">
+              <a:ext uri="{FF2B5EF4-FFF2-40B4-BE49-F238E27FC236}">
+                <a16:creationId xmlns:a16="http://schemas.microsoft.com/office/drawing/2014/main" id="{37156E0E-2924-4EDC-808F-82AEB9648CFA}"/>
               </a:ext>
             </a:extLst>
           </p:cNvPr>
@@ -13555,7 +14717,7 @@
     </p:spTree>
     <p:extLst>
       <p:ext uri="{BB962C8B-B14F-4D97-AF65-F5344CB8AC3E}">
-        <p14:creationId xmlns:p14="http://schemas.microsoft.com/office/powerpoint/2010/main" val="1483506415"/>
+        <p14:creationId xmlns:p14="http://schemas.microsoft.com/office/powerpoint/2010/main" val="1935927915"/>
       </p:ext>
     </p:extLst>
   </p:cSld>
@@ -13583,10 +14745,10 @@
       </p:grpSpPr>
       <p:sp>
         <p:nvSpPr>
-          <p:cNvPr id="10" name="slide-title">
-            <a:extLst xmlns:a="http://schemas.openxmlformats.org/drawingml/2006/main">
-              <a:ext uri="{FF2B5EF4-FFF2-40B4-BE49-F238E27FC236}">
-                <a16:creationId xmlns:a16="http://schemas.microsoft.com/office/drawing/2014/main" id="{698AE080-102A-461E-BF33-3713B0EBCD3A}"/>
+          <p:cNvPr id="12" name="slide-title">
+            <a:extLst xmlns:a="http://schemas.openxmlformats.org/drawingml/2006/main">
+              <a:ext uri="{FF2B5EF4-FFF2-40B4-BE49-F238E27FC236}">
+                <a16:creationId xmlns:a16="http://schemas.microsoft.com/office/drawing/2014/main" id="{A92F585A-B016-4A17-97B0-284B3426C0B7}"/>
               </a:ext>
             </a:extLst>
           </p:cNvPr>
@@ -13637,7 +14799,7 @@
           <p:cNvPr id="2" name="layer-1">
             <a:extLst xmlns:a="http://schemas.openxmlformats.org/drawingml/2006/main">
               <a:ext uri="{FF2B5EF4-FFF2-40B4-BE49-F238E27FC236}">
-                <a16:creationId xmlns:a16="http://schemas.microsoft.com/office/drawing/2014/main" id="{5252358A-2267-439C-9615-D74666BE8C26}"/>
+                <a16:creationId xmlns:a16="http://schemas.microsoft.com/office/drawing/2014/main" id="{CE6A0FDA-390E-420F-B6BE-62D99CA9E17F}"/>
               </a:ext>
             </a:extLst>
           </p:cNvPr>
@@ -13694,7 +14856,7 @@
           <p:cNvPr id="3" name="layer-2">
             <a:extLst xmlns:a="http://schemas.openxmlformats.org/drawingml/2006/main">
               <a:ext uri="{FF2B5EF4-FFF2-40B4-BE49-F238E27FC236}">
-                <a16:creationId xmlns:a16="http://schemas.microsoft.com/office/drawing/2014/main" id="{1F448E27-5A67-49C6-B6FE-B31B01A162FF}"/>
+                <a16:creationId xmlns:a16="http://schemas.microsoft.com/office/drawing/2014/main" id="{E46B2B69-8D7B-47A2-AA69-09AEB9240B71}"/>
               </a:ext>
             </a:extLst>
           </p:cNvPr>
@@ -13751,7 +14913,7 @@
           <p:cNvPr id="4" name="layer-3">
             <a:extLst xmlns:a="http://schemas.openxmlformats.org/drawingml/2006/main">
               <a:ext uri="{FF2B5EF4-FFF2-40B4-BE49-F238E27FC236}">
-                <a16:creationId xmlns:a16="http://schemas.microsoft.com/office/drawing/2014/main" id="{45A55883-081B-4E84-ABBB-ED7BCED4BD85}"/>
+                <a16:creationId xmlns:a16="http://schemas.microsoft.com/office/drawing/2014/main" id="{105F1AAC-AD66-4A3D-9826-18E2C7606445}"/>
               </a:ext>
             </a:extLst>
           </p:cNvPr>
@@ -13808,7 +14970,7 @@
           <p:cNvPr id="5" name="layer-4">
             <a:extLst xmlns:a="http://schemas.openxmlformats.org/drawingml/2006/main">
               <a:ext uri="{FF2B5EF4-FFF2-40B4-BE49-F238E27FC236}">
-                <a16:creationId xmlns:a16="http://schemas.microsoft.com/office/drawing/2014/main" id="{A63FD9B9-6236-476B-A1A6-911A33701628}"/>
+                <a16:creationId xmlns:a16="http://schemas.microsoft.com/office/drawing/2014/main" id="{18FB4BD4-7917-4CDD-AF39-64149DEB2A60}"/>
               </a:ext>
             </a:extLst>
           </p:cNvPr>
@@ -13865,7 +15027,7 @@
           <p:cNvPr id="6" name="eyebrow">
             <a:extLst xmlns:a="http://schemas.openxmlformats.org/drawingml/2006/main">
               <a:ext uri="{FF2B5EF4-FFF2-40B4-BE49-F238E27FC236}">
-                <a16:creationId xmlns:a16="http://schemas.microsoft.com/office/drawing/2014/main" id="{7A555ECC-5699-427C-9C65-E6B05F277464}"/>
+                <a16:creationId xmlns:a16="http://schemas.microsoft.com/office/drawing/2014/main" id="{0B8047A6-072B-4196-9D89-1C9E0FE78288}"/>
               </a:ext>
             </a:extLst>
           </p:cNvPr>
@@ -13913,10 +15075,69 @@
       </p:sp>
       <p:sp>
         <p:nvSpPr>
-          <p:cNvPr id="7" name="footer-rule">
-            <a:extLst xmlns:a="http://schemas.openxmlformats.org/drawingml/2006/main">
-              <a:ext uri="{FF2B5EF4-FFF2-40B4-BE49-F238E27FC236}">
-                <a16:creationId xmlns:a16="http://schemas.microsoft.com/office/drawing/2014/main" id="{89C77881-5481-4300-A10F-A6E2C6B54D23}"/>
+          <p:cNvPr id="7" name="rescue-point-logo-background">
+            <a:extLst xmlns:a="http://schemas.openxmlformats.org/drawingml/2006/main">
+              <a:ext uri="{FF2B5EF4-FFF2-40B4-BE49-F238E27FC236}">
+                <a16:creationId xmlns:a16="http://schemas.microsoft.com/office/drawing/2014/main" id="{685C5CA6-1843-4DC2-B366-0616E2758EF2}"/>
+              </a:ext>
+            </a:extLst>
+          </p:cNvPr>
+          <p:cNvSpPr>
+            <a:spLocks xmlns:a="http://schemas.openxmlformats.org/drawingml/2006/main" noGrp="1"/>
+          </p:cNvSpPr>
+          <p:nvPr/>
+        </p:nvSpPr>
+        <p:spPr>
+          <a:xfrm xmlns:a="http://schemas.openxmlformats.org/drawingml/2006/main">
+            <a:off x="9772650" y="133350"/>
+            <a:ext cx="1733550" cy="457200"/>
+          </a:xfrm>
+          <a:prstGeom xmlns:a="http://schemas.openxmlformats.org/drawingml/2006/main" prst="roundRect">
+            <a:avLst>
+              <a:gd name="adj" fmla="val 16667"/>
+            </a:avLst>
+          </a:prstGeom>
+          <a:solidFill xmlns:a="http://schemas.openxmlformats.org/drawingml/2006/main">
+            <a:srgbClr val="06142E"/>
+          </a:solidFill>
+          <a:ln xmlns:a="http://schemas.openxmlformats.org/drawingml/2006/main" w="9525">
+            <a:solidFill>
+              <a:srgbClr val="1EC5FF">
+                <a:alpha val="33333"/>
+              </a:srgbClr>
+            </a:solidFill>
+            <a:prstDash val="solid"/>
+          </a:ln>
+        </p:spPr>
+      </p:sp>
+      <p:pic>
+        <p:nvPicPr>
+          <p:cNvPr id="21" name="" descr="Figura oficial da documentação dbt usada para explicar: Modelo de ameaça vem antes da conexão — Cliente."/>
+          <p:cNvPicPr>
+            <a:picLocks xmlns:a="http://schemas.openxmlformats.org/drawingml/2006/main" noChangeAspect="1"/>
+          </p:cNvPicPr>
+          <p:nvPr/>
+        </p:nvPicPr>
+        <p:blipFill>
+          <a:blip xmlns:r="http://schemas.openxmlformats.org/officeDocument/2006/relationships" xmlns:a="http://schemas.openxmlformats.org/drawingml/2006/main" r:embed="R2f2cab63f7df4a9d"/>
+          <a:stretch xmlns:a="http://schemas.openxmlformats.org/drawingml/2006/main"/>
+        </p:blipFill>
+        <p:spPr>
+          <a:xfrm xmlns:a="http://schemas.openxmlformats.org/drawingml/2006/main">
+            <a:off x="9893718" y="209550"/>
+            <a:ext cx="1491414" cy="323850"/>
+          </a:xfrm>
+          <a:prstGeom xmlns:a="http://schemas.openxmlformats.org/drawingml/2006/main" prst="rect">
+            <a:avLst/>
+          </a:prstGeom>
+        </p:spPr>
+      </p:pic>
+      <p:sp>
+        <p:nvSpPr>
+          <p:cNvPr id="9" name="footer-rule">
+            <a:extLst xmlns:a="http://schemas.openxmlformats.org/drawingml/2006/main">
+              <a:ext uri="{FF2B5EF4-FFF2-40B4-BE49-F238E27FC236}">
+                <a16:creationId xmlns:a16="http://schemas.microsoft.com/office/drawing/2014/main" id="{D95152FA-E498-4BA8-B0A0-473348CA67A8}"/>
               </a:ext>
             </a:extLst>
           </p:cNvPr>
@@ -13946,10 +15167,10 @@
       </p:sp>
       <p:sp>
         <p:nvSpPr>
-          <p:cNvPr id="8" name="footer">
-            <a:extLst xmlns:a="http://schemas.openxmlformats.org/drawingml/2006/main">
-              <a:ext uri="{FF2B5EF4-FFF2-40B4-BE49-F238E27FC236}">
-                <a16:creationId xmlns:a16="http://schemas.microsoft.com/office/drawing/2014/main" id="{9DBCC662-6F85-434C-9368-D74CBC68F226}"/>
+          <p:cNvPr id="10" name="footer">
+            <a:extLst xmlns:a="http://schemas.openxmlformats.org/drawingml/2006/main">
+              <a:ext uri="{FF2B5EF4-FFF2-40B4-BE49-F238E27FC236}">
+                <a16:creationId xmlns:a16="http://schemas.microsoft.com/office/drawing/2014/main" id="{AE6A8971-D7D5-48A5-B256-0EAFD6462212}"/>
               </a:ext>
             </a:extLst>
           </p:cNvPr>
@@ -14001,10 +15222,10 @@
       </p:sp>
       <p:sp>
         <p:nvSpPr>
-          <p:cNvPr id="9" name="page-number">
-            <a:extLst xmlns:a="http://schemas.openxmlformats.org/drawingml/2006/main">
-              <a:ext uri="{FF2B5EF4-FFF2-40B4-BE49-F238E27FC236}">
-                <a16:creationId xmlns:a16="http://schemas.microsoft.com/office/drawing/2014/main" id="{4B6301BF-8AD5-4AC0-89AB-5AB4DDCEF620}"/>
+          <p:cNvPr id="11" name="page-number">
+            <a:extLst xmlns:a="http://schemas.openxmlformats.org/drawingml/2006/main">
+              <a:ext uri="{FF2B5EF4-FFF2-40B4-BE49-F238E27FC236}">
+                <a16:creationId xmlns:a16="http://schemas.microsoft.com/office/drawing/2014/main" id="{3EAB0442-5909-43F9-BD69-4D85865AA0F4}"/>
               </a:ext>
             </a:extLst>
           </p:cNvPr>
@@ -14057,7 +15278,7 @@
     </p:spTree>
     <p:extLst>
       <p:ext uri="{BB962C8B-B14F-4D97-AF65-F5344CB8AC3E}">
-        <p14:creationId xmlns:p14="http://schemas.microsoft.com/office/powerpoint/2010/main" val="912026501"/>
+        <p14:creationId xmlns:p14="http://schemas.microsoft.com/office/powerpoint/2010/main" val="532912067"/>
       </p:ext>
     </p:extLst>
   </p:cSld>
@@ -14085,10 +15306,10 @@
       </p:grpSpPr>
       <p:sp>
         <p:nvSpPr>
-          <p:cNvPr id="11" name="slide-title">
-            <a:extLst xmlns:a="http://schemas.openxmlformats.org/drawingml/2006/main">
-              <a:ext uri="{FF2B5EF4-FFF2-40B4-BE49-F238E27FC236}">
-                <a16:creationId xmlns:a16="http://schemas.microsoft.com/office/drawing/2014/main" id="{D1A96850-8974-448B-BA19-E5F4109ABFA1}"/>
+          <p:cNvPr id="13" name="slide-title">
+            <a:extLst xmlns:a="http://schemas.openxmlformats.org/drawingml/2006/main">
+              <a:ext uri="{FF2B5EF4-FFF2-40B4-BE49-F238E27FC236}">
+                <a16:creationId xmlns:a16="http://schemas.microsoft.com/office/drawing/2014/main" id="{149A6D0B-5E1A-4CCB-9905-86F59C40A7FA}"/>
               </a:ext>
             </a:extLst>
           </p:cNvPr>
@@ -14139,7 +15360,7 @@
           <p:cNvPr id="2" name="slide-subtitle">
             <a:extLst xmlns:a="http://schemas.openxmlformats.org/drawingml/2006/main">
               <a:ext uri="{FF2B5EF4-FFF2-40B4-BE49-F238E27FC236}">
-                <a16:creationId xmlns:a16="http://schemas.microsoft.com/office/drawing/2014/main" id="{4509BAC0-0B49-4168-897C-6509B8581E55}"/>
+                <a16:creationId xmlns:a16="http://schemas.microsoft.com/office/drawing/2014/main" id="{C83325CA-B980-490C-96CD-E3B74BF2DEC2}"/>
               </a:ext>
             </a:extLst>
           </p:cNvPr>
@@ -14190,7 +15411,7 @@
           <p:cNvPr id="3" name="bullets">
             <a:extLst xmlns:a="http://schemas.openxmlformats.org/drawingml/2006/main">
               <a:ext uri="{FF2B5EF4-FFF2-40B4-BE49-F238E27FC236}">
-                <a16:creationId xmlns:a16="http://schemas.microsoft.com/office/drawing/2014/main" id="{398599CE-F963-4F59-92F2-84B79CFE906B}"/>
+                <a16:creationId xmlns:a16="http://schemas.microsoft.com/office/drawing/2014/main" id="{2CB3B74A-D882-42D9-9064-655B20135D81}"/>
               </a:ext>
             </a:extLst>
           </p:cNvPr>
@@ -14277,7 +15498,7 @@
           <p:cNvPr id="4" name="ambient-glow">
             <a:extLst xmlns:a="http://schemas.openxmlformats.org/drawingml/2006/main">
               <a:ext uri="{FF2B5EF4-FFF2-40B4-BE49-F238E27FC236}">
-                <a16:creationId xmlns:a16="http://schemas.microsoft.com/office/drawing/2014/main" id="{75F9FF16-D184-4751-87F7-79CAE41FF5E0}"/>
+                <a16:creationId xmlns:a16="http://schemas.microsoft.com/office/drawing/2014/main" id="{1755AF35-E401-4318-9D1C-6889DB8D01FF}"/>
               </a:ext>
             </a:extLst>
           </p:cNvPr>
@@ -14314,7 +15535,7 @@
           <p:cNvPr id="5" name="ambient-core">
             <a:extLst xmlns:a="http://schemas.openxmlformats.org/drawingml/2006/main">
               <a:ext uri="{FF2B5EF4-FFF2-40B4-BE49-F238E27FC236}">
-                <a16:creationId xmlns:a16="http://schemas.microsoft.com/office/drawing/2014/main" id="{4EDB9D4B-790F-4E2B-A315-CF29E42E15E4}"/>
+                <a16:creationId xmlns:a16="http://schemas.microsoft.com/office/drawing/2014/main" id="{93C7EE7D-26CC-46B6-AD0D-8528695CA353}"/>
               </a:ext>
             </a:extLst>
           </p:cNvPr>
@@ -14351,7 +15572,7 @@
           <p:cNvPr id="6" name="section-number">
             <a:extLst xmlns:a="http://schemas.openxmlformats.org/drawingml/2006/main">
               <a:ext uri="{FF2B5EF4-FFF2-40B4-BE49-F238E27FC236}">
-                <a16:creationId xmlns:a16="http://schemas.microsoft.com/office/drawing/2014/main" id="{030BE136-221F-47AF-A819-1558C66C187C}"/>
+                <a16:creationId xmlns:a16="http://schemas.microsoft.com/office/drawing/2014/main" id="{6A0BC418-4544-43BD-A288-15650AFAB047}"/>
               </a:ext>
             </a:extLst>
           </p:cNvPr>
@@ -14402,7 +15623,7 @@
           <p:cNvPr id="7" name="eyebrow">
             <a:extLst xmlns:a="http://schemas.openxmlformats.org/drawingml/2006/main">
               <a:ext uri="{FF2B5EF4-FFF2-40B4-BE49-F238E27FC236}">
-                <a16:creationId xmlns:a16="http://schemas.microsoft.com/office/drawing/2014/main" id="{EC682ADF-EDCE-49F5-9F23-0CC57A0E7A98}"/>
+                <a16:creationId xmlns:a16="http://schemas.microsoft.com/office/drawing/2014/main" id="{1AB9022A-CFAA-48F5-8956-3742F6621716}"/>
               </a:ext>
             </a:extLst>
           </p:cNvPr>
@@ -14450,10 +15671,69 @@
       </p:sp>
       <p:sp>
         <p:nvSpPr>
-          <p:cNvPr id="8" name="footer-rule">
-            <a:extLst xmlns:a="http://schemas.openxmlformats.org/drawingml/2006/main">
-              <a:ext uri="{FF2B5EF4-FFF2-40B4-BE49-F238E27FC236}">
-                <a16:creationId xmlns:a16="http://schemas.microsoft.com/office/drawing/2014/main" id="{4A0A1801-70D8-4F46-94C6-2F3485DCC6E0}"/>
+          <p:cNvPr id="8" name="rescue-point-logo-background">
+            <a:extLst xmlns:a="http://schemas.openxmlformats.org/drawingml/2006/main">
+              <a:ext uri="{FF2B5EF4-FFF2-40B4-BE49-F238E27FC236}">
+                <a16:creationId xmlns:a16="http://schemas.microsoft.com/office/drawing/2014/main" id="{CC4B8F68-0838-43BD-9409-26F27E2EFC52}"/>
+              </a:ext>
+            </a:extLst>
+          </p:cNvPr>
+          <p:cNvSpPr>
+            <a:spLocks xmlns:a="http://schemas.openxmlformats.org/drawingml/2006/main" noGrp="1"/>
+          </p:cNvSpPr>
+          <p:nvPr/>
+        </p:nvSpPr>
+        <p:spPr>
+          <a:xfrm xmlns:a="http://schemas.openxmlformats.org/drawingml/2006/main">
+            <a:off x="9772650" y="133350"/>
+            <a:ext cx="1733550" cy="457200"/>
+          </a:xfrm>
+          <a:prstGeom xmlns:a="http://schemas.openxmlformats.org/drawingml/2006/main" prst="roundRect">
+            <a:avLst>
+              <a:gd name="adj" fmla="val 16667"/>
+            </a:avLst>
+          </a:prstGeom>
+          <a:solidFill xmlns:a="http://schemas.openxmlformats.org/drawingml/2006/main">
+            <a:srgbClr val="06142E"/>
+          </a:solidFill>
+          <a:ln xmlns:a="http://schemas.openxmlformats.org/drawingml/2006/main" w="9525">
+            <a:solidFill>
+              <a:srgbClr val="1EC5FF">
+                <a:alpha val="33333"/>
+              </a:srgbClr>
+            </a:solidFill>
+            <a:prstDash val="solid"/>
+          </a:ln>
+        </p:spPr>
+      </p:sp>
+      <p:pic>
+        <p:nvPicPr>
+          <p:cNvPr id="23" name="" descr="Figura oficial da documentação dbt usada para explicar: Allowlist é uma política executável — Manifest, docs e linhagem entram; SQL e codegen ficam fora.."/>
+          <p:cNvPicPr>
+            <a:picLocks xmlns:a="http://schemas.openxmlformats.org/drawingml/2006/main" noChangeAspect="1"/>
+          </p:cNvPicPr>
+          <p:nvPr/>
+        </p:nvPicPr>
+        <p:blipFill>
+          <a:blip xmlns:r="http://schemas.openxmlformats.org/officeDocument/2006/relationships" xmlns:a="http://schemas.openxmlformats.org/drawingml/2006/main" r:embed="Re76666c9b61047ef"/>
+          <a:stretch xmlns:a="http://schemas.openxmlformats.org/drawingml/2006/main"/>
+        </p:blipFill>
+        <p:spPr>
+          <a:xfrm xmlns:a="http://schemas.openxmlformats.org/drawingml/2006/main">
+            <a:off x="9893718" y="209550"/>
+            <a:ext cx="1491414" cy="323850"/>
+          </a:xfrm>
+          <a:prstGeom xmlns:a="http://schemas.openxmlformats.org/drawingml/2006/main" prst="rect">
+            <a:avLst/>
+          </a:prstGeom>
+        </p:spPr>
+      </p:pic>
+      <p:sp>
+        <p:nvSpPr>
+          <p:cNvPr id="10" name="footer-rule">
+            <a:extLst xmlns:a="http://schemas.openxmlformats.org/drawingml/2006/main">
+              <a:ext uri="{FF2B5EF4-FFF2-40B4-BE49-F238E27FC236}">
+                <a16:creationId xmlns:a16="http://schemas.microsoft.com/office/drawing/2014/main" id="{88AD7922-ED10-42EC-A853-424D2F4C29BB}"/>
               </a:ext>
             </a:extLst>
           </p:cNvPr>
@@ -14483,10 +15763,10 @@
       </p:sp>
       <p:sp>
         <p:nvSpPr>
-          <p:cNvPr id="9" name="footer">
-            <a:extLst xmlns:a="http://schemas.openxmlformats.org/drawingml/2006/main">
-              <a:ext uri="{FF2B5EF4-FFF2-40B4-BE49-F238E27FC236}">
-                <a16:creationId xmlns:a16="http://schemas.microsoft.com/office/drawing/2014/main" id="{ACCBBB80-6E5A-4017-A91A-F846D64ECFDC}"/>
+          <p:cNvPr id="11" name="footer">
+            <a:extLst xmlns:a="http://schemas.openxmlformats.org/drawingml/2006/main">
+              <a:ext uri="{FF2B5EF4-FFF2-40B4-BE49-F238E27FC236}">
+                <a16:creationId xmlns:a16="http://schemas.microsoft.com/office/drawing/2014/main" id="{777FFA64-8EA8-4609-BAE8-1BE34F3A1A57}"/>
               </a:ext>
             </a:extLst>
           </p:cNvPr>
@@ -14538,10 +15818,10 @@
       </p:sp>
       <p:sp>
         <p:nvSpPr>
-          <p:cNvPr id="10" name="page-number">
-            <a:extLst xmlns:a="http://schemas.openxmlformats.org/drawingml/2006/main">
-              <a:ext uri="{FF2B5EF4-FFF2-40B4-BE49-F238E27FC236}">
-                <a16:creationId xmlns:a16="http://schemas.microsoft.com/office/drawing/2014/main" id="{52CA6A13-BD1B-4668-A865-05F967888075}"/>
+          <p:cNvPr id="12" name="page-number">
+            <a:extLst xmlns:a="http://schemas.openxmlformats.org/drawingml/2006/main">
+              <a:ext uri="{FF2B5EF4-FFF2-40B4-BE49-F238E27FC236}">
+                <a16:creationId xmlns:a16="http://schemas.microsoft.com/office/drawing/2014/main" id="{E846F98B-3BC2-4BC5-ACD7-2283D326E051}"/>
               </a:ext>
             </a:extLst>
           </p:cNvPr>
@@ -14594,7 +15874,7 @@
     </p:spTree>
     <p:extLst>
       <p:ext uri="{BB962C8B-B14F-4D97-AF65-F5344CB8AC3E}">
-        <p14:creationId xmlns:p14="http://schemas.microsoft.com/office/powerpoint/2010/main" val="662751123"/>
+        <p14:creationId xmlns:p14="http://schemas.microsoft.com/office/powerpoint/2010/main" val="542411417"/>
       </p:ext>
     </p:extLst>
   </p:cSld>
